--- a/docs/presentations/SecantusDB-overview.pptx
+++ b/docs/presentations/SecantusDB-overview.pptx
@@ -35,7 +35,7 @@
     <p:sldId id="283" r:id="rId34"/>
     <p:sldId id="284" r:id="rId35"/>
     <p:sldId id="285" r:id="rId36"/>
-    <p:sldId id="286" r:id="rId38"/>
+    <p:sldId id="286" r:id="rId37"/>
     <p:sldId id="287" r:id="rId39"/>
     <p:sldId id="288" r:id="rId40"/>
     <p:sldId id="289" r:id="rId41"/>
@@ -62,6 +62,8 @@
     <p:sldId id="310" r:id="rId62"/>
     <p:sldId id="311" r:id="rId63"/>
     <p:sldId id="312" r:id="rId64"/>
+    <p:sldId id="313" r:id="rId65"/>
+    <p:sldId id="314" r:id="rId66"/>
   </p:sldIdLst>
   <p:sldSz cx="12191695" cy="6858000" type="screen4x3"/>
   <p:notesSz cx="6858000" cy="9144000"/>
@@ -827,7 +829,7 @@
           <a:lstStyle/>
           <a:p>
             <a:r>
-              <a:t>In scope: the subset of the wire protocol drivers actually emit — handshake, CRUD, cursors, aggregation, findAndModify, change streams. Out of scope: anything that only makes sense across nodes. One nuance: hello advertises a single-node 'replica-set primary' so the driver's change-stream machinery is satisfied — but the topology is fictional.</a:t>
+              <a:t>One: 'correct' means a driver client can't distinguish us from mongod — when unsure, run the same code against both and assert equal responses. Two: we'd rather return a faithful 'not supported' than a half-feature that silently diverges. Three: ergonomics — embedding it is trivial, no processes to manage.</a:t>
             </a:r>
           </a:p>
         </p:txBody>
@@ -897,7 +899,7 @@
           <a:lstStyle/>
           <a:p>
             <a:r>
-              <a:t>Walk the layers; the key idea is strict separation — each knows only the one below.</a:t>
+              <a:t>In scope: the subset of the wire protocol drivers actually emit — handshake, CRUD, cursors, aggregation, findAndModify, change streams. Out of scope: anything that only makes sense across nodes. One nuance: hello advertises a single-node 'replica-set primary' so the driver's change-stream machinery is satisfied — but the topology is fictional.</a:t>
             </a:r>
           </a:p>
         </p:txBody>
@@ -967,7 +969,7 @@
           <a:lstStyle/>
           <a:p>
             <a:r>
-              <a:t>server.py owns the accept loop and per-connection threads. wire.py speaks bytes and never knows about commands. commands.py is a single dispatch table and never knows about storage. The operator engines are pure — documents in, documents out, no I/O — which is exactly what made the Rust port tractable. storage.py sits on WiredTiger. A request flows down; the BSON reply flows back up.</a:t>
+              <a:t>Walk the layers; the key idea is strict separation — each knows only the one below.</a:t>
             </a:r>
           </a:p>
         </p:txBody>
@@ -1037,7 +1039,7 @@
           <a:lstStyle/>
           <a:p>
             <a:r>
-              <a:t>Documents are stored as opaque BSON blobs — never JSON, never native columns. The storage layer never inspects content. ObjectId, Decimal128, int32-vs-int64, Date-with-tz, Binary, Regex must round-trip exactly, because 'a driver can't tell us apart' depends on it. sortkey.py turns BSON values into byte-sortable keys matching MongoDB's cross-type order.</a:t>
+              <a:t>server.py owns the accept loop and per-connection threads. wire.py speaks bytes and never knows about commands. commands.py is a single dispatch table and never knows about storage. The operator engines are pure — documents in, documents out, no I/O — which is exactly what made the Rust port tractable. storage.py sits on WiredTiger. A request flows down; the BSON reply flows back up.</a:t>
             </a:r>
           </a:p>
         </p:txBody>
@@ -1107,7 +1109,7 @@
           <a:lstStyle/>
           <a:p>
             <a:r>
-              <a:t>WiredTiger is MongoDB's own storage engine, vendored and built into self-contained wheels — users just pip install, no cmake or swig. Four tables: collections, documents, indexes, index-entries. Documents are keyed by a byte-sortable _id so iteration matches mongod's natural order. ':memory:' maps to an in-memory temp dir removed on close.</a:t>
+              <a:t>Documents are stored as opaque BSON blobs — never JSON, never native columns. The storage layer never inspects content. ObjectId, Decimal128, int32-vs-int64, Date-with-tz, Binary, Regex must round-trip exactly, because 'a driver can't tell us apart' depends on it. sortkey.py turns BSON values into byte-sortable keys matching MongoDB's cross-type order.</a:t>
             </a:r>
           </a:p>
         </p:txBody>
@@ -1177,7 +1179,7 @@
           <a:lstStyle/>
           <a:p>
             <a:r>
-              <a:t>Indexing is surprisingly complete: single-field and compound with a trailing range, multikey for arrays, partial and TTL indexes, and geospatial — 2d geohash and 2dsphere via S2 cell coverings. A planner chooses index-scan vs collection-scan and explain reports the winning plan. Missing by choice: collation and text/hashed/wildcard indexes.</a:t>
+              <a:t>WiredTiger is MongoDB's own storage engine, vendored and built into self-contained wheels — users just pip install, no cmake or swig. Four tables: collections, documents, indexes, index-entries. Documents are keyed by a byte-sortable _id so iteration matches mongod's natural order. ':memory:' maps to an in-memory temp dir removed on close.</a:t>
             </a:r>
           </a:p>
         </p:txBody>
@@ -1247,7 +1249,7 @@
           <a:lstStyle/>
           <a:p>
             <a:r>
-              <a:t>The most ambitious feature: a real oplog whose entries mirror mongod's shape, scoped to a collection, database, or cluster. Resume tokens let a client resume exactly. updateLookup full documents, before-change pre-images, awaitData blocking (getMore parks until a writer notifies), and invalidate events on drop/rename. This is what the fictional single-node 'primary' buys us.</a:t>
+              <a:t>Indexing is surprisingly complete: single-field and compound with a trailing range, multikey for arrays, partial and TTL indexes, and geospatial — 2d geohash and 2dsphere via S2 cell coverings. A planner chooses index-scan vs collection-scan and explain reports the winning plan. Missing by choice: collation and text/hashed/wildcard indexes.</a:t>
             </a:r>
           </a:p>
         </p:txBody>
@@ -1317,7 +1319,7 @@
           <a:lstStyle/>
           <a:p>
             <a:r>
-              <a:t>The credibility of the project rests here: we don't trust our own tests, we run the drivers'.</a:t>
+              <a:t>The most ambitious feature: a real oplog whose entries mirror mongod's shape, scoped to a collection, database, or cluster. Resume tokens let a client resume exactly. updateLookup full documents, before-change pre-images, awaitData blocking (getMore parks until a writer notifies), and invalidate events on drop/rename. This is what the fictional single-node 'primary' buys us.</a:t>
             </a:r>
           </a:p>
         </p:txBody>
@@ -1387,7 +1389,7 @@
           <a:lstStyle/>
           <a:p>
             <a:r>
-              <a:t>We run real, unmodified upstream driver test suites against SecantusDB. Five gauges: pymongo embedded (the headline 'MongoDB compatibility' number) plus the Go, Node, Java and Ruby drivers as real clients over the wire. The other-language drivers catch wire-protocol bugs pymongo is too permissive to notice — like requiring a real int64 cursor id. The default suite runs against on-disk WiredTiger in parallel; CI is load-bearing.</a:t>
+              <a:t>The credibility of the project rests here: we don't trust our own tests, we run the drivers'.</a:t>
             </a:r>
           </a:p>
         </p:txBody>
@@ -1457,7 +1459,7 @@
           <a:lstStyle/>
           <a:p>
             <a:r>
-              <a:t>Pivot from 'what it is' to 'how it got here and where it's going'.</a:t>
+              <a:t>We run real, unmodified upstream driver test suites against SecantusDB. Five gauges: pymongo embedded (the headline 'MongoDB compatibility' number) plus the Go, Node, Java and Ruby drivers as real clients over the wire. The other-language drivers catch wire-protocol bugs pymongo is too permissive to notice — like requiring a real int64 cursor id. The default suite runs against on-disk WiredTiger in parallel; CI is load-bearing.</a:t>
             </a:r>
           </a:p>
         </p:txBody>
@@ -1597,7 +1599,7 @@
           <a:lstStyle/>
           <a:p>
             <a:r>
-              <a:t>From the prototype that proved the protocol, to a real server, to vendoring WiredTiger for true storage fidelity, then breadth (aggregation, indexing, geo), then change streams, then the multi-driver gauges and packaging. The chapter in flight is the Rust acceleration core.</a:t>
+              <a:t>Pivot from 'what it is' to 'how it got here and where it's going'.</a:t>
             </a:r>
           </a:p>
         </p:txBody>
@@ -1667,7 +1669,7 @@
           <a:lstStyle/>
           <a:p>
             <a:r>
-              <a:t>Two bottlenecks: the operator engines run hot in Python, and the GIL serialises work across connections. A Rust core does the heavy lifting off the GIL, unlocking cores. The firm rule: BOTH engines are permanent — the pure-Python engine stays the default and never goes away; Rust is an opt-in accelerator that must reproduce Python exactly.</a:t>
+              <a:t>From the prototype that proved the protocol, to a real server, to vendoring WiredTiger for true storage fidelity, then breadth (aggregation, indexing, geo), then change streams, then the multi-driver gauges and packaging. The chapter in flight is the Rust acceleration core.</a:t>
             </a:r>
           </a:p>
         </p:txBody>
@@ -1737,7 +1739,7 @@
           <a:lstStyle/>
           <a:p>
             <a:r>
-              <a:t>An optional PyO3/maturin extension. Values cross as BSON bytes — a 'fat byte seam' — keeping the opaque-BSON design intact and avoiding per-field marshalling. Crucially, when Rust hits anything it can't reproduce exactly it signals fallback and the authoritative Python path runs, so it's always correct. Every engine is pinned by a curated-plus-fuzz parity suite asserting Rust equals Python byte-for-byte.</a:t>
+              <a:t>Two bottlenecks: the operator engines run hot in Python, and the GIL serialises work across connections. A Rust core does the heavy lifting off the GIL, unlocking cores. The firm rule: BOTH engines are permanent — the pure-Python engine stays the default and never goes away; Rust is an opt-in accelerator that must reproduce Python exactly.</a:t>
             </a:r>
           </a:p>
         </p:txBody>
@@ -1807,7 +1809,7 @@
           <a:lstStyle/>
           <a:p>
             <a:r>
-              <a:t>Done: de-risking spikes; all six pure leaf engines (sortkey, query, update, expressions, projection, diff) plus collation; and the whole storage-independent aggregation pipeline — match, project, group, sort, unwind, bucket, facet, densify and the rest. 515 parity cases green across curated corpora and multi-seed fuzzing. Still in Python because they need storage: $lookup, $geoNear, $out, $merge, and storage itself.</a:t>
+              <a:t>An optional PyO3/maturin extension. Values cross as BSON bytes — a 'fat byte seam' — keeping the opaque-BSON design intact and avoiding per-field marshalling. Crucially, when Rust hits anything it can't reproduce exactly it signals fallback and the authoritative Python path runs, so it's always correct. Every engine is pinned by a curated-plus-fuzz parity suite asserting Rust equals Python byte-for-byte.</a:t>
             </a:r>
           </a:p>
         </p:txBody>
@@ -1877,7 +1879,7 @@
           <a:lstStyle/>
           <a:p>
             <a:r>
-              <a:t>Single-threaded the Rust path is ~2× faster on CRUD ops and ~8× on a full pipeline — even paying the byte seam. But per-call across threads the GIL ping-pongs on tiny ops and throughput regresses. The fix is batching: one call filters or updates a whole list under a single GIL release, turning the regression into ~10–12× more throughput on four threads. Lesson: the win is releasing the GIL and coarsening the seam, not micro-optimising operators. Numbers from a 4-core dev box; the real proof is a concurrent-connection server benchmark.</a:t>
+              <a:t>Done: de-risking spikes; all six pure leaf engines (sortkey, query, update, expressions, projection, diff) plus collation; and the whole storage-independent aggregation pipeline — match, project, group, sort, unwind, bucket, facet, densify and the rest. 515 parity cases green across curated corpora and multi-seed fuzzing. Still in Python because they need storage: $lookup, $geoNear, $out, $merge, and storage itself.</a:t>
             </a:r>
           </a:p>
         </p:txBody>
@@ -1947,7 +1949,7 @@
           <a:lstStyle/>
           <a:p>
             <a:r>
-              <a:t>Land the plane: what's left, and the one-screen summary.</a:t>
+              <a:t>Single-threaded the Rust path is ~2× faster on CRUD ops and ~8× on a full pipeline — even paying the byte seam. But per-call across threads the GIL ping-pongs on tiny ops and throughput regresses. The fix is batching: one call filters or updates a whole list under a single GIL release, turning the regression into ~10–12× more throughput on four threads. Lesson: the win is releasing the GIL and coarsening the seam, not micro-optimising operators. Numbers from a 4-core dev box; the real proof is a concurrent-connection server benchmark.</a:t>
             </a:r>
           </a:p>
         </p:txBody>
@@ -2017,7 +2019,7 @@
           <a:lstStyle/>
           <a:p>
             <a:r>
-              <a:t>Next: wire the batched seam into storage's scan / update / projection loops; port the storage layer onto a WiredTiger FFI (the largest single step, sub-phased by table family); then move wire and dispatch into Rust so a request never re-enters Python; finish with packaging and a full conformance and performance sign-off. The invariant throughout: the compatibility number must not regress.</a:t>
+              <a:t>Land the plane: what's left, and the one-screen summary.</a:t>
             </a:r>
           </a:p>
         </p:txBody>
@@ -2087,7 +2089,7 @@
           <a:lstStyle/>
           <a:p>
             <a:r>
-              <a:t>To close: SecantusDB is an embeddable, in-process MongoDB-compatible server — the SQLite of document databases — useful far beyond testing. Fidelity comes from opaque BSON plus real WiredTiger plus the driver as conformance target; honesty from five gauges and load-bearing CI. The Rust core adds speed without giving up Python — both ship, parity-pinned. And the performance lesson generalises: release the GIL and batch the boundary.</a:t>
+              <a:t>Next: wire the batched seam into storage's scan / update / projection loops; port the storage layer onto a WiredTiger FFI (the largest single step, sub-phased by table family); then move wire and dispatch into Rust so a request never re-enters Python; finish with packaging and a full conformance and performance sign-off. The invariant throughout: the compatibility number must not regress.</a:t>
             </a:r>
           </a:p>
         </p:txBody>
@@ -2157,6 +2159,76 @@
           <a:lstStyle/>
           <a:p>
             <a:r>
+              <a:t>To close: SecantusDB is a MongoDB-compatible server — the SQLite of document databases — that you embed in-process OR run standalone, useful far beyond testing. Because it's a faithful wire-protocol server, Compass, mongosh and mongodump/mongorestore all just work. Fidelity comes from opaque BSON plus real WiredTiger plus the driver as conformance target; honesty from five gauges and load-bearing CI. The Rust core adds speed without giving up Python — both ship, parity-pinned. And the performance lesson generalises: release the GIL and batch the boundary.</a:t>
+            </a:r>
+          </a:p>
+        </p:txBody>
+      </p:sp>
+      <p:sp>
+        <p:nvSpPr>
+          <p:cNvPr id="4" name="Slide Number Placeholder 3"/>
+          <p:cNvSpPr>
+            <a:spLocks noGrp="1"/>
+          </p:cNvSpPr>
+          <p:nvPr>
+            <p:ph type="sldNum" idx="5" sz="quarter"/>
+          </p:nvPr>
+        </p:nvSpPr>
+        <p:spPr/>
+      </p:sp>
+    </p:spTree>
+  </p:cSld>
+  <p:clrMapOvr>
+    <a:masterClrMapping/>
+  </p:clrMapOvr>
+</p:notes>
+</file>
+
+<file path=ppt/notesSlides/notesSlide29.xml><?xml version="1.0" encoding="utf-8"?>
+<p:notes xmlns:a="http://schemas.openxmlformats.org/drawingml/2006/main" xmlns:p="http://schemas.openxmlformats.org/presentationml/2006/main" xmlns:r="http://schemas.openxmlformats.org/officeDocument/2006/relationships">
+  <p:cSld>
+    <p:spTree>
+      <p:nvGrpSpPr>
+        <p:cNvPr id="1" name=""/>
+        <p:cNvGrpSpPr/>
+        <p:nvPr/>
+      </p:nvGrpSpPr>
+      <p:grpSpPr>
+        <a:xfrm>
+          <a:off x="0" y="0"/>
+          <a:ext cx="0" cy="0"/>
+          <a:chOff x="0" y="0"/>
+          <a:chExt cx="0" cy="0"/>
+        </a:xfrm>
+      </p:grpSpPr>
+      <p:sp>
+        <p:nvSpPr>
+          <p:cNvPr id="2" name="Slide Image Placeholder 1"/>
+          <p:cNvSpPr>
+            <a:spLocks noGrp="1"/>
+          </p:cNvSpPr>
+          <p:nvPr>
+            <p:ph type="sldImg" idx="2"/>
+          </p:nvPr>
+        </p:nvSpPr>
+        <p:spPr/>
+      </p:sp>
+      <p:sp>
+        <p:nvSpPr>
+          <p:cNvPr id="3" name="Notes Placeholder 2"/>
+          <p:cNvSpPr>
+            <a:spLocks noGrp="1"/>
+          </p:cNvSpPr>
+          <p:nvPr>
+            <p:ph type="body" idx="3" sz="quarter"/>
+          </p:nvPr>
+        </p:nvSpPr>
+        <p:spPr/>
+        <p:txBody>
+          <a:bodyPr/>
+          <a:lstStyle/>
+          <a:p>
+            <a:r>
               <a:t>Open the floor. Likely questions: how close is the compatibility number; why WiredTiger over a pure-Python store; why keep two engines; when does Rust become the default; production use beyond tests. Answers are in the preceding slides' notes.</a:t>
             </a:r>
           </a:p>
@@ -2367,7 +2439,7 @@
           <a:lstStyle/>
           <a:p>
             <a:r>
-              <a:t>Just as SQLite is a real SQL database you embed, SecantusDB is a real MongoDB-compatible server you embed in your process. It speaks the MongoDB wire protocol so any driver connects unmodified. No external daemon, single dependency, single node. 'Surrogate', not 'fake' — it implements the protocol rather than faking responses — which is why drivers can't tell it apart from mongod.</a:t>
+              <a:t>Just as SQLite is a real SQL database you embed, SecantusDB is a real MongoDB-compatible server. Embed it in your process for tests and apps, or start it as a standalone server on a port — same engine either way. It speaks the MongoDB wire protocol, so every client connects unmodified: not just the drivers, but Compass, mongosh, and mongodump/mongorestore. 'Surrogate', not 'fake' — it implements the protocol rather than faking responses, which is why nothing can tell it apart.</a:t>
             </a:r>
           </a:p>
         </p:txBody>
@@ -2507,7 +2579,7 @@
           <a:lstStyle/>
           <a:p>
             <a:r>
-              <a:t>A light aside. The early prototype was 'fongo', then 'fongodb' — both clash with the existing Fongo brand and blur into MongoDB. 'SecantusDB' dodges both. Lingering 'fongo'/'fongodb' references in the code are stale and mean SecantusDB.</a:t>
+              <a:t>Unlike SQLite, it isn't embed-only: start it as a standalone server on a port and the whole MongoDB toolchain connects unchanged — inspect data in Compass, script against it with mongosh, and back up / load fixtures with mongodump and mongorestore. Same wire protocol, so there's nothing special to configure — point any MongoDB tool at the address and it works.</a:t>
             </a:r>
           </a:p>
         </p:txBody>
@@ -2577,7 +2649,7 @@
           <a:lstStyle/>
           <a:p>
             <a:r>
-              <a:t>Three constraints are the whole discipline; everything follows from them.</a:t>
+              <a:t>A light aside. The early prototype was 'fongo', then 'fongodb' — both clash with the existing Fongo brand and blur into MongoDB. 'SecantusDB' dodges both. Lingering 'fongo'/'fongodb' references in the code are stale and mean SecantusDB.</a:t>
             </a:r>
           </a:p>
         </p:txBody>
@@ -2647,7 +2719,7 @@
           <a:lstStyle/>
           <a:p>
             <a:r>
-              <a:t>One: 'correct' means a driver client can't distinguish us from mongod — when unsure, run the same code against both and assert equal responses. Two: we'd rather return a faithful 'not supported' than a half-feature that silently diverges. Three: ergonomics — embedding it is trivial, no processes to manage.</a:t>
+              <a:t>Three constraints are the whole discipline; everything follows from them.</a:t>
             </a:r>
           </a:p>
         </p:txBody>
@@ -5871,7 +5943,7 @@
                 </a:solidFill>
                 <a:latin typeface="Inter"/>
               </a:rPr>
-              <a:t>An embeddable, in-process, MongoDB-compatible server</a:t>
+              <a:t>An embeddable — or standalone — MongoDB-compatible server</a:t>
             </a:r>
           </a:p>
         </p:txBody>
@@ -6146,7 +6218,7 @@
                 </a:solidFill>
                 <a:latin typeface="Inter"/>
               </a:rPr>
-              <a:t>Scope — single-node by design</a:t>
+              <a:t>Three constraints</a:t>
             </a:r>
           </a:p>
         </p:txBody>
@@ -6181,111 +6253,21 @@
                 </a:solidFill>
                 <a:latin typeface="Inter"/>
               </a:rPr>
-              <a:t>Faithful where it counts</a:t>
-            </a:r>
-          </a:p>
-        </p:txBody>
-      </p:sp>
-      <p:sp>
-        <p:nvSpPr>
-          <p:cNvPr id="7" name="Rectangle 6"/>
-          <p:cNvSpPr/>
-          <p:nvPr/>
-        </p:nvSpPr>
-        <p:spPr>
-          <a:xfrm>
-            <a:off x="640080" y="1508760"/>
-            <a:ext cx="5394960" cy="4480560"/>
-          </a:xfrm>
-          <a:prstGeom prst="rect">
-            <a:avLst/>
-          </a:prstGeom>
-          <a:solidFill>
-            <a:srgbClr val="FFFFFF"/>
-          </a:solidFill>
-          <a:ln w="19050">
-            <a:solidFill>
-              <a:srgbClr val="06B6D4"/>
-            </a:solidFill>
-          </a:ln>
-          <a:effectLst/>
-        </p:spPr>
-        <p:style>
-          <a:lnRef idx="1">
-            <a:schemeClr val="accent1"/>
-          </a:lnRef>
-          <a:fillRef idx="3">
-            <a:schemeClr val="accent1"/>
-          </a:fillRef>
-          <a:effectRef idx="2">
-            <a:schemeClr val="accent1"/>
-          </a:effectRef>
-          <a:fontRef idx="minor">
-            <a:schemeClr val="lt1"/>
-          </a:fontRef>
-        </p:style>
-        <p:txBody>
-          <a:bodyPr rtlCol="0" anchor="ctr"/>
-          <a:lstStyle/>
-          <a:p>
-            <a:pPr algn="ctr"/>
-          </a:p>
-        </p:txBody>
-      </p:sp>
-      <p:sp>
-        <p:nvSpPr>
-          <p:cNvPr id="8" name="Rectangle 7"/>
-          <p:cNvSpPr/>
-          <p:nvPr/>
-        </p:nvSpPr>
-        <p:spPr>
-          <a:xfrm>
-            <a:off x="640080" y="1508760"/>
-            <a:ext cx="5394960" cy="548640"/>
-          </a:xfrm>
-          <a:prstGeom prst="rect">
-            <a:avLst/>
-          </a:prstGeom>
-          <a:solidFill>
-            <a:srgbClr val="06B6D4"/>
-          </a:solidFill>
-          <a:ln>
-            <a:noFill/>
-          </a:ln>
-          <a:effectLst/>
-        </p:spPr>
-        <p:style>
-          <a:lnRef idx="1">
-            <a:schemeClr val="accent1"/>
-          </a:lnRef>
-          <a:fillRef idx="3">
-            <a:schemeClr val="accent1"/>
-          </a:fillRef>
-          <a:effectRef idx="2">
-            <a:schemeClr val="accent1"/>
-          </a:effectRef>
-          <a:fontRef idx="minor">
-            <a:schemeClr val="lt1"/>
-          </a:fontRef>
-        </p:style>
-        <p:txBody>
-          <a:bodyPr rtlCol="0" anchor="ctr"/>
-          <a:lstStyle/>
-          <a:p>
-            <a:pPr algn="ctr"/>
-          </a:p>
-        </p:txBody>
-      </p:sp>
-      <p:sp>
-        <p:nvSpPr>
-          <p:cNvPr id="9" name="TextBox 8"/>
+              <a:t>NON-NEGOTIABLES</a:t>
+            </a:r>
+          </a:p>
+        </p:txBody>
+      </p:sp>
+      <p:sp>
+        <p:nvSpPr>
+          <p:cNvPr id="7" name="TextBox 6"/>
           <p:cNvSpPr txBox="1"/>
           <p:nvPr/>
         </p:nvSpPr>
         <p:spPr>
           <a:xfrm>
-            <a:off x="822960" y="1563624"/>
-            <a:ext cx="5029200" cy="411480"/>
+            <a:off x="777240" y="1554480"/>
+            <a:ext cx="10607040" cy="4572000"/>
           </a:xfrm>
           <a:prstGeom prst="rect">
             <a:avLst/>
@@ -6298,462 +6280,94 @@
           </a:bodyPr>
           <a:lstStyle/>
           <a:p>
-            <a:pPr algn="l"/>
-            <a:r>
-              <a:rPr sz="2000" b="1" i="0">
-                <a:solidFill>
-                  <a:srgbClr val="FFFFFF"/>
-                </a:solidFill>
-                <a:latin typeface="Inter"/>
-              </a:rPr>
-              <a:t>✓  In scope</a:t>
-            </a:r>
-          </a:p>
-        </p:txBody>
-      </p:sp>
-      <p:sp>
-        <p:nvSpPr>
-          <p:cNvPr id="10" name="TextBox 9"/>
-          <p:cNvSpPr txBox="1"/>
-          <p:nvPr/>
-        </p:nvSpPr>
-        <p:spPr>
-          <a:xfrm>
-            <a:off x="960120" y="2240280"/>
-            <a:ext cx="4846320" cy="548640"/>
-          </a:xfrm>
-          <a:prstGeom prst="rect">
-            <a:avLst/>
-          </a:prstGeom>
-          <a:noFill/>
-        </p:spPr>
-        <p:txBody>
-          <a:bodyPr wrap="square">
-            <a:spAutoFit/>
-          </a:bodyPr>
-          <a:lstStyle/>
-          <a:p>
-            <a:pPr algn="l"/>
-            <a:r>
-              <a:rPr sz="1800" b="1" i="0">
+            <a:pPr>
+              <a:lnSpc>
+                <a:spcPct val="104000"/>
+              </a:lnSpc>
+              <a:spcAft>
+                <a:spcPts val="2000"/>
+              </a:spcAft>
+            </a:pPr>
+            <a:r>
+              <a:rPr sz="2800" b="1">
+                <a:solidFill>
+                  <a:srgbClr val="06B6D4"/>
+                </a:solidFill>
+                <a:latin typeface="Inter"/>
+              </a:rPr>
+              <a:t>▪  </a:t>
+            </a:r>
+            <a:r>
+              <a:rPr sz="2800" b="1">
                 <a:solidFill>
                   <a:srgbClr val="0F172A"/>
                 </a:solidFill>
                 <a:latin typeface="Inter"/>
               </a:rPr>
-              <a:t>CRUD &amp; cursors</a:t>
-            </a:r>
-          </a:p>
-        </p:txBody>
-      </p:sp>
-      <p:sp>
-        <p:nvSpPr>
-          <p:cNvPr id="11" name="TextBox 10"/>
-          <p:cNvSpPr txBox="1"/>
-          <p:nvPr/>
-        </p:nvSpPr>
-        <p:spPr>
-          <a:xfrm>
-            <a:off x="960120" y="2898648"/>
-            <a:ext cx="4846320" cy="548640"/>
-          </a:xfrm>
-          <a:prstGeom prst="rect">
-            <a:avLst/>
-          </a:prstGeom>
-          <a:noFill/>
-        </p:spPr>
-        <p:txBody>
-          <a:bodyPr wrap="square">
-            <a:spAutoFit/>
-          </a:bodyPr>
-          <a:lstStyle/>
-          <a:p>
-            <a:pPr algn="l"/>
-            <a:r>
-              <a:rPr sz="1800" b="1" i="0">
+              <a:t>A real driver can't tell us apart from mongod</a:t>
+            </a:r>
+          </a:p>
+          <a:p>
+            <a:pPr>
+              <a:lnSpc>
+                <a:spcPct val="104000"/>
+              </a:lnSpc>
+              <a:spcAft>
+                <a:spcPts val="2000"/>
+              </a:spcAft>
+            </a:pPr>
+            <a:r>
+              <a:rPr sz="2800" b="1">
+                <a:solidFill>
+                  <a:srgbClr val="06B6D4"/>
+                </a:solidFill>
+                <a:latin typeface="Inter"/>
+              </a:rPr>
+              <a:t>▪  </a:t>
+            </a:r>
+            <a:r>
+              <a:rPr sz="2800" b="1">
                 <a:solidFill>
                   <a:srgbClr val="0F172A"/>
                 </a:solidFill>
                 <a:latin typeface="Inter"/>
               </a:rPr>
-              <a:t>Aggregation pipeline</a:t>
-            </a:r>
-          </a:p>
-        </p:txBody>
-      </p:sp>
-      <p:sp>
-        <p:nvSpPr>
-          <p:cNvPr id="12" name="TextBox 11"/>
-          <p:cNvSpPr txBox="1"/>
-          <p:nvPr/>
-        </p:nvSpPr>
-        <p:spPr>
-          <a:xfrm>
-            <a:off x="960120" y="3557016"/>
-            <a:ext cx="4846320" cy="548640"/>
-          </a:xfrm>
-          <a:prstGeom prst="rect">
-            <a:avLst/>
-          </a:prstGeom>
-          <a:noFill/>
-        </p:spPr>
-        <p:txBody>
-          <a:bodyPr wrap="square">
-            <a:spAutoFit/>
-          </a:bodyPr>
-          <a:lstStyle/>
-          <a:p>
-            <a:pPr algn="l"/>
-            <a:r>
-              <a:rPr sz="1800" b="1" i="0">
+              <a:t>Wire fidelity over feature completeness</a:t>
+            </a:r>
+          </a:p>
+          <a:p>
+            <a:pPr>
+              <a:lnSpc>
+                <a:spcPct val="104000"/>
+              </a:lnSpc>
+              <a:spcAft>
+                <a:spcPts val="2000"/>
+              </a:spcAft>
+            </a:pPr>
+            <a:r>
+              <a:rPr sz="2800" b="1">
+                <a:solidFill>
+                  <a:srgbClr val="06B6D4"/>
+                </a:solidFill>
+                <a:latin typeface="Inter"/>
+              </a:rPr>
+              <a:t>▪  </a:t>
+            </a:r>
+            <a:r>
+              <a:rPr sz="2800" b="1">
                 <a:solidFill>
                   <a:srgbClr val="0F172A"/>
                 </a:solidFill>
                 <a:latin typeface="Inter"/>
               </a:rPr>
-              <a:t>findAndModify</a:t>
-            </a:r>
-          </a:p>
-        </p:txBody>
-      </p:sp>
-      <p:sp>
-        <p:nvSpPr>
-          <p:cNvPr id="13" name="TextBox 12"/>
-          <p:cNvSpPr txBox="1"/>
-          <p:nvPr/>
-        </p:nvSpPr>
-        <p:spPr>
-          <a:xfrm>
-            <a:off x="960120" y="4215384"/>
-            <a:ext cx="4846320" cy="548640"/>
-          </a:xfrm>
-          <a:prstGeom prst="rect">
-            <a:avLst/>
-          </a:prstGeom>
-          <a:noFill/>
-        </p:spPr>
-        <p:txBody>
-          <a:bodyPr wrap="square">
-            <a:spAutoFit/>
-          </a:bodyPr>
-          <a:lstStyle/>
-          <a:p>
-            <a:pPr algn="l"/>
-            <a:r>
-              <a:rPr sz="1800" b="1" i="0">
-                <a:solidFill>
-                  <a:srgbClr val="0F172A"/>
-                </a:solidFill>
-                <a:latin typeface="Inter"/>
-              </a:rPr>
-              <a:t>Change streams</a:t>
-            </a:r>
-          </a:p>
-        </p:txBody>
-      </p:sp>
-      <p:sp>
-        <p:nvSpPr>
-          <p:cNvPr id="14" name="TextBox 13"/>
-          <p:cNvSpPr txBox="1"/>
-          <p:nvPr/>
-        </p:nvSpPr>
-        <p:spPr>
-          <a:xfrm>
-            <a:off x="960120" y="4873752"/>
-            <a:ext cx="4846320" cy="548640"/>
-          </a:xfrm>
-          <a:prstGeom prst="rect">
-            <a:avLst/>
-          </a:prstGeom>
-          <a:noFill/>
-        </p:spPr>
-        <p:txBody>
-          <a:bodyPr wrap="square">
-            <a:spAutoFit/>
-          </a:bodyPr>
-          <a:lstStyle/>
-          <a:p>
-            <a:pPr algn="l"/>
-            <a:r>
-              <a:rPr sz="1800" b="1" i="0">
-                <a:solidFill>
-                  <a:srgbClr val="0F172A"/>
-                </a:solidFill>
-                <a:latin typeface="Inter"/>
-              </a:rPr>
-              <a:t>The connection handshake</a:t>
-            </a:r>
-          </a:p>
-        </p:txBody>
-      </p:sp>
-      <p:sp>
-        <p:nvSpPr>
-          <p:cNvPr id="15" name="Rectangle 14"/>
-          <p:cNvSpPr/>
-          <p:nvPr/>
-        </p:nvSpPr>
-        <p:spPr>
-          <a:xfrm>
-            <a:off x="6217920" y="1508760"/>
-            <a:ext cx="5349240" cy="4480560"/>
-          </a:xfrm>
-          <a:prstGeom prst="rect">
-            <a:avLst/>
-          </a:prstGeom>
-          <a:solidFill>
-            <a:srgbClr val="FFFFFF"/>
-          </a:solidFill>
-          <a:ln w="19050">
-            <a:solidFill>
-              <a:srgbClr val="CBD5E1"/>
-            </a:solidFill>
-          </a:ln>
-          <a:effectLst/>
-        </p:spPr>
-        <p:style>
-          <a:lnRef idx="1">
-            <a:schemeClr val="accent1"/>
-          </a:lnRef>
-          <a:fillRef idx="3">
-            <a:schemeClr val="accent1"/>
-          </a:fillRef>
-          <a:effectRef idx="2">
-            <a:schemeClr val="accent1"/>
-          </a:effectRef>
-          <a:fontRef idx="minor">
-            <a:schemeClr val="lt1"/>
-          </a:fontRef>
-        </p:style>
-        <p:txBody>
-          <a:bodyPr rtlCol="0" anchor="ctr"/>
-          <a:lstStyle/>
-          <a:p>
-            <a:pPr algn="ctr"/>
-          </a:p>
-        </p:txBody>
-      </p:sp>
-      <p:sp>
-        <p:nvSpPr>
-          <p:cNvPr id="16" name="Rectangle 15"/>
-          <p:cNvSpPr/>
-          <p:nvPr/>
-        </p:nvSpPr>
-        <p:spPr>
-          <a:xfrm>
-            <a:off x="6217920" y="1508760"/>
-            <a:ext cx="5349240" cy="548640"/>
-          </a:xfrm>
-          <a:prstGeom prst="rect">
-            <a:avLst/>
-          </a:prstGeom>
-          <a:solidFill>
-            <a:srgbClr val="475569"/>
-          </a:solidFill>
-          <a:ln>
-            <a:noFill/>
-          </a:ln>
-          <a:effectLst/>
-        </p:spPr>
-        <p:style>
-          <a:lnRef idx="1">
-            <a:schemeClr val="accent1"/>
-          </a:lnRef>
-          <a:fillRef idx="3">
-            <a:schemeClr val="accent1"/>
-          </a:fillRef>
-          <a:effectRef idx="2">
-            <a:schemeClr val="accent1"/>
-          </a:effectRef>
-          <a:fontRef idx="minor">
-            <a:schemeClr val="lt1"/>
-          </a:fontRef>
-        </p:style>
-        <p:txBody>
-          <a:bodyPr rtlCol="0" anchor="ctr"/>
-          <a:lstStyle/>
-          <a:p>
-            <a:pPr algn="ctr"/>
-          </a:p>
-        </p:txBody>
-      </p:sp>
-      <p:sp>
-        <p:nvSpPr>
-          <p:cNvPr id="17" name="TextBox 16"/>
-          <p:cNvSpPr txBox="1"/>
-          <p:nvPr/>
-        </p:nvSpPr>
-        <p:spPr>
-          <a:xfrm>
-            <a:off x="6400800" y="1563624"/>
-            <a:ext cx="5029200" cy="411480"/>
-          </a:xfrm>
-          <a:prstGeom prst="rect">
-            <a:avLst/>
-          </a:prstGeom>
-          <a:noFill/>
-        </p:spPr>
-        <p:txBody>
-          <a:bodyPr wrap="square">
-            <a:spAutoFit/>
-          </a:bodyPr>
-          <a:lstStyle/>
-          <a:p>
-            <a:pPr algn="l"/>
-            <a:r>
-              <a:rPr sz="2000" b="1" i="0">
-                <a:solidFill>
-                  <a:srgbClr val="FFFFFF"/>
-                </a:solidFill>
-                <a:latin typeface="Inter"/>
-              </a:rPr>
-              <a:t>✗  Out of scope</a:t>
-            </a:r>
-          </a:p>
-        </p:txBody>
-      </p:sp>
-      <p:sp>
-        <p:nvSpPr>
-          <p:cNvPr id="18" name="TextBox 17"/>
-          <p:cNvSpPr txBox="1"/>
-          <p:nvPr/>
-        </p:nvSpPr>
-        <p:spPr>
-          <a:xfrm>
-            <a:off x="6537960" y="2240280"/>
-            <a:ext cx="4846320" cy="548640"/>
-          </a:xfrm>
-          <a:prstGeom prst="rect">
-            <a:avLst/>
-          </a:prstGeom>
-          <a:noFill/>
-        </p:spPr>
-        <p:txBody>
-          <a:bodyPr wrap="square">
-            <a:spAutoFit/>
-          </a:bodyPr>
-          <a:lstStyle/>
-          <a:p>
-            <a:pPr algn="l"/>
-            <a:r>
-              <a:rPr sz="1800" b="1" i="0">
-                <a:solidFill>
-                  <a:srgbClr val="0F172A"/>
-                </a:solidFill>
-                <a:latin typeface="Inter"/>
-              </a:rPr>
-              <a:t>Real replica sets</a:t>
-            </a:r>
-          </a:p>
-        </p:txBody>
-      </p:sp>
-      <p:sp>
-        <p:nvSpPr>
-          <p:cNvPr id="19" name="TextBox 18"/>
-          <p:cNvSpPr txBox="1"/>
-          <p:nvPr/>
-        </p:nvSpPr>
-        <p:spPr>
-          <a:xfrm>
-            <a:off x="6537960" y="2898648"/>
-            <a:ext cx="4846320" cy="548640"/>
-          </a:xfrm>
-          <a:prstGeom prst="rect">
-            <a:avLst/>
-          </a:prstGeom>
-          <a:noFill/>
-        </p:spPr>
-        <p:txBody>
-          <a:bodyPr wrap="square">
-            <a:spAutoFit/>
-          </a:bodyPr>
-          <a:lstStyle/>
-          <a:p>
-            <a:pPr algn="l"/>
-            <a:r>
-              <a:rPr sz="1800" b="1" i="0">
-                <a:solidFill>
-                  <a:srgbClr val="0F172A"/>
-                </a:solidFill>
-                <a:latin typeface="Inter"/>
-              </a:rPr>
-              <a:t>Sharding</a:t>
-            </a:r>
-          </a:p>
-        </p:txBody>
-      </p:sp>
-      <p:sp>
-        <p:nvSpPr>
-          <p:cNvPr id="20" name="TextBox 19"/>
-          <p:cNvSpPr txBox="1"/>
-          <p:nvPr/>
-        </p:nvSpPr>
-        <p:spPr>
-          <a:xfrm>
-            <a:off x="6537960" y="3557016"/>
-            <a:ext cx="4846320" cy="548640"/>
-          </a:xfrm>
-          <a:prstGeom prst="rect">
-            <a:avLst/>
-          </a:prstGeom>
-          <a:noFill/>
-        </p:spPr>
-        <p:txBody>
-          <a:bodyPr wrap="square">
-            <a:spAutoFit/>
-          </a:bodyPr>
-          <a:lstStyle/>
-          <a:p>
-            <a:pPr algn="l"/>
-            <a:r>
-              <a:rPr sz="1800" b="1" i="0">
-                <a:solidFill>
-                  <a:srgbClr val="0F172A"/>
-                </a:solidFill>
-                <a:latin typeface="Inter"/>
-              </a:rPr>
-              <a:t>Multi-node consistency</a:t>
-            </a:r>
-          </a:p>
-        </p:txBody>
-      </p:sp>
-      <p:sp>
-        <p:nvSpPr>
-          <p:cNvPr id="21" name="TextBox 20"/>
-          <p:cNvSpPr txBox="1"/>
-          <p:nvPr/>
-        </p:nvSpPr>
-        <p:spPr>
-          <a:xfrm>
-            <a:off x="6537960" y="4215384"/>
-            <a:ext cx="4846320" cy="548640"/>
-          </a:xfrm>
-          <a:prstGeom prst="rect">
-            <a:avLst/>
-          </a:prstGeom>
-          <a:noFill/>
-        </p:spPr>
-        <p:txBody>
-          <a:bodyPr wrap="square">
-            <a:spAutoFit/>
-          </a:bodyPr>
-          <a:lstStyle/>
-          <a:p>
-            <a:pPr algn="l"/>
-            <a:r>
-              <a:rPr sz="1800" b="1" i="0">
-                <a:solidFill>
-                  <a:srgbClr val="0F172A"/>
-                </a:solidFill>
-                <a:latin typeface="Inter"/>
-              </a:rPr>
-              <a:t>Elections / cross-node oplog</a:t>
-            </a:r>
-          </a:p>
-        </p:txBody>
-      </p:sp>
-      <p:sp>
-        <p:nvSpPr>
-          <p:cNvPr id="22" name="Rounded Rectangle 21">
+              <a:t>Trivial to embed — one or two lines</a:t>
+            </a:r>
+          </a:p>
+        </p:txBody>
+      </p:sp>
+      <p:sp>
+        <p:nvSpPr>
+          <p:cNvPr id="8" name="Rounded Rectangle 7">
             <a:hlinkClick action="ppaction://hlinksldjump" r:id="rId2"/>
           </p:cNvPr>
           <p:cNvSpPr/>
@@ -6839,6 +6453,50 @@
             <a:avLst/>
           </a:prstGeom>
           <a:solidFill>
+            <a:srgbClr val="F8FAFC"/>
+          </a:solidFill>
+          <a:ln>
+            <a:noFill/>
+          </a:ln>
+          <a:effectLst/>
+        </p:spPr>
+        <p:style>
+          <a:lnRef idx="1">
+            <a:schemeClr val="accent1"/>
+          </a:lnRef>
+          <a:fillRef idx="3">
+            <a:schemeClr val="accent1"/>
+          </a:fillRef>
+          <a:effectRef idx="2">
+            <a:schemeClr val="accent1"/>
+          </a:effectRef>
+          <a:fontRef idx="minor">
+            <a:schemeClr val="lt1"/>
+          </a:fontRef>
+        </p:style>
+        <p:txBody>
+          <a:bodyPr rtlCol="0" anchor="ctr"/>
+          <a:lstStyle/>
+          <a:p>
+            <a:pPr algn="ctr"/>
+          </a:p>
+        </p:txBody>
+      </p:sp>
+      <p:sp>
+        <p:nvSpPr>
+          <p:cNvPr id="3" name="Rectangle 2"/>
+          <p:cNvSpPr/>
+          <p:nvPr/>
+        </p:nvSpPr>
+        <p:spPr>
+          <a:xfrm>
+            <a:off x="0" y="0"/>
+            <a:ext cx="12191695" cy="1024128"/>
+          </a:xfrm>
+          <a:prstGeom prst="rect">
+            <a:avLst/>
+          </a:prstGeom>
+          <a:solidFill>
             <a:srgbClr val="0F172A"/>
           </a:solidFill>
           <a:ln>
@@ -6870,14 +6528,14 @@
       </p:sp>
       <p:sp>
         <p:nvSpPr>
-          <p:cNvPr id="3" name="Rectangle 2"/>
+          <p:cNvPr id="4" name="Rectangle 3"/>
           <p:cNvSpPr/>
           <p:nvPr/>
         </p:nvSpPr>
         <p:spPr>
           <a:xfrm>
-            <a:off x="822960" y="2468880"/>
-            <a:ext cx="146304" cy="1554480"/>
+            <a:off x="0" y="1024128"/>
+            <a:ext cx="12191695" cy="50800"/>
           </a:xfrm>
           <a:prstGeom prst="rect">
             <a:avLst/>
@@ -6914,14 +6572,14 @@
       </p:sp>
       <p:sp>
         <p:nvSpPr>
-          <p:cNvPr id="4" name="TextBox 3"/>
+          <p:cNvPr id="5" name="TextBox 4"/>
           <p:cNvSpPr txBox="1"/>
           <p:nvPr/>
         </p:nvSpPr>
         <p:spPr>
           <a:xfrm>
-            <a:off x="1143000" y="2286000"/>
-            <a:ext cx="10058400" cy="640080"/>
+            <a:off x="548640" y="146304"/>
+            <a:ext cx="10972800" cy="713232"/>
           </a:xfrm>
           <a:prstGeom prst="rect">
             <a:avLst/>
@@ -6936,27 +6594,27 @@
           <a:p>
             <a:pPr algn="l"/>
             <a:r>
-              <a:rPr sz="1600" b="1" i="0">
-                <a:solidFill>
-                  <a:srgbClr val="22D3EE"/>
-                </a:solidFill>
-                <a:latin typeface="Inter"/>
-              </a:rPr>
-              <a:t>PART 3</a:t>
-            </a:r>
-          </a:p>
-        </p:txBody>
-      </p:sp>
-      <p:sp>
-        <p:nvSpPr>
-          <p:cNvPr id="5" name="TextBox 4"/>
+              <a:rPr sz="3000" b="1" i="0">
+                <a:solidFill>
+                  <a:srgbClr val="FFFFFF"/>
+                </a:solidFill>
+                <a:latin typeface="Inter"/>
+              </a:rPr>
+              <a:t>Scope — single-node by design</a:t>
+            </a:r>
+          </a:p>
+        </p:txBody>
+      </p:sp>
+      <p:sp>
+        <p:nvSpPr>
+          <p:cNvPr id="6" name="TextBox 5"/>
           <p:cNvSpPr txBox="1"/>
           <p:nvPr/>
         </p:nvSpPr>
         <p:spPr>
           <a:xfrm>
-            <a:off x="1143000" y="2743200"/>
-            <a:ext cx="10241280" cy="1280160"/>
+            <a:off x="576072" y="749808"/>
+            <a:ext cx="10972800" cy="274320"/>
           </a:xfrm>
           <a:prstGeom prst="rect">
             <a:avLst/>
@@ -6971,27 +6629,117 @@
           <a:p>
             <a:pPr algn="l"/>
             <a:r>
-              <a:rPr sz="4000" b="1" i="0">
-                <a:solidFill>
-                  <a:srgbClr val="FFFFFF"/>
-                </a:solidFill>
-                <a:latin typeface="Inter"/>
-              </a:rPr>
-              <a:t>Architecture</a:t>
-            </a:r>
-          </a:p>
-        </p:txBody>
-      </p:sp>
-      <p:sp>
-        <p:nvSpPr>
-          <p:cNvPr id="6" name="TextBox 5"/>
+              <a:rPr sz="1200" b="0" i="0">
+                <a:solidFill>
+                  <a:srgbClr val="22D3EE"/>
+                </a:solidFill>
+                <a:latin typeface="Inter"/>
+              </a:rPr>
+              <a:t>Faithful where it counts</a:t>
+            </a:r>
+          </a:p>
+        </p:txBody>
+      </p:sp>
+      <p:sp>
+        <p:nvSpPr>
+          <p:cNvPr id="7" name="Rectangle 6"/>
+          <p:cNvSpPr/>
+          <p:nvPr/>
+        </p:nvSpPr>
+        <p:spPr>
+          <a:xfrm>
+            <a:off x="640080" y="1508760"/>
+            <a:ext cx="5394960" cy="4480560"/>
+          </a:xfrm>
+          <a:prstGeom prst="rect">
+            <a:avLst/>
+          </a:prstGeom>
+          <a:solidFill>
+            <a:srgbClr val="FFFFFF"/>
+          </a:solidFill>
+          <a:ln w="19050">
+            <a:solidFill>
+              <a:srgbClr val="06B6D4"/>
+            </a:solidFill>
+          </a:ln>
+          <a:effectLst/>
+        </p:spPr>
+        <p:style>
+          <a:lnRef idx="1">
+            <a:schemeClr val="accent1"/>
+          </a:lnRef>
+          <a:fillRef idx="3">
+            <a:schemeClr val="accent1"/>
+          </a:fillRef>
+          <a:effectRef idx="2">
+            <a:schemeClr val="accent1"/>
+          </a:effectRef>
+          <a:fontRef idx="minor">
+            <a:schemeClr val="lt1"/>
+          </a:fontRef>
+        </p:style>
+        <p:txBody>
+          <a:bodyPr rtlCol="0" anchor="ctr"/>
+          <a:lstStyle/>
+          <a:p>
+            <a:pPr algn="ctr"/>
+          </a:p>
+        </p:txBody>
+      </p:sp>
+      <p:sp>
+        <p:nvSpPr>
+          <p:cNvPr id="8" name="Rectangle 7"/>
+          <p:cNvSpPr/>
+          <p:nvPr/>
+        </p:nvSpPr>
+        <p:spPr>
+          <a:xfrm>
+            <a:off x="640080" y="1508760"/>
+            <a:ext cx="5394960" cy="548640"/>
+          </a:xfrm>
+          <a:prstGeom prst="rect">
+            <a:avLst/>
+          </a:prstGeom>
+          <a:solidFill>
+            <a:srgbClr val="06B6D4"/>
+          </a:solidFill>
+          <a:ln>
+            <a:noFill/>
+          </a:ln>
+          <a:effectLst/>
+        </p:spPr>
+        <p:style>
+          <a:lnRef idx="1">
+            <a:schemeClr val="accent1"/>
+          </a:lnRef>
+          <a:fillRef idx="3">
+            <a:schemeClr val="accent1"/>
+          </a:fillRef>
+          <a:effectRef idx="2">
+            <a:schemeClr val="accent1"/>
+          </a:effectRef>
+          <a:fontRef idx="minor">
+            <a:schemeClr val="lt1"/>
+          </a:fontRef>
+        </p:style>
+        <p:txBody>
+          <a:bodyPr rtlCol="0" anchor="ctr"/>
+          <a:lstStyle/>
+          <a:p>
+            <a:pPr algn="ctr"/>
+          </a:p>
+        </p:txBody>
+      </p:sp>
+      <p:sp>
+        <p:nvSpPr>
+          <p:cNvPr id="9" name="TextBox 8"/>
           <p:cNvSpPr txBox="1"/>
           <p:nvPr/>
         </p:nvSpPr>
         <p:spPr>
           <a:xfrm>
-            <a:off x="1161288" y="3840480"/>
-            <a:ext cx="10058400" cy="731520"/>
+            <a:off x="822960" y="1563624"/>
+            <a:ext cx="5029200" cy="411480"/>
           </a:xfrm>
           <a:prstGeom prst="rect">
             <a:avLst/>
@@ -7006,20 +6754,460 @@
           <a:p>
             <a:pPr algn="l"/>
             <a:r>
-              <a:rPr sz="1800" b="0" i="0">
-                <a:solidFill>
-                  <a:srgbClr val="CBD5E1"/>
-                </a:solidFill>
-                <a:latin typeface="Inter"/>
-              </a:rPr>
-              <a:t>From socket bytes to durable storage</a:t>
-            </a:r>
-          </a:p>
-        </p:txBody>
-      </p:sp>
-      <p:sp>
-        <p:nvSpPr>
-          <p:cNvPr id="7" name="Rounded Rectangle 6">
+              <a:rPr sz="2000" b="1" i="0">
+                <a:solidFill>
+                  <a:srgbClr val="FFFFFF"/>
+                </a:solidFill>
+                <a:latin typeface="Inter"/>
+              </a:rPr>
+              <a:t>✓  In scope</a:t>
+            </a:r>
+          </a:p>
+        </p:txBody>
+      </p:sp>
+      <p:sp>
+        <p:nvSpPr>
+          <p:cNvPr id="10" name="TextBox 9"/>
+          <p:cNvSpPr txBox="1"/>
+          <p:nvPr/>
+        </p:nvSpPr>
+        <p:spPr>
+          <a:xfrm>
+            <a:off x="960120" y="2240280"/>
+            <a:ext cx="4846320" cy="548640"/>
+          </a:xfrm>
+          <a:prstGeom prst="rect">
+            <a:avLst/>
+          </a:prstGeom>
+          <a:noFill/>
+        </p:spPr>
+        <p:txBody>
+          <a:bodyPr wrap="square">
+            <a:spAutoFit/>
+          </a:bodyPr>
+          <a:lstStyle/>
+          <a:p>
+            <a:pPr algn="l"/>
+            <a:r>
+              <a:rPr sz="1800" b="1" i="0">
+                <a:solidFill>
+                  <a:srgbClr val="0F172A"/>
+                </a:solidFill>
+                <a:latin typeface="Inter"/>
+              </a:rPr>
+              <a:t>CRUD &amp; cursors</a:t>
+            </a:r>
+          </a:p>
+        </p:txBody>
+      </p:sp>
+      <p:sp>
+        <p:nvSpPr>
+          <p:cNvPr id="11" name="TextBox 10"/>
+          <p:cNvSpPr txBox="1"/>
+          <p:nvPr/>
+        </p:nvSpPr>
+        <p:spPr>
+          <a:xfrm>
+            <a:off x="960120" y="2898648"/>
+            <a:ext cx="4846320" cy="548640"/>
+          </a:xfrm>
+          <a:prstGeom prst="rect">
+            <a:avLst/>
+          </a:prstGeom>
+          <a:noFill/>
+        </p:spPr>
+        <p:txBody>
+          <a:bodyPr wrap="square">
+            <a:spAutoFit/>
+          </a:bodyPr>
+          <a:lstStyle/>
+          <a:p>
+            <a:pPr algn="l"/>
+            <a:r>
+              <a:rPr sz="1800" b="1" i="0">
+                <a:solidFill>
+                  <a:srgbClr val="0F172A"/>
+                </a:solidFill>
+                <a:latin typeface="Inter"/>
+              </a:rPr>
+              <a:t>Aggregation pipeline</a:t>
+            </a:r>
+          </a:p>
+        </p:txBody>
+      </p:sp>
+      <p:sp>
+        <p:nvSpPr>
+          <p:cNvPr id="12" name="TextBox 11"/>
+          <p:cNvSpPr txBox="1"/>
+          <p:nvPr/>
+        </p:nvSpPr>
+        <p:spPr>
+          <a:xfrm>
+            <a:off x="960120" y="3557016"/>
+            <a:ext cx="4846320" cy="548640"/>
+          </a:xfrm>
+          <a:prstGeom prst="rect">
+            <a:avLst/>
+          </a:prstGeom>
+          <a:noFill/>
+        </p:spPr>
+        <p:txBody>
+          <a:bodyPr wrap="square">
+            <a:spAutoFit/>
+          </a:bodyPr>
+          <a:lstStyle/>
+          <a:p>
+            <a:pPr algn="l"/>
+            <a:r>
+              <a:rPr sz="1800" b="1" i="0">
+                <a:solidFill>
+                  <a:srgbClr val="0F172A"/>
+                </a:solidFill>
+                <a:latin typeface="Inter"/>
+              </a:rPr>
+              <a:t>findAndModify</a:t>
+            </a:r>
+          </a:p>
+        </p:txBody>
+      </p:sp>
+      <p:sp>
+        <p:nvSpPr>
+          <p:cNvPr id="13" name="TextBox 12"/>
+          <p:cNvSpPr txBox="1"/>
+          <p:nvPr/>
+        </p:nvSpPr>
+        <p:spPr>
+          <a:xfrm>
+            <a:off x="960120" y="4215384"/>
+            <a:ext cx="4846320" cy="548640"/>
+          </a:xfrm>
+          <a:prstGeom prst="rect">
+            <a:avLst/>
+          </a:prstGeom>
+          <a:noFill/>
+        </p:spPr>
+        <p:txBody>
+          <a:bodyPr wrap="square">
+            <a:spAutoFit/>
+          </a:bodyPr>
+          <a:lstStyle/>
+          <a:p>
+            <a:pPr algn="l"/>
+            <a:r>
+              <a:rPr sz="1800" b="1" i="0">
+                <a:solidFill>
+                  <a:srgbClr val="0F172A"/>
+                </a:solidFill>
+                <a:latin typeface="Inter"/>
+              </a:rPr>
+              <a:t>Change streams</a:t>
+            </a:r>
+          </a:p>
+        </p:txBody>
+      </p:sp>
+      <p:sp>
+        <p:nvSpPr>
+          <p:cNvPr id="14" name="TextBox 13"/>
+          <p:cNvSpPr txBox="1"/>
+          <p:nvPr/>
+        </p:nvSpPr>
+        <p:spPr>
+          <a:xfrm>
+            <a:off x="960120" y="4873752"/>
+            <a:ext cx="4846320" cy="548640"/>
+          </a:xfrm>
+          <a:prstGeom prst="rect">
+            <a:avLst/>
+          </a:prstGeom>
+          <a:noFill/>
+        </p:spPr>
+        <p:txBody>
+          <a:bodyPr wrap="square">
+            <a:spAutoFit/>
+          </a:bodyPr>
+          <a:lstStyle/>
+          <a:p>
+            <a:pPr algn="l"/>
+            <a:r>
+              <a:rPr sz="1800" b="1" i="0">
+                <a:solidFill>
+                  <a:srgbClr val="0F172A"/>
+                </a:solidFill>
+                <a:latin typeface="Inter"/>
+              </a:rPr>
+              <a:t>The connection handshake</a:t>
+            </a:r>
+          </a:p>
+        </p:txBody>
+      </p:sp>
+      <p:sp>
+        <p:nvSpPr>
+          <p:cNvPr id="15" name="Rectangle 14"/>
+          <p:cNvSpPr/>
+          <p:nvPr/>
+        </p:nvSpPr>
+        <p:spPr>
+          <a:xfrm>
+            <a:off x="6217920" y="1508760"/>
+            <a:ext cx="5349240" cy="4480560"/>
+          </a:xfrm>
+          <a:prstGeom prst="rect">
+            <a:avLst/>
+          </a:prstGeom>
+          <a:solidFill>
+            <a:srgbClr val="FFFFFF"/>
+          </a:solidFill>
+          <a:ln w="19050">
+            <a:solidFill>
+              <a:srgbClr val="CBD5E1"/>
+            </a:solidFill>
+          </a:ln>
+          <a:effectLst/>
+        </p:spPr>
+        <p:style>
+          <a:lnRef idx="1">
+            <a:schemeClr val="accent1"/>
+          </a:lnRef>
+          <a:fillRef idx="3">
+            <a:schemeClr val="accent1"/>
+          </a:fillRef>
+          <a:effectRef idx="2">
+            <a:schemeClr val="accent1"/>
+          </a:effectRef>
+          <a:fontRef idx="minor">
+            <a:schemeClr val="lt1"/>
+          </a:fontRef>
+        </p:style>
+        <p:txBody>
+          <a:bodyPr rtlCol="0" anchor="ctr"/>
+          <a:lstStyle/>
+          <a:p>
+            <a:pPr algn="ctr"/>
+          </a:p>
+        </p:txBody>
+      </p:sp>
+      <p:sp>
+        <p:nvSpPr>
+          <p:cNvPr id="16" name="Rectangle 15"/>
+          <p:cNvSpPr/>
+          <p:nvPr/>
+        </p:nvSpPr>
+        <p:spPr>
+          <a:xfrm>
+            <a:off x="6217920" y="1508760"/>
+            <a:ext cx="5349240" cy="548640"/>
+          </a:xfrm>
+          <a:prstGeom prst="rect">
+            <a:avLst/>
+          </a:prstGeom>
+          <a:solidFill>
+            <a:srgbClr val="475569"/>
+          </a:solidFill>
+          <a:ln>
+            <a:noFill/>
+          </a:ln>
+          <a:effectLst/>
+        </p:spPr>
+        <p:style>
+          <a:lnRef idx="1">
+            <a:schemeClr val="accent1"/>
+          </a:lnRef>
+          <a:fillRef idx="3">
+            <a:schemeClr val="accent1"/>
+          </a:fillRef>
+          <a:effectRef idx="2">
+            <a:schemeClr val="accent1"/>
+          </a:effectRef>
+          <a:fontRef idx="minor">
+            <a:schemeClr val="lt1"/>
+          </a:fontRef>
+        </p:style>
+        <p:txBody>
+          <a:bodyPr rtlCol="0" anchor="ctr"/>
+          <a:lstStyle/>
+          <a:p>
+            <a:pPr algn="ctr"/>
+          </a:p>
+        </p:txBody>
+      </p:sp>
+      <p:sp>
+        <p:nvSpPr>
+          <p:cNvPr id="17" name="TextBox 16"/>
+          <p:cNvSpPr txBox="1"/>
+          <p:nvPr/>
+        </p:nvSpPr>
+        <p:spPr>
+          <a:xfrm>
+            <a:off x="6400800" y="1563624"/>
+            <a:ext cx="5029200" cy="411480"/>
+          </a:xfrm>
+          <a:prstGeom prst="rect">
+            <a:avLst/>
+          </a:prstGeom>
+          <a:noFill/>
+        </p:spPr>
+        <p:txBody>
+          <a:bodyPr wrap="square">
+            <a:spAutoFit/>
+          </a:bodyPr>
+          <a:lstStyle/>
+          <a:p>
+            <a:pPr algn="l"/>
+            <a:r>
+              <a:rPr sz="2000" b="1" i="0">
+                <a:solidFill>
+                  <a:srgbClr val="FFFFFF"/>
+                </a:solidFill>
+                <a:latin typeface="Inter"/>
+              </a:rPr>
+              <a:t>✗  Out of scope</a:t>
+            </a:r>
+          </a:p>
+        </p:txBody>
+      </p:sp>
+      <p:sp>
+        <p:nvSpPr>
+          <p:cNvPr id="18" name="TextBox 17"/>
+          <p:cNvSpPr txBox="1"/>
+          <p:nvPr/>
+        </p:nvSpPr>
+        <p:spPr>
+          <a:xfrm>
+            <a:off x="6537960" y="2240280"/>
+            <a:ext cx="4846320" cy="548640"/>
+          </a:xfrm>
+          <a:prstGeom prst="rect">
+            <a:avLst/>
+          </a:prstGeom>
+          <a:noFill/>
+        </p:spPr>
+        <p:txBody>
+          <a:bodyPr wrap="square">
+            <a:spAutoFit/>
+          </a:bodyPr>
+          <a:lstStyle/>
+          <a:p>
+            <a:pPr algn="l"/>
+            <a:r>
+              <a:rPr sz="1800" b="1" i="0">
+                <a:solidFill>
+                  <a:srgbClr val="0F172A"/>
+                </a:solidFill>
+                <a:latin typeface="Inter"/>
+              </a:rPr>
+              <a:t>Real replica sets</a:t>
+            </a:r>
+          </a:p>
+        </p:txBody>
+      </p:sp>
+      <p:sp>
+        <p:nvSpPr>
+          <p:cNvPr id="19" name="TextBox 18"/>
+          <p:cNvSpPr txBox="1"/>
+          <p:nvPr/>
+        </p:nvSpPr>
+        <p:spPr>
+          <a:xfrm>
+            <a:off x="6537960" y="2898648"/>
+            <a:ext cx="4846320" cy="548640"/>
+          </a:xfrm>
+          <a:prstGeom prst="rect">
+            <a:avLst/>
+          </a:prstGeom>
+          <a:noFill/>
+        </p:spPr>
+        <p:txBody>
+          <a:bodyPr wrap="square">
+            <a:spAutoFit/>
+          </a:bodyPr>
+          <a:lstStyle/>
+          <a:p>
+            <a:pPr algn="l"/>
+            <a:r>
+              <a:rPr sz="1800" b="1" i="0">
+                <a:solidFill>
+                  <a:srgbClr val="0F172A"/>
+                </a:solidFill>
+                <a:latin typeface="Inter"/>
+              </a:rPr>
+              <a:t>Sharding</a:t>
+            </a:r>
+          </a:p>
+        </p:txBody>
+      </p:sp>
+      <p:sp>
+        <p:nvSpPr>
+          <p:cNvPr id="20" name="TextBox 19"/>
+          <p:cNvSpPr txBox="1"/>
+          <p:nvPr/>
+        </p:nvSpPr>
+        <p:spPr>
+          <a:xfrm>
+            <a:off x="6537960" y="3557016"/>
+            <a:ext cx="4846320" cy="548640"/>
+          </a:xfrm>
+          <a:prstGeom prst="rect">
+            <a:avLst/>
+          </a:prstGeom>
+          <a:noFill/>
+        </p:spPr>
+        <p:txBody>
+          <a:bodyPr wrap="square">
+            <a:spAutoFit/>
+          </a:bodyPr>
+          <a:lstStyle/>
+          <a:p>
+            <a:pPr algn="l"/>
+            <a:r>
+              <a:rPr sz="1800" b="1" i="0">
+                <a:solidFill>
+                  <a:srgbClr val="0F172A"/>
+                </a:solidFill>
+                <a:latin typeface="Inter"/>
+              </a:rPr>
+              <a:t>Multi-node consistency</a:t>
+            </a:r>
+          </a:p>
+        </p:txBody>
+      </p:sp>
+      <p:sp>
+        <p:nvSpPr>
+          <p:cNvPr id="21" name="TextBox 20"/>
+          <p:cNvSpPr txBox="1"/>
+          <p:nvPr/>
+        </p:nvSpPr>
+        <p:spPr>
+          <a:xfrm>
+            <a:off x="6537960" y="4215384"/>
+            <a:ext cx="4846320" cy="548640"/>
+          </a:xfrm>
+          <a:prstGeom prst="rect">
+            <a:avLst/>
+          </a:prstGeom>
+          <a:noFill/>
+        </p:spPr>
+        <p:txBody>
+          <a:bodyPr wrap="square">
+            <a:spAutoFit/>
+          </a:bodyPr>
+          <a:lstStyle/>
+          <a:p>
+            <a:pPr algn="l"/>
+            <a:r>
+              <a:rPr sz="1800" b="1" i="0">
+                <a:solidFill>
+                  <a:srgbClr val="0F172A"/>
+                </a:solidFill>
+                <a:latin typeface="Inter"/>
+              </a:rPr>
+              <a:t>Elections / cross-node oplog</a:t>
+            </a:r>
+          </a:p>
+        </p:txBody>
+      </p:sp>
+      <p:sp>
+        <p:nvSpPr>
+          <p:cNvPr id="22" name="Rounded Rectangle 21">
             <a:hlinkClick action="ppaction://hlinksldjump" r:id="rId2"/>
           </p:cNvPr>
           <p:cNvSpPr/>
@@ -7105,50 +7293,6 @@
             <a:avLst/>
           </a:prstGeom>
           <a:solidFill>
-            <a:srgbClr val="F8FAFC"/>
-          </a:solidFill>
-          <a:ln>
-            <a:noFill/>
-          </a:ln>
-          <a:effectLst/>
-        </p:spPr>
-        <p:style>
-          <a:lnRef idx="1">
-            <a:schemeClr val="accent1"/>
-          </a:lnRef>
-          <a:fillRef idx="3">
-            <a:schemeClr val="accent1"/>
-          </a:fillRef>
-          <a:effectRef idx="2">
-            <a:schemeClr val="accent1"/>
-          </a:effectRef>
-          <a:fontRef idx="minor">
-            <a:schemeClr val="lt1"/>
-          </a:fontRef>
-        </p:style>
-        <p:txBody>
-          <a:bodyPr rtlCol="0" anchor="ctr"/>
-          <a:lstStyle/>
-          <a:p>
-            <a:pPr algn="ctr"/>
-          </a:p>
-        </p:txBody>
-      </p:sp>
-      <p:sp>
-        <p:nvSpPr>
-          <p:cNvPr id="3" name="Rectangle 2"/>
-          <p:cNvSpPr/>
-          <p:nvPr/>
-        </p:nvSpPr>
-        <p:spPr>
-          <a:xfrm>
-            <a:off x="0" y="0"/>
-            <a:ext cx="12191695" cy="1024128"/>
-          </a:xfrm>
-          <a:prstGeom prst="rect">
-            <a:avLst/>
-          </a:prstGeom>
-          <a:solidFill>
             <a:srgbClr val="0F172A"/>
           </a:solidFill>
           <a:ln>
@@ -7180,14 +7324,14 @@
       </p:sp>
       <p:sp>
         <p:nvSpPr>
-          <p:cNvPr id="4" name="Rectangle 3"/>
+          <p:cNvPr id="3" name="Rectangle 2"/>
           <p:cNvSpPr/>
           <p:nvPr/>
         </p:nvSpPr>
         <p:spPr>
           <a:xfrm>
-            <a:off x="0" y="1024128"/>
-            <a:ext cx="12191695" cy="50800"/>
+            <a:off x="822960" y="2468880"/>
+            <a:ext cx="146304" cy="1554480"/>
           </a:xfrm>
           <a:prstGeom prst="rect">
             <a:avLst/>
@@ -7224,14 +7368,14 @@
       </p:sp>
       <p:sp>
         <p:nvSpPr>
-          <p:cNvPr id="5" name="TextBox 4"/>
+          <p:cNvPr id="4" name="TextBox 3"/>
           <p:cNvSpPr txBox="1"/>
           <p:nvPr/>
         </p:nvSpPr>
         <p:spPr>
           <a:xfrm>
-            <a:off x="548640" y="146304"/>
-            <a:ext cx="10972800" cy="713232"/>
+            <a:off x="1143000" y="2286000"/>
+            <a:ext cx="10058400" cy="640080"/>
           </a:xfrm>
           <a:prstGeom prst="rect">
             <a:avLst/>
@@ -7246,27 +7390,27 @@
           <a:p>
             <a:pPr algn="l"/>
             <a:r>
-              <a:rPr sz="3000" b="1" i="0">
-                <a:solidFill>
-                  <a:srgbClr val="FFFFFF"/>
-                </a:solidFill>
-                <a:latin typeface="Inter"/>
-              </a:rPr>
-              <a:t>The layers, outermost-in</a:t>
-            </a:r>
-          </a:p>
-        </p:txBody>
-      </p:sp>
-      <p:sp>
-        <p:nvSpPr>
-          <p:cNvPr id="6" name="TextBox 5"/>
+              <a:rPr sz="1600" b="1" i="0">
+                <a:solidFill>
+                  <a:srgbClr val="22D3EE"/>
+                </a:solidFill>
+                <a:latin typeface="Inter"/>
+              </a:rPr>
+              <a:t>PART 3</a:t>
+            </a:r>
+          </a:p>
+        </p:txBody>
+      </p:sp>
+      <p:sp>
+        <p:nvSpPr>
+          <p:cNvPr id="5" name="TextBox 4"/>
           <p:cNvSpPr txBox="1"/>
           <p:nvPr/>
         </p:nvSpPr>
         <p:spPr>
           <a:xfrm>
-            <a:off x="576072" y="749808"/>
-            <a:ext cx="10972800" cy="274320"/>
+            <a:off x="1143000" y="2743200"/>
+            <a:ext cx="10241280" cy="1280160"/>
           </a:xfrm>
           <a:prstGeom prst="rect">
             <a:avLst/>
@@ -7281,51 +7425,56 @@
           <a:p>
             <a:pPr algn="l"/>
             <a:r>
-              <a:rPr sz="1200" b="0" i="0">
-                <a:solidFill>
-                  <a:srgbClr val="22D3EE"/>
-                </a:solidFill>
-                <a:latin typeface="Inter"/>
-              </a:rPr>
-              <a:t>EACH LAYER KNOWS ONLY THE ONE BELOW</a:t>
-            </a:r>
-          </a:p>
-        </p:txBody>
-      </p:sp>
-      <p:pic>
-        <p:nvPicPr>
-          <p:cNvPr id="7" name="Picture 6" descr="architecture_3.png"/>
-          <p:cNvPicPr>
-            <a:picLocks noChangeAspect="1"/>
-          </p:cNvPicPr>
-          <p:nvPr/>
-        </p:nvPicPr>
-        <p:blipFill>
-          <a:blip r:embed="rId2">
-            <a:extLst>
-              <a:ext uri="{96DAC541-7B7A-43D3-8B79-37D633B846F1}">
-                <ns0:svgBlip xmlns:ns0="http://schemas.microsoft.com/office/drawing/2016/SVG/main" r:embed="rId3"/>
-              </a:ext>
-            </a:extLst>
-          </a:blip>
-          <a:stretch>
-            <a:fillRect/>
-          </a:stretch>
-        </p:blipFill>
-        <p:spPr>
-          <a:xfrm>
-            <a:off x="838047" y="1417320"/>
-            <a:ext cx="10515600" cy="4572000"/>
-          </a:xfrm>
-          <a:prstGeom prst="rect">
-            <a:avLst/>
-          </a:prstGeom>
-        </p:spPr>
-      </p:pic>
-      <p:sp>
-        <p:nvSpPr>
-          <p:cNvPr id="8" name="Rounded Rectangle 7">
-            <a:hlinkClick action="ppaction://hlinksldjump" r:id="rId4"/>
+              <a:rPr sz="4000" b="1" i="0">
+                <a:solidFill>
+                  <a:srgbClr val="FFFFFF"/>
+                </a:solidFill>
+                <a:latin typeface="Inter"/>
+              </a:rPr>
+              <a:t>Architecture</a:t>
+            </a:r>
+          </a:p>
+        </p:txBody>
+      </p:sp>
+      <p:sp>
+        <p:nvSpPr>
+          <p:cNvPr id="6" name="TextBox 5"/>
+          <p:cNvSpPr txBox="1"/>
+          <p:nvPr/>
+        </p:nvSpPr>
+        <p:spPr>
+          <a:xfrm>
+            <a:off x="1161288" y="3840480"/>
+            <a:ext cx="10058400" cy="731520"/>
+          </a:xfrm>
+          <a:prstGeom prst="rect">
+            <a:avLst/>
+          </a:prstGeom>
+          <a:noFill/>
+        </p:spPr>
+        <p:txBody>
+          <a:bodyPr wrap="square">
+            <a:spAutoFit/>
+          </a:bodyPr>
+          <a:lstStyle/>
+          <a:p>
+            <a:pPr algn="l"/>
+            <a:r>
+              <a:rPr sz="1800" b="0" i="0">
+                <a:solidFill>
+                  <a:srgbClr val="CBD5E1"/>
+                </a:solidFill>
+                <a:latin typeface="Inter"/>
+              </a:rPr>
+              <a:t>From socket bytes to durable storage</a:t>
+            </a:r>
+          </a:p>
+        </p:txBody>
+      </p:sp>
+      <p:sp>
+        <p:nvSpPr>
+          <p:cNvPr id="7" name="Rounded Rectangle 6">
+            <a:hlinkClick action="ppaction://hlinksldjump" r:id="rId2"/>
           </p:cNvPr>
           <p:cNvSpPr/>
           <p:nvPr/>
@@ -7557,7 +7706,7 @@
                 </a:solidFill>
                 <a:latin typeface="Inter"/>
               </a:rPr>
-              <a:t>The critical decision: opaque BSON</a:t>
+              <a:t>The layers, outermost-in</a:t>
             </a:r>
           </a:p>
         </p:txBody>
@@ -7592,150 +7741,45 @@
                 </a:solidFill>
                 <a:latin typeface="Inter"/>
               </a:rPr>
-              <a:t>TYPE FIDELITY IS THE WHOLE GAME</a:t>
-            </a:r>
-          </a:p>
-        </p:txBody>
-      </p:sp>
-      <p:sp>
-        <p:nvSpPr>
-          <p:cNvPr id="7" name="TextBox 6"/>
-          <p:cNvSpPr txBox="1"/>
-          <p:nvPr/>
-        </p:nvSpPr>
-        <p:spPr>
-          <a:xfrm>
-            <a:off x="777240" y="1554480"/>
-            <a:ext cx="10607040" cy="4572000"/>
-          </a:xfrm>
-          <a:prstGeom prst="rect">
-            <a:avLst/>
-          </a:prstGeom>
-          <a:noFill/>
-        </p:spPr>
-        <p:txBody>
-          <a:bodyPr wrap="square">
-            <a:spAutoFit/>
-          </a:bodyPr>
-          <a:lstStyle/>
-          <a:p>
-            <a:pPr>
-              <a:lnSpc>
-                <a:spcPct val="104000"/>
-              </a:lnSpc>
-              <a:spcAft>
-                <a:spcPts val="2000"/>
-              </a:spcAft>
-            </a:pPr>
-            <a:r>
-              <a:rPr sz="2800" b="1">
-                <a:solidFill>
-                  <a:srgbClr val="06B6D4"/>
-                </a:solidFill>
-                <a:latin typeface="Inter"/>
-              </a:rPr>
-              <a:t>▪  </a:t>
-            </a:r>
-            <a:r>
-              <a:rPr sz="2800" b="1">
-                <a:solidFill>
-                  <a:srgbClr val="0F172A"/>
-                </a:solidFill>
-                <a:latin typeface="Inter"/>
-              </a:rPr>
-              <a:t>Documents stored as raw BSON bytes</a:t>
-            </a:r>
-          </a:p>
-          <a:p>
-            <a:pPr>
-              <a:lnSpc>
-                <a:spcPct val="104000"/>
-              </a:lnSpc>
-              <a:spcAft>
-                <a:spcPts val="2000"/>
-              </a:spcAft>
-            </a:pPr>
-            <a:r>
-              <a:rPr sz="2800" b="1">
-                <a:solidFill>
-                  <a:srgbClr val="06B6D4"/>
-                </a:solidFill>
-                <a:latin typeface="Inter"/>
-              </a:rPr>
-              <a:t>▪  </a:t>
-            </a:r>
-            <a:r>
-              <a:rPr sz="2800" b="1">
-                <a:solidFill>
-                  <a:srgbClr val="0F172A"/>
-                </a:solidFill>
-                <a:latin typeface="Inter"/>
-              </a:rPr>
-              <a:t>All logic runs in Python after decode</a:t>
-            </a:r>
-          </a:p>
-          <a:p>
-            <a:pPr>
-              <a:lnSpc>
-                <a:spcPct val="104000"/>
-              </a:lnSpc>
-              <a:spcAft>
-                <a:spcPts val="2000"/>
-              </a:spcAft>
-            </a:pPr>
-            <a:r>
-              <a:rPr sz="2800" b="1">
-                <a:solidFill>
-                  <a:srgbClr val="06B6D4"/>
-                </a:solidFill>
-                <a:latin typeface="Inter"/>
-              </a:rPr>
-              <a:t>▪  </a:t>
-            </a:r>
-            <a:r>
-              <a:rPr sz="2800" b="1">
-                <a:solidFill>
-                  <a:srgbClr val="0F172A"/>
-                </a:solidFill>
-                <a:latin typeface="Inter"/>
-              </a:rPr>
-              <a:t>Every BSON type preserved exactly</a:t>
-            </a:r>
-          </a:p>
-          <a:p>
-            <a:pPr>
-              <a:lnSpc>
-                <a:spcPct val="104000"/>
-              </a:lnSpc>
-              <a:spcAft>
-                <a:spcPts val="2000"/>
-              </a:spcAft>
-            </a:pPr>
-            <a:r>
-              <a:rPr sz="2800" b="1">
-                <a:solidFill>
-                  <a:srgbClr val="06B6D4"/>
-                </a:solidFill>
-                <a:latin typeface="Inter"/>
-              </a:rPr>
-              <a:t>▪  </a:t>
-            </a:r>
-            <a:r>
-              <a:rPr sz="2800" b="1">
-                <a:solidFill>
-                  <a:srgbClr val="0F172A"/>
-                </a:solidFill>
-                <a:latin typeface="Inter"/>
-              </a:rPr>
-              <a:t>Lossy storage would break the thesis</a:t>
-            </a:r>
-          </a:p>
-        </p:txBody>
-      </p:sp>
+              <a:t>EACH LAYER KNOWS ONLY THE ONE BELOW</a:t>
+            </a:r>
+          </a:p>
+        </p:txBody>
+      </p:sp>
+      <p:pic>
+        <p:nvPicPr>
+          <p:cNvPr id="7" name="Picture 6" descr="architecture_4.png"/>
+          <p:cNvPicPr>
+            <a:picLocks noChangeAspect="1"/>
+          </p:cNvPicPr>
+          <p:nvPr/>
+        </p:nvPicPr>
+        <p:blipFill>
+          <a:blip r:embed="rId2">
+            <a:extLst>
+              <a:ext uri="{96DAC541-7B7A-43D3-8B79-37D633B846F1}">
+                <ns0:svgBlip xmlns:ns0="http://schemas.microsoft.com/office/drawing/2016/SVG/main" r:embed="rId3"/>
+              </a:ext>
+            </a:extLst>
+          </a:blip>
+          <a:stretch>
+            <a:fillRect/>
+          </a:stretch>
+        </p:blipFill>
+        <p:spPr>
+          <a:xfrm>
+            <a:off x="838047" y="1417320"/>
+            <a:ext cx="10515600" cy="4572000"/>
+          </a:xfrm>
+          <a:prstGeom prst="rect">
+            <a:avLst/>
+          </a:prstGeom>
+        </p:spPr>
+      </p:pic>
       <p:sp>
         <p:nvSpPr>
           <p:cNvPr id="8" name="Rounded Rectangle 7">
-            <a:hlinkClick action="ppaction://hlinksldjump" r:id="rId2"/>
+            <a:hlinkClick action="ppaction://hlinksldjump" r:id="rId4"/>
           </p:cNvPr>
           <p:cNvSpPr/>
           <p:nvPr/>
@@ -7967,7 +8011,7 @@
                 </a:solidFill>
                 <a:latin typeface="Inter"/>
               </a:rPr>
-              <a:t>Storage: WiredTiger, the real thing</a:t>
+              <a:t>The critical decision: opaque BSON</a:t>
             </a:r>
           </a:p>
         </p:txBody>
@@ -8002,7 +8046,7 @@
                 </a:solidFill>
                 <a:latin typeface="Inter"/>
               </a:rPr>
-              <a:t>SAME ENGINE AS MONGODB</a:t>
+              <a:t>TYPE FIDELITY IS THE WHOLE GAME</a:t>
             </a:r>
           </a:p>
         </p:txBody>
@@ -8053,7 +8097,7 @@
                 </a:solidFill>
                 <a:latin typeface="Inter"/>
               </a:rPr>
-              <a:t>The exact engine MongoDB itself uses</a:t>
+              <a:t>Documents stored as raw BSON bytes</a:t>
             </a:r>
           </a:p>
           <a:p>
@@ -8081,7 +8125,7 @@
                 </a:solidFill>
                 <a:latin typeface="Inter"/>
               </a:rPr>
-              <a:t>Vendored; ships as pre-built wheels</a:t>
+              <a:t>All logic runs in Python after decode</a:t>
             </a:r>
           </a:p>
           <a:p>
@@ -8109,7 +8153,7 @@
                 </a:solidFill>
                 <a:latin typeface="Inter"/>
               </a:rPr>
-              <a:t>Four tables, byte-sortable keys</a:t>
+              <a:t>Every BSON type preserved exactly</a:t>
             </a:r>
           </a:p>
           <a:p>
@@ -8137,7 +8181,7 @@
                 </a:solidFill>
                 <a:latin typeface="Inter"/>
               </a:rPr>
-              <a:t>“:memory:” for instant, throwaway DBs</a:t>
+              <a:t>Lossy storage would break the thesis</a:t>
             </a:r>
           </a:p>
         </p:txBody>
@@ -8377,7 +8421,7 @@
                 </a:solidFill>
                 <a:latin typeface="Inter"/>
               </a:rPr>
-              <a:t>Indexing — broader than you'd expect</a:t>
+              <a:t>Storage: WiredTiger, the real thing</a:t>
             </a:r>
           </a:p>
         </p:txBody>
@@ -8412,7 +8456,7 @@
                 </a:solidFill>
                 <a:latin typeface="Inter"/>
               </a:rPr>
-              <a:t>A REAL QUERY PLANNER</a:t>
+              <a:t>SAME ENGINE AS MONGODB</a:t>
             </a:r>
           </a:p>
         </p:txBody>
@@ -8463,7 +8507,7 @@
                 </a:solidFill>
                 <a:latin typeface="Inter"/>
               </a:rPr>
-              <a:t>Compound, multikey, partial, TTL</a:t>
+              <a:t>The exact engine MongoDB itself uses</a:t>
             </a:r>
           </a:p>
           <a:p>
@@ -8491,7 +8535,7 @@
                 </a:solidFill>
                 <a:latin typeface="Inter"/>
               </a:rPr>
-              <a:t>Geospatial: 2d and 2dsphere</a:t>
+              <a:t>Vendored; ships as pre-built wheels</a:t>
             </a:r>
           </a:p>
           <a:p>
@@ -8519,7 +8563,7 @@
                 </a:solidFill>
                 <a:latin typeface="Inter"/>
               </a:rPr>
-              <a:t>Planner picks IXSCAN vs COLLSCAN</a:t>
+              <a:t>Four tables, byte-sortable keys</a:t>
             </a:r>
           </a:p>
           <a:p>
@@ -8547,7 +8591,7 @@
                 </a:solidFill>
                 <a:latin typeface="Inter"/>
               </a:rPr>
-              <a:t>hint, $natural, indexed sort — all honoured</a:t>
+              <a:t>“:memory:” for instant, throwaway DBs</a:t>
             </a:r>
           </a:p>
         </p:txBody>
@@ -8787,7 +8831,7 @@
                 </a:solidFill>
                 <a:latin typeface="Inter"/>
               </a:rPr>
-              <a:t>Change streams — the ambitious bit</a:t>
+              <a:t>Indexing — broader than you'd expect</a:t>
             </a:r>
           </a:p>
         </p:txBody>
@@ -8822,7 +8866,7 @@
                 </a:solidFill>
                 <a:latin typeface="Inter"/>
               </a:rPr>
-              <a:t>OPLOG · RESUME TOKENS · PRE-IMAGES</a:t>
+              <a:t>A REAL QUERY PLANNER</a:t>
             </a:r>
           </a:p>
         </p:txBody>
@@ -8873,7 +8917,7 @@
                 </a:solidFill>
                 <a:latin typeface="Inter"/>
               </a:rPr>
-              <a:t>Oplog-backed, mongod-shaped entries</a:t>
+              <a:t>Compound, multikey, partial, TTL</a:t>
             </a:r>
           </a:p>
           <a:p>
@@ -8901,7 +8945,7 @@
                 </a:solidFill>
                 <a:latin typeface="Inter"/>
               </a:rPr>
-              <a:t>Resume tokens — pick up where you left off</a:t>
+              <a:t>Geospatial: 2d and 2dsphere</a:t>
             </a:r>
           </a:p>
           <a:p>
@@ -8929,7 +8973,7 @@
                 </a:solidFill>
                 <a:latin typeface="Inter"/>
               </a:rPr>
-              <a:t>fullDocument &amp; before-change pre-images</a:t>
+              <a:t>Planner picks IXSCAN vs COLLSCAN</a:t>
             </a:r>
           </a:p>
           <a:p>
@@ -8957,7 +9001,7 @@
                 </a:solidFill>
                 <a:latin typeface="Inter"/>
               </a:rPr>
-              <a:t>awaitData blocking; invalidation events</a:t>
+              <a:t>hint, $natural, indexed sort — all honoured</a:t>
             </a:r>
           </a:p>
         </p:txBody>
@@ -9050,6 +9094,50 @@
             <a:avLst/>
           </a:prstGeom>
           <a:solidFill>
+            <a:srgbClr val="F8FAFC"/>
+          </a:solidFill>
+          <a:ln>
+            <a:noFill/>
+          </a:ln>
+          <a:effectLst/>
+        </p:spPr>
+        <p:style>
+          <a:lnRef idx="1">
+            <a:schemeClr val="accent1"/>
+          </a:lnRef>
+          <a:fillRef idx="3">
+            <a:schemeClr val="accent1"/>
+          </a:fillRef>
+          <a:effectRef idx="2">
+            <a:schemeClr val="accent1"/>
+          </a:effectRef>
+          <a:fontRef idx="minor">
+            <a:schemeClr val="lt1"/>
+          </a:fontRef>
+        </p:style>
+        <p:txBody>
+          <a:bodyPr rtlCol="0" anchor="ctr"/>
+          <a:lstStyle/>
+          <a:p>
+            <a:pPr algn="ctr"/>
+          </a:p>
+        </p:txBody>
+      </p:sp>
+      <p:sp>
+        <p:nvSpPr>
+          <p:cNvPr id="3" name="Rectangle 2"/>
+          <p:cNvSpPr/>
+          <p:nvPr/>
+        </p:nvSpPr>
+        <p:spPr>
+          <a:xfrm>
+            <a:off x="0" y="0"/>
+            <a:ext cx="12191695" cy="1024128"/>
+          </a:xfrm>
+          <a:prstGeom prst="rect">
+            <a:avLst/>
+          </a:prstGeom>
+          <a:solidFill>
             <a:srgbClr val="0F172A"/>
           </a:solidFill>
           <a:ln>
@@ -9081,14 +9169,14 @@
       </p:sp>
       <p:sp>
         <p:nvSpPr>
-          <p:cNvPr id="3" name="Rectangle 2"/>
+          <p:cNvPr id="4" name="Rectangle 3"/>
           <p:cNvSpPr/>
           <p:nvPr/>
         </p:nvSpPr>
         <p:spPr>
           <a:xfrm>
-            <a:off x="822960" y="2468880"/>
-            <a:ext cx="146304" cy="1554480"/>
+            <a:off x="0" y="1024128"/>
+            <a:ext cx="12191695" cy="50800"/>
           </a:xfrm>
           <a:prstGeom prst="rect">
             <a:avLst/>
@@ -9125,14 +9213,14 @@
       </p:sp>
       <p:sp>
         <p:nvSpPr>
-          <p:cNvPr id="4" name="TextBox 3"/>
+          <p:cNvPr id="5" name="TextBox 4"/>
           <p:cNvSpPr txBox="1"/>
           <p:nvPr/>
         </p:nvSpPr>
         <p:spPr>
           <a:xfrm>
-            <a:off x="1143000" y="2286000"/>
-            <a:ext cx="10058400" cy="640080"/>
+            <a:off x="548640" y="146304"/>
+            <a:ext cx="10972800" cy="713232"/>
           </a:xfrm>
           <a:prstGeom prst="rect">
             <a:avLst/>
@@ -9147,27 +9235,27 @@
           <a:p>
             <a:pPr algn="l"/>
             <a:r>
-              <a:rPr sz="1600" b="1" i="0">
-                <a:solidFill>
-                  <a:srgbClr val="22D3EE"/>
-                </a:solidFill>
-                <a:latin typeface="Inter"/>
-              </a:rPr>
-              <a:t>PART 4</a:t>
-            </a:r>
-          </a:p>
-        </p:txBody>
-      </p:sp>
-      <p:sp>
-        <p:nvSpPr>
-          <p:cNvPr id="5" name="TextBox 4"/>
+              <a:rPr sz="3000" b="1" i="0">
+                <a:solidFill>
+                  <a:srgbClr val="FFFFFF"/>
+                </a:solidFill>
+                <a:latin typeface="Inter"/>
+              </a:rPr>
+              <a:t>Change streams — the ambitious bit</a:t>
+            </a:r>
+          </a:p>
+        </p:txBody>
+      </p:sp>
+      <p:sp>
+        <p:nvSpPr>
+          <p:cNvPr id="6" name="TextBox 5"/>
           <p:cNvSpPr txBox="1"/>
           <p:nvPr/>
         </p:nvSpPr>
         <p:spPr>
           <a:xfrm>
-            <a:off x="1143000" y="2743200"/>
-            <a:ext cx="10241280" cy="1280160"/>
+            <a:off x="576072" y="749808"/>
+            <a:ext cx="10972800" cy="274320"/>
           </a:xfrm>
           <a:prstGeom prst="rect">
             <a:avLst/>
@@ -9182,27 +9270,27 @@
           <a:p>
             <a:pPr algn="l"/>
             <a:r>
-              <a:rPr sz="4000" b="1" i="0">
-                <a:solidFill>
-                  <a:srgbClr val="FFFFFF"/>
-                </a:solidFill>
-                <a:latin typeface="Inter"/>
-              </a:rPr>
-              <a:t>How we prove it works</a:t>
-            </a:r>
-          </a:p>
-        </p:txBody>
-      </p:sp>
-      <p:sp>
-        <p:nvSpPr>
-          <p:cNvPr id="6" name="TextBox 5"/>
+              <a:rPr sz="1200" b="0" i="0">
+                <a:solidFill>
+                  <a:srgbClr val="22D3EE"/>
+                </a:solidFill>
+                <a:latin typeface="Inter"/>
+              </a:rPr>
+              <a:t>OPLOG · RESUME TOKENS · PRE-IMAGES</a:t>
+            </a:r>
+          </a:p>
+        </p:txBody>
+      </p:sp>
+      <p:sp>
+        <p:nvSpPr>
+          <p:cNvPr id="7" name="TextBox 6"/>
           <p:cNvSpPr txBox="1"/>
           <p:nvPr/>
         </p:nvSpPr>
         <p:spPr>
           <a:xfrm>
-            <a:off x="1161288" y="3840480"/>
-            <a:ext cx="10058400" cy="731520"/>
+            <a:off x="777240" y="1554480"/>
+            <a:ext cx="10607040" cy="4572000"/>
           </a:xfrm>
           <a:prstGeom prst="rect">
             <a:avLst/>
@@ -9215,22 +9303,122 @@
           </a:bodyPr>
           <a:lstStyle/>
           <a:p>
-            <a:pPr algn="l"/>
-            <a:r>
-              <a:rPr sz="1800" b="0" i="0">
-                <a:solidFill>
-                  <a:srgbClr val="CBD5E1"/>
-                </a:solidFill>
-                <a:latin typeface="Inter"/>
-              </a:rPr>
-              <a:t>Conformance over confidence</a:t>
-            </a:r>
-          </a:p>
-        </p:txBody>
-      </p:sp>
-      <p:sp>
-        <p:nvSpPr>
-          <p:cNvPr id="7" name="Rounded Rectangle 6">
+            <a:pPr>
+              <a:lnSpc>
+                <a:spcPct val="104000"/>
+              </a:lnSpc>
+              <a:spcAft>
+                <a:spcPts val="2000"/>
+              </a:spcAft>
+            </a:pPr>
+            <a:r>
+              <a:rPr sz="2800" b="1">
+                <a:solidFill>
+                  <a:srgbClr val="06B6D4"/>
+                </a:solidFill>
+                <a:latin typeface="Inter"/>
+              </a:rPr>
+              <a:t>▪  </a:t>
+            </a:r>
+            <a:r>
+              <a:rPr sz="2800" b="1">
+                <a:solidFill>
+                  <a:srgbClr val="0F172A"/>
+                </a:solidFill>
+                <a:latin typeface="Inter"/>
+              </a:rPr>
+              <a:t>Oplog-backed, mongod-shaped entries</a:t>
+            </a:r>
+          </a:p>
+          <a:p>
+            <a:pPr>
+              <a:lnSpc>
+                <a:spcPct val="104000"/>
+              </a:lnSpc>
+              <a:spcAft>
+                <a:spcPts val="2000"/>
+              </a:spcAft>
+            </a:pPr>
+            <a:r>
+              <a:rPr sz="2800" b="1">
+                <a:solidFill>
+                  <a:srgbClr val="06B6D4"/>
+                </a:solidFill>
+                <a:latin typeface="Inter"/>
+              </a:rPr>
+              <a:t>▪  </a:t>
+            </a:r>
+            <a:r>
+              <a:rPr sz="2800" b="1">
+                <a:solidFill>
+                  <a:srgbClr val="0F172A"/>
+                </a:solidFill>
+                <a:latin typeface="Inter"/>
+              </a:rPr>
+              <a:t>Resume tokens — pick up where you left off</a:t>
+            </a:r>
+          </a:p>
+          <a:p>
+            <a:pPr>
+              <a:lnSpc>
+                <a:spcPct val="104000"/>
+              </a:lnSpc>
+              <a:spcAft>
+                <a:spcPts val="2000"/>
+              </a:spcAft>
+            </a:pPr>
+            <a:r>
+              <a:rPr sz="2800" b="1">
+                <a:solidFill>
+                  <a:srgbClr val="06B6D4"/>
+                </a:solidFill>
+                <a:latin typeface="Inter"/>
+              </a:rPr>
+              <a:t>▪  </a:t>
+            </a:r>
+            <a:r>
+              <a:rPr sz="2800" b="1">
+                <a:solidFill>
+                  <a:srgbClr val="0F172A"/>
+                </a:solidFill>
+                <a:latin typeface="Inter"/>
+              </a:rPr>
+              <a:t>fullDocument &amp; before-change pre-images</a:t>
+            </a:r>
+          </a:p>
+          <a:p>
+            <a:pPr>
+              <a:lnSpc>
+                <a:spcPct val="104000"/>
+              </a:lnSpc>
+              <a:spcAft>
+                <a:spcPts val="2000"/>
+              </a:spcAft>
+            </a:pPr>
+            <a:r>
+              <a:rPr sz="2800" b="1">
+                <a:solidFill>
+                  <a:srgbClr val="06B6D4"/>
+                </a:solidFill>
+                <a:latin typeface="Inter"/>
+              </a:rPr>
+              <a:t>▪  </a:t>
+            </a:r>
+            <a:r>
+              <a:rPr sz="2800" b="1">
+                <a:solidFill>
+                  <a:srgbClr val="0F172A"/>
+                </a:solidFill>
+                <a:latin typeface="Inter"/>
+              </a:rPr>
+              <a:t>awaitData blocking; invalidation events</a:t>
+            </a:r>
+          </a:p>
+        </p:txBody>
+      </p:sp>
+      <p:sp>
+        <p:nvSpPr>
+          <p:cNvPr id="8" name="Rounded Rectangle 7">
             <a:hlinkClick action="ppaction://hlinksldjump" r:id="rId2"/>
           </p:cNvPr>
           <p:cNvSpPr/>
@@ -9316,50 +9504,6 @@
             <a:avLst/>
           </a:prstGeom>
           <a:solidFill>
-            <a:srgbClr val="F8FAFC"/>
-          </a:solidFill>
-          <a:ln>
-            <a:noFill/>
-          </a:ln>
-          <a:effectLst/>
-        </p:spPr>
-        <p:style>
-          <a:lnRef idx="1">
-            <a:schemeClr val="accent1"/>
-          </a:lnRef>
-          <a:fillRef idx="3">
-            <a:schemeClr val="accent1"/>
-          </a:fillRef>
-          <a:effectRef idx="2">
-            <a:schemeClr val="accent1"/>
-          </a:effectRef>
-          <a:fontRef idx="minor">
-            <a:schemeClr val="lt1"/>
-          </a:fontRef>
-        </p:style>
-        <p:txBody>
-          <a:bodyPr rtlCol="0" anchor="ctr"/>
-          <a:lstStyle/>
-          <a:p>
-            <a:pPr algn="ctr"/>
-          </a:p>
-        </p:txBody>
-      </p:sp>
-      <p:sp>
-        <p:nvSpPr>
-          <p:cNvPr id="3" name="Rectangle 2"/>
-          <p:cNvSpPr/>
-          <p:nvPr/>
-        </p:nvSpPr>
-        <p:spPr>
-          <a:xfrm>
-            <a:off x="0" y="0"/>
-            <a:ext cx="12191695" cy="1024128"/>
-          </a:xfrm>
-          <a:prstGeom prst="rect">
-            <a:avLst/>
-          </a:prstGeom>
-          <a:solidFill>
             <a:srgbClr val="0F172A"/>
           </a:solidFill>
           <a:ln>
@@ -9391,14 +9535,14 @@
       </p:sp>
       <p:sp>
         <p:nvSpPr>
-          <p:cNvPr id="4" name="Rectangle 3"/>
+          <p:cNvPr id="3" name="Rectangle 2"/>
           <p:cNvSpPr/>
           <p:nvPr/>
         </p:nvSpPr>
         <p:spPr>
           <a:xfrm>
-            <a:off x="0" y="1024128"/>
-            <a:ext cx="12191695" cy="50800"/>
+            <a:off x="822960" y="2468880"/>
+            <a:ext cx="146304" cy="1554480"/>
           </a:xfrm>
           <a:prstGeom prst="rect">
             <a:avLst/>
@@ -9435,14 +9579,14 @@
       </p:sp>
       <p:sp>
         <p:nvSpPr>
-          <p:cNvPr id="5" name="TextBox 4"/>
+          <p:cNvPr id="4" name="TextBox 3"/>
           <p:cNvSpPr txBox="1"/>
           <p:nvPr/>
         </p:nvSpPr>
         <p:spPr>
           <a:xfrm>
-            <a:off x="548640" y="146304"/>
-            <a:ext cx="10972800" cy="713232"/>
+            <a:off x="1143000" y="2286000"/>
+            <a:ext cx="10058400" cy="640080"/>
           </a:xfrm>
           <a:prstGeom prst="rect">
             <a:avLst/>
@@ -9457,27 +9601,27 @@
           <a:p>
             <a:pPr algn="l"/>
             <a:r>
-              <a:rPr sz="3000" b="1" i="0">
-                <a:solidFill>
-                  <a:srgbClr val="FFFFFF"/>
-                </a:solidFill>
-                <a:latin typeface="Inter"/>
-              </a:rPr>
-              <a:t>Driver-conformance gauges</a:t>
-            </a:r>
-          </a:p>
-        </p:txBody>
-      </p:sp>
-      <p:sp>
-        <p:nvSpPr>
-          <p:cNvPr id="6" name="TextBox 5"/>
+              <a:rPr sz="1600" b="1" i="0">
+                <a:solidFill>
+                  <a:srgbClr val="22D3EE"/>
+                </a:solidFill>
+                <a:latin typeface="Inter"/>
+              </a:rPr>
+              <a:t>PART 4</a:t>
+            </a:r>
+          </a:p>
+        </p:txBody>
+      </p:sp>
+      <p:sp>
+        <p:nvSpPr>
+          <p:cNvPr id="5" name="TextBox 4"/>
           <p:cNvSpPr txBox="1"/>
           <p:nvPr/>
         </p:nvSpPr>
         <p:spPr>
           <a:xfrm>
-            <a:off x="576072" y="749808"/>
-            <a:ext cx="10972800" cy="274320"/>
+            <a:off x="1143000" y="2743200"/>
+            <a:ext cx="10241280" cy="1280160"/>
           </a:xfrm>
           <a:prstGeom prst="rect">
             <a:avLst/>
@@ -9492,51 +9636,56 @@
           <a:p>
             <a:pPr algn="l"/>
             <a:r>
-              <a:rPr sz="1200" b="0" i="0">
-                <a:solidFill>
-                  <a:srgbClr val="22D3EE"/>
-                </a:solidFill>
-                <a:latin typeface="Inter"/>
-              </a:rPr>
-              <a:t>RUN THE TESTS A REAL DRIVER RUNS</a:t>
-            </a:r>
-          </a:p>
-        </p:txBody>
-      </p:sp>
-      <p:pic>
-        <p:nvPicPr>
-          <p:cNvPr id="7" name="Picture 6" descr="conformance-gauges_4.png"/>
-          <p:cNvPicPr>
-            <a:picLocks noChangeAspect="1"/>
-          </p:cNvPicPr>
-          <p:nvPr/>
-        </p:nvPicPr>
-        <p:blipFill>
-          <a:blip r:embed="rId2">
-            <a:extLst>
-              <a:ext uri="{96DAC541-7B7A-43D3-8B79-37D633B846F1}">
-                <ns0:svgBlip xmlns:ns0="http://schemas.microsoft.com/office/drawing/2016/SVG/main" r:embed="rId3"/>
-              </a:ext>
-            </a:extLst>
-          </a:blip>
-          <a:stretch>
-            <a:fillRect/>
-          </a:stretch>
-        </p:blipFill>
-        <p:spPr>
-          <a:xfrm>
-            <a:off x="746607" y="1417320"/>
-            <a:ext cx="10698480" cy="4190237"/>
-          </a:xfrm>
-          <a:prstGeom prst="rect">
-            <a:avLst/>
-          </a:prstGeom>
-        </p:spPr>
-      </p:pic>
-      <p:sp>
-        <p:nvSpPr>
-          <p:cNvPr id="8" name="Rounded Rectangle 7">
-            <a:hlinkClick action="ppaction://hlinksldjump" r:id="rId4"/>
+              <a:rPr sz="4000" b="1" i="0">
+                <a:solidFill>
+                  <a:srgbClr val="FFFFFF"/>
+                </a:solidFill>
+                <a:latin typeface="Inter"/>
+              </a:rPr>
+              <a:t>How we prove it works</a:t>
+            </a:r>
+          </a:p>
+        </p:txBody>
+      </p:sp>
+      <p:sp>
+        <p:nvSpPr>
+          <p:cNvPr id="6" name="TextBox 5"/>
+          <p:cNvSpPr txBox="1"/>
+          <p:nvPr/>
+        </p:nvSpPr>
+        <p:spPr>
+          <a:xfrm>
+            <a:off x="1161288" y="3840480"/>
+            <a:ext cx="10058400" cy="731520"/>
+          </a:xfrm>
+          <a:prstGeom prst="rect">
+            <a:avLst/>
+          </a:prstGeom>
+          <a:noFill/>
+        </p:spPr>
+        <p:txBody>
+          <a:bodyPr wrap="square">
+            <a:spAutoFit/>
+          </a:bodyPr>
+          <a:lstStyle/>
+          <a:p>
+            <a:pPr algn="l"/>
+            <a:r>
+              <a:rPr sz="1800" b="0" i="0">
+                <a:solidFill>
+                  <a:srgbClr val="CBD5E1"/>
+                </a:solidFill>
+                <a:latin typeface="Inter"/>
+              </a:rPr>
+              <a:t>Conformance over confidence</a:t>
+            </a:r>
+          </a:p>
+        </p:txBody>
+      </p:sp>
+      <p:sp>
+        <p:nvSpPr>
+          <p:cNvPr id="7" name="Rounded Rectangle 6">
+            <a:hlinkClick action="ppaction://hlinksldjump" r:id="rId2"/>
           </p:cNvPr>
           <p:cNvSpPr/>
           <p:nvPr/>
@@ -9621,6 +9770,50 @@
             <a:avLst/>
           </a:prstGeom>
           <a:solidFill>
+            <a:srgbClr val="F8FAFC"/>
+          </a:solidFill>
+          <a:ln>
+            <a:noFill/>
+          </a:ln>
+          <a:effectLst/>
+        </p:spPr>
+        <p:style>
+          <a:lnRef idx="1">
+            <a:schemeClr val="accent1"/>
+          </a:lnRef>
+          <a:fillRef idx="3">
+            <a:schemeClr val="accent1"/>
+          </a:fillRef>
+          <a:effectRef idx="2">
+            <a:schemeClr val="accent1"/>
+          </a:effectRef>
+          <a:fontRef idx="minor">
+            <a:schemeClr val="lt1"/>
+          </a:fontRef>
+        </p:style>
+        <p:txBody>
+          <a:bodyPr rtlCol="0" anchor="ctr"/>
+          <a:lstStyle/>
+          <a:p>
+            <a:pPr algn="ctr"/>
+          </a:p>
+        </p:txBody>
+      </p:sp>
+      <p:sp>
+        <p:nvSpPr>
+          <p:cNvPr id="3" name="Rectangle 2"/>
+          <p:cNvSpPr/>
+          <p:nvPr/>
+        </p:nvSpPr>
+        <p:spPr>
+          <a:xfrm>
+            <a:off x="0" y="0"/>
+            <a:ext cx="12191695" cy="1024128"/>
+          </a:xfrm>
+          <a:prstGeom prst="rect">
+            <a:avLst/>
+          </a:prstGeom>
+          <a:solidFill>
             <a:srgbClr val="0F172A"/>
           </a:solidFill>
           <a:ln>
@@ -9652,14 +9845,14 @@
       </p:sp>
       <p:sp>
         <p:nvSpPr>
-          <p:cNvPr id="3" name="Rectangle 2"/>
+          <p:cNvPr id="4" name="Rectangle 3"/>
           <p:cNvSpPr/>
           <p:nvPr/>
         </p:nvSpPr>
         <p:spPr>
           <a:xfrm>
-            <a:off x="822960" y="2468880"/>
-            <a:ext cx="146304" cy="1554480"/>
+            <a:off x="0" y="1024128"/>
+            <a:ext cx="12191695" cy="50800"/>
           </a:xfrm>
           <a:prstGeom prst="rect">
             <a:avLst/>
@@ -9696,14 +9889,14 @@
       </p:sp>
       <p:sp>
         <p:nvSpPr>
-          <p:cNvPr id="4" name="TextBox 3"/>
+          <p:cNvPr id="5" name="TextBox 4"/>
           <p:cNvSpPr txBox="1"/>
           <p:nvPr/>
         </p:nvSpPr>
         <p:spPr>
           <a:xfrm>
-            <a:off x="1143000" y="2286000"/>
-            <a:ext cx="10058400" cy="640080"/>
+            <a:off x="548640" y="146304"/>
+            <a:ext cx="10972800" cy="713232"/>
           </a:xfrm>
           <a:prstGeom prst="rect">
             <a:avLst/>
@@ -9718,27 +9911,27 @@
           <a:p>
             <a:pPr algn="l"/>
             <a:r>
-              <a:rPr sz="1600" b="1" i="0">
-                <a:solidFill>
-                  <a:srgbClr val="22D3EE"/>
-                </a:solidFill>
-                <a:latin typeface="Inter"/>
-              </a:rPr>
-              <a:t>PART 5</a:t>
-            </a:r>
-          </a:p>
-        </p:txBody>
-      </p:sp>
-      <p:sp>
-        <p:nvSpPr>
-          <p:cNvPr id="5" name="TextBox 4"/>
+              <a:rPr sz="3000" b="1" i="0">
+                <a:solidFill>
+                  <a:srgbClr val="FFFFFF"/>
+                </a:solidFill>
+                <a:latin typeface="Inter"/>
+              </a:rPr>
+              <a:t>Driver-conformance gauges</a:t>
+            </a:r>
+          </a:p>
+        </p:txBody>
+      </p:sp>
+      <p:sp>
+        <p:nvSpPr>
+          <p:cNvPr id="6" name="TextBox 5"/>
           <p:cNvSpPr txBox="1"/>
           <p:nvPr/>
         </p:nvSpPr>
         <p:spPr>
           <a:xfrm>
-            <a:off x="1143000" y="2743200"/>
-            <a:ext cx="10241280" cy="1280160"/>
+            <a:off x="576072" y="749808"/>
+            <a:ext cx="10972800" cy="274320"/>
           </a:xfrm>
           <a:prstGeom prst="rect">
             <a:avLst/>
@@ -9753,56 +9946,51 @@
           <a:p>
             <a:pPr algn="l"/>
             <a:r>
-              <a:rPr sz="4000" b="1" i="0">
-                <a:solidFill>
-                  <a:srgbClr val="FFFFFF"/>
-                </a:solidFill>
-                <a:latin typeface="Inter"/>
-              </a:rPr>
-              <a:t>Progression to date</a:t>
-            </a:r>
-          </a:p>
-        </p:txBody>
-      </p:sp>
-      <p:sp>
-        <p:nvSpPr>
-          <p:cNvPr id="6" name="TextBox 5"/>
-          <p:cNvSpPr txBox="1"/>
-          <p:nvPr/>
-        </p:nvSpPr>
-        <p:spPr>
-          <a:xfrm>
-            <a:off x="1161288" y="3840480"/>
-            <a:ext cx="10058400" cy="731520"/>
-          </a:xfrm>
-          <a:prstGeom prst="rect">
-            <a:avLst/>
-          </a:prstGeom>
-          <a:noFill/>
-        </p:spPr>
-        <p:txBody>
-          <a:bodyPr wrap="square">
-            <a:spAutoFit/>
-          </a:bodyPr>
-          <a:lstStyle/>
-          <a:p>
-            <a:pPr algn="l"/>
-            <a:r>
-              <a:rPr sz="1800" b="0" i="0">
-                <a:solidFill>
-                  <a:srgbClr val="CBD5E1"/>
-                </a:solidFill>
-                <a:latin typeface="Inter"/>
-              </a:rPr>
-              <a:t>And the next chapter: Rust</a:t>
-            </a:r>
-          </a:p>
-        </p:txBody>
-      </p:sp>
-      <p:sp>
-        <p:nvSpPr>
-          <p:cNvPr id="7" name="Rounded Rectangle 6">
-            <a:hlinkClick action="ppaction://hlinksldjump" r:id="rId2"/>
+              <a:rPr sz="1200" b="0" i="0">
+                <a:solidFill>
+                  <a:srgbClr val="22D3EE"/>
+                </a:solidFill>
+                <a:latin typeface="Inter"/>
+              </a:rPr>
+              <a:t>RUN THE TESTS A REAL DRIVER RUNS</a:t>
+            </a:r>
+          </a:p>
+        </p:txBody>
+      </p:sp>
+      <p:pic>
+        <p:nvPicPr>
+          <p:cNvPr id="7" name="Picture 6" descr="conformance-gauges_5.png"/>
+          <p:cNvPicPr>
+            <a:picLocks noChangeAspect="1"/>
+          </p:cNvPicPr>
+          <p:nvPr/>
+        </p:nvPicPr>
+        <p:blipFill>
+          <a:blip r:embed="rId2">
+            <a:extLst>
+              <a:ext uri="{96DAC541-7B7A-43D3-8B79-37D633B846F1}">
+                <ns0:svgBlip xmlns:ns0="http://schemas.microsoft.com/office/drawing/2016/SVG/main" r:embed="rId3"/>
+              </a:ext>
+            </a:extLst>
+          </a:blip>
+          <a:stretch>
+            <a:fillRect/>
+          </a:stretch>
+        </p:blipFill>
+        <p:spPr>
+          <a:xfrm>
+            <a:off x="746607" y="1417320"/>
+            <a:ext cx="10698480" cy="4190237"/>
+          </a:xfrm>
+          <a:prstGeom prst="rect">
+            <a:avLst/>
+          </a:prstGeom>
+        </p:spPr>
+      </p:pic>
+      <p:sp>
+        <p:nvSpPr>
+          <p:cNvPr id="8" name="Rounded Rectangle 7">
+            <a:hlinkClick action="ppaction://hlinksldjump" r:id="rId4"/>
           </p:cNvPr>
           <p:cNvSpPr/>
           <p:nvPr/>
@@ -10381,50 +10569,6 @@
             <a:avLst/>
           </a:prstGeom>
           <a:solidFill>
-            <a:srgbClr val="F8FAFC"/>
-          </a:solidFill>
-          <a:ln>
-            <a:noFill/>
-          </a:ln>
-          <a:effectLst/>
-        </p:spPr>
-        <p:style>
-          <a:lnRef idx="1">
-            <a:schemeClr val="accent1"/>
-          </a:lnRef>
-          <a:fillRef idx="3">
-            <a:schemeClr val="accent1"/>
-          </a:fillRef>
-          <a:effectRef idx="2">
-            <a:schemeClr val="accent1"/>
-          </a:effectRef>
-          <a:fontRef idx="minor">
-            <a:schemeClr val="lt1"/>
-          </a:fontRef>
-        </p:style>
-        <p:txBody>
-          <a:bodyPr rtlCol="0" anchor="ctr"/>
-          <a:lstStyle/>
-          <a:p>
-            <a:pPr algn="ctr"/>
-          </a:p>
-        </p:txBody>
-      </p:sp>
-      <p:sp>
-        <p:nvSpPr>
-          <p:cNvPr id="3" name="Rectangle 2"/>
-          <p:cNvSpPr/>
-          <p:nvPr/>
-        </p:nvSpPr>
-        <p:spPr>
-          <a:xfrm>
-            <a:off x="0" y="0"/>
-            <a:ext cx="12191695" cy="1024128"/>
-          </a:xfrm>
-          <a:prstGeom prst="rect">
-            <a:avLst/>
-          </a:prstGeom>
-          <a:solidFill>
             <a:srgbClr val="0F172A"/>
           </a:solidFill>
           <a:ln>
@@ -10456,14 +10600,14 @@
       </p:sp>
       <p:sp>
         <p:nvSpPr>
-          <p:cNvPr id="4" name="Rectangle 3"/>
+          <p:cNvPr id="3" name="Rectangle 2"/>
           <p:cNvSpPr/>
           <p:nvPr/>
         </p:nvSpPr>
         <p:spPr>
           <a:xfrm>
-            <a:off x="0" y="1024128"/>
-            <a:ext cx="12191695" cy="50800"/>
+            <a:off x="822960" y="2468880"/>
+            <a:ext cx="146304" cy="1554480"/>
           </a:xfrm>
           <a:prstGeom prst="rect">
             <a:avLst/>
@@ -10500,14 +10644,14 @@
       </p:sp>
       <p:sp>
         <p:nvSpPr>
-          <p:cNvPr id="5" name="TextBox 4"/>
+          <p:cNvPr id="4" name="TextBox 3"/>
           <p:cNvSpPr txBox="1"/>
           <p:nvPr/>
         </p:nvSpPr>
         <p:spPr>
           <a:xfrm>
-            <a:off x="548640" y="146304"/>
-            <a:ext cx="10972800" cy="713232"/>
+            <a:off x="1143000" y="2286000"/>
+            <a:ext cx="10058400" cy="640080"/>
           </a:xfrm>
           <a:prstGeom prst="rect">
             <a:avLst/>
@@ -10522,27 +10666,27 @@
           <a:p>
             <a:pPr algn="l"/>
             <a:r>
-              <a:rPr sz="3000" b="1" i="0">
-                <a:solidFill>
-                  <a:srgbClr val="FFFFFF"/>
-                </a:solidFill>
-                <a:latin typeface="Inter"/>
-              </a:rPr>
-              <a:t>Where we've been</a:t>
-            </a:r>
-          </a:p>
-        </p:txBody>
-      </p:sp>
-      <p:sp>
-        <p:nvSpPr>
-          <p:cNvPr id="6" name="TextBox 5"/>
+              <a:rPr sz="1600" b="1" i="0">
+                <a:solidFill>
+                  <a:srgbClr val="22D3EE"/>
+                </a:solidFill>
+                <a:latin typeface="Inter"/>
+              </a:rPr>
+              <a:t>PART 5</a:t>
+            </a:r>
+          </a:p>
+        </p:txBody>
+      </p:sp>
+      <p:sp>
+        <p:nvSpPr>
+          <p:cNvPr id="5" name="TextBox 4"/>
           <p:cNvSpPr txBox="1"/>
           <p:nvPr/>
         </p:nvSpPr>
         <p:spPr>
           <a:xfrm>
-            <a:off x="576072" y="749808"/>
-            <a:ext cx="10972800" cy="274320"/>
+            <a:off x="1143000" y="2743200"/>
+            <a:ext cx="10241280" cy="1280160"/>
           </a:xfrm>
           <a:prstGeom prst="rect">
             <a:avLst/>
@@ -10557,115 +10701,27 @@
           <a:p>
             <a:pPr algn="l"/>
             <a:r>
-              <a:rPr sz="1200" b="0" i="0">
-                <a:solidFill>
-                  <a:srgbClr val="22D3EE"/>
-                </a:solidFill>
-                <a:latin typeface="Inter"/>
-              </a:rPr>
-              <a:t>A rough progression</a:t>
-            </a:r>
-          </a:p>
-        </p:txBody>
-      </p:sp>
-      <p:sp>
-        <p:nvSpPr>
-          <p:cNvPr id="7" name="Rectangle 6"/>
-          <p:cNvSpPr/>
-          <p:nvPr/>
-        </p:nvSpPr>
-        <p:spPr>
-          <a:xfrm>
-            <a:off x="1051560" y="1554480"/>
-            <a:ext cx="38100" cy="4389120"/>
-          </a:xfrm>
-          <a:prstGeom prst="rect">
-            <a:avLst/>
-          </a:prstGeom>
-          <a:solidFill>
-            <a:srgbClr val="CBD5E1"/>
-          </a:solidFill>
-          <a:ln>
-            <a:noFill/>
-          </a:ln>
-          <a:effectLst/>
-        </p:spPr>
-        <p:style>
-          <a:lnRef idx="1">
-            <a:schemeClr val="accent1"/>
-          </a:lnRef>
-          <a:fillRef idx="3">
-            <a:schemeClr val="accent1"/>
-          </a:fillRef>
-          <a:effectRef idx="2">
-            <a:schemeClr val="accent1"/>
-          </a:effectRef>
-          <a:fontRef idx="minor">
-            <a:schemeClr val="lt1"/>
-          </a:fontRef>
-        </p:style>
-        <p:txBody>
-          <a:bodyPr rtlCol="0" anchor="ctr"/>
-          <a:lstStyle/>
-          <a:p>
-            <a:pPr algn="ctr"/>
-          </a:p>
-        </p:txBody>
-      </p:sp>
-      <p:sp>
-        <p:nvSpPr>
-          <p:cNvPr id="8" name="Oval 7"/>
-          <p:cNvSpPr/>
-          <p:nvPr/>
-        </p:nvSpPr>
-        <p:spPr>
-          <a:xfrm>
-            <a:off x="914400" y="1627632"/>
-            <a:ext cx="310896" cy="310896"/>
-          </a:xfrm>
-          <a:prstGeom prst="ellipse">
-            <a:avLst/>
-          </a:prstGeom>
-          <a:solidFill>
-            <a:srgbClr val="0E7490"/>
-          </a:solidFill>
-          <a:ln>
-            <a:noFill/>
-          </a:ln>
-          <a:effectLst/>
-        </p:spPr>
-        <p:style>
-          <a:lnRef idx="1">
-            <a:schemeClr val="accent1"/>
-          </a:lnRef>
-          <a:fillRef idx="3">
-            <a:schemeClr val="accent1"/>
-          </a:fillRef>
-          <a:effectRef idx="2">
-            <a:schemeClr val="accent1"/>
-          </a:effectRef>
-          <a:fontRef idx="minor">
-            <a:schemeClr val="lt1"/>
-          </a:fontRef>
-        </p:style>
-        <p:txBody>
-          <a:bodyPr rtlCol="0" anchor="ctr"/>
-          <a:lstStyle/>
-          <a:p>
-            <a:pPr algn="ctr"/>
-          </a:p>
-        </p:txBody>
-      </p:sp>
-      <p:sp>
-        <p:nvSpPr>
-          <p:cNvPr id="9" name="TextBox 8"/>
+              <a:rPr sz="4000" b="1" i="0">
+                <a:solidFill>
+                  <a:srgbClr val="FFFFFF"/>
+                </a:solidFill>
+                <a:latin typeface="Inter"/>
+              </a:rPr>
+              <a:t>Progression to date</a:t>
+            </a:r>
+          </a:p>
+        </p:txBody>
+      </p:sp>
+      <p:sp>
+        <p:nvSpPr>
+          <p:cNvPr id="6" name="TextBox 5"/>
           <p:cNvSpPr txBox="1"/>
           <p:nvPr/>
         </p:nvSpPr>
         <p:spPr>
           <a:xfrm>
-            <a:off x="1463040" y="1581912"/>
-            <a:ext cx="2926080" cy="457200"/>
+            <a:off x="1161288" y="3840480"/>
+            <a:ext cx="10058400" cy="731520"/>
           </a:xfrm>
           <a:prstGeom prst="rect">
             <a:avLst/>
@@ -10680,739 +10736,20 @@
           <a:p>
             <a:pPr algn="l"/>
             <a:r>
-              <a:rPr sz="1600" b="1" i="0">
-                <a:solidFill>
-                  <a:srgbClr val="0F172A"/>
-                </a:solidFill>
-                <a:latin typeface="Inter"/>
-              </a:rPr>
-              <a:t>Prototype</a:t>
-            </a:r>
-          </a:p>
-        </p:txBody>
-      </p:sp>
-      <p:sp>
-        <p:nvSpPr>
-          <p:cNvPr id="10" name="TextBox 9"/>
-          <p:cNvSpPr txBox="1"/>
-          <p:nvPr/>
-        </p:nvSpPr>
-        <p:spPr>
-          <a:xfrm>
-            <a:off x="4389120" y="1600200"/>
-            <a:ext cx="7315200" cy="457200"/>
-          </a:xfrm>
-          <a:prstGeom prst="rect">
-            <a:avLst/>
-          </a:prstGeom>
-          <a:noFill/>
-        </p:spPr>
-        <p:txBody>
-          <a:bodyPr wrap="square">
-            <a:spAutoFit/>
-          </a:bodyPr>
-          <a:lstStyle/>
-          <a:p>
-            <a:pPr algn="l"/>
-            <a:r>
-              <a:rPr sz="1400" b="0" i="0">
-                <a:solidFill>
-                  <a:srgbClr val="64748B"/>
-                </a:solidFill>
-                <a:latin typeface="Inter"/>
-              </a:rPr>
-              <a:t>prove the wire protocol with a driver</a:t>
-            </a:r>
-          </a:p>
-        </p:txBody>
-      </p:sp>
-      <p:sp>
-        <p:nvSpPr>
-          <p:cNvPr id="11" name="Oval 10"/>
-          <p:cNvSpPr/>
-          <p:nvPr/>
-        </p:nvSpPr>
-        <p:spPr>
-          <a:xfrm>
-            <a:off x="914400" y="2258568"/>
-            <a:ext cx="310896" cy="310896"/>
-          </a:xfrm>
-          <a:prstGeom prst="ellipse">
-            <a:avLst/>
-          </a:prstGeom>
-          <a:solidFill>
-            <a:srgbClr val="0E7490"/>
-          </a:solidFill>
-          <a:ln>
-            <a:noFill/>
-          </a:ln>
-          <a:effectLst/>
-        </p:spPr>
-        <p:style>
-          <a:lnRef idx="1">
-            <a:schemeClr val="accent1"/>
-          </a:lnRef>
-          <a:fillRef idx="3">
-            <a:schemeClr val="accent1"/>
-          </a:fillRef>
-          <a:effectRef idx="2">
-            <a:schemeClr val="accent1"/>
-          </a:effectRef>
-          <a:fontRef idx="minor">
-            <a:schemeClr val="lt1"/>
-          </a:fontRef>
-        </p:style>
-        <p:txBody>
-          <a:bodyPr rtlCol="0" anchor="ctr"/>
-          <a:lstStyle/>
-          <a:p>
-            <a:pPr algn="ctr"/>
-          </a:p>
-        </p:txBody>
-      </p:sp>
-      <p:sp>
-        <p:nvSpPr>
-          <p:cNvPr id="12" name="TextBox 11"/>
-          <p:cNvSpPr txBox="1"/>
-          <p:nvPr/>
-        </p:nvSpPr>
-        <p:spPr>
-          <a:xfrm>
-            <a:off x="1463040" y="2212848"/>
-            <a:ext cx="2926080" cy="457200"/>
-          </a:xfrm>
-          <a:prstGeom prst="rect">
-            <a:avLst/>
-          </a:prstGeom>
-          <a:noFill/>
-        </p:spPr>
-        <p:txBody>
-          <a:bodyPr wrap="square">
-            <a:spAutoFit/>
-          </a:bodyPr>
-          <a:lstStyle/>
-          <a:p>
-            <a:pPr algn="l"/>
-            <a:r>
-              <a:rPr sz="1600" b="1" i="0">
-                <a:solidFill>
-                  <a:srgbClr val="0F172A"/>
-                </a:solidFill>
-                <a:latin typeface="Inter"/>
-              </a:rPr>
-              <a:t>Core server</a:t>
-            </a:r>
-          </a:p>
-        </p:txBody>
-      </p:sp>
-      <p:sp>
-        <p:nvSpPr>
-          <p:cNvPr id="13" name="TextBox 12"/>
-          <p:cNvSpPr txBox="1"/>
-          <p:nvPr/>
-        </p:nvSpPr>
-        <p:spPr>
-          <a:xfrm>
-            <a:off x="4389120" y="2231136"/>
-            <a:ext cx="7315200" cy="457200"/>
-          </a:xfrm>
-          <a:prstGeom prst="rect">
-            <a:avLst/>
-          </a:prstGeom>
-          <a:noFill/>
-        </p:spPr>
-        <p:txBody>
-          <a:bodyPr wrap="square">
-            <a:spAutoFit/>
-          </a:bodyPr>
-          <a:lstStyle/>
-          <a:p>
-            <a:pPr algn="l"/>
-            <a:r>
-              <a:rPr sz="1400" b="0" i="0">
-                <a:solidFill>
-                  <a:srgbClr val="64748B"/>
-                </a:solidFill>
-                <a:latin typeface="Inter"/>
-              </a:rPr>
-              <a:t>wire + dispatch + CRUD</a:t>
-            </a:r>
-          </a:p>
-        </p:txBody>
-      </p:sp>
-      <p:sp>
-        <p:nvSpPr>
-          <p:cNvPr id="14" name="Oval 13"/>
-          <p:cNvSpPr/>
-          <p:nvPr/>
-        </p:nvSpPr>
-        <p:spPr>
-          <a:xfrm>
-            <a:off x="914400" y="2889504"/>
-            <a:ext cx="310896" cy="310896"/>
-          </a:xfrm>
-          <a:prstGeom prst="ellipse">
-            <a:avLst/>
-          </a:prstGeom>
-          <a:solidFill>
-            <a:srgbClr val="0E7490"/>
-          </a:solidFill>
-          <a:ln>
-            <a:noFill/>
-          </a:ln>
-          <a:effectLst/>
-        </p:spPr>
-        <p:style>
-          <a:lnRef idx="1">
-            <a:schemeClr val="accent1"/>
-          </a:lnRef>
-          <a:fillRef idx="3">
-            <a:schemeClr val="accent1"/>
-          </a:fillRef>
-          <a:effectRef idx="2">
-            <a:schemeClr val="accent1"/>
-          </a:effectRef>
-          <a:fontRef idx="minor">
-            <a:schemeClr val="lt1"/>
-          </a:fontRef>
-        </p:style>
-        <p:txBody>
-          <a:bodyPr rtlCol="0" anchor="ctr"/>
-          <a:lstStyle/>
-          <a:p>
-            <a:pPr algn="ctr"/>
-          </a:p>
-        </p:txBody>
-      </p:sp>
-      <p:sp>
-        <p:nvSpPr>
-          <p:cNvPr id="15" name="TextBox 14"/>
-          <p:cNvSpPr txBox="1"/>
-          <p:nvPr/>
-        </p:nvSpPr>
-        <p:spPr>
-          <a:xfrm>
-            <a:off x="1463040" y="2843784"/>
-            <a:ext cx="2926080" cy="457200"/>
-          </a:xfrm>
-          <a:prstGeom prst="rect">
-            <a:avLst/>
-          </a:prstGeom>
-          <a:noFill/>
-        </p:spPr>
-        <p:txBody>
-          <a:bodyPr wrap="square">
-            <a:spAutoFit/>
-          </a:bodyPr>
-          <a:lstStyle/>
-          <a:p>
-            <a:pPr algn="l"/>
-            <a:r>
-              <a:rPr sz="1600" b="1" i="0">
-                <a:solidFill>
-                  <a:srgbClr val="0F172A"/>
-                </a:solidFill>
-                <a:latin typeface="Inter"/>
-              </a:rPr>
-              <a:t>Real storage</a:t>
-            </a:r>
-          </a:p>
-        </p:txBody>
-      </p:sp>
-      <p:sp>
-        <p:nvSpPr>
-          <p:cNvPr id="16" name="TextBox 15"/>
-          <p:cNvSpPr txBox="1"/>
-          <p:nvPr/>
-        </p:nvSpPr>
-        <p:spPr>
-          <a:xfrm>
-            <a:off x="4389120" y="2862072"/>
-            <a:ext cx="7315200" cy="457200"/>
-          </a:xfrm>
-          <a:prstGeom prst="rect">
-            <a:avLst/>
-          </a:prstGeom>
-          <a:noFill/>
-        </p:spPr>
-        <p:txBody>
-          <a:bodyPr wrap="square">
-            <a:spAutoFit/>
-          </a:bodyPr>
-          <a:lstStyle/>
-          <a:p>
-            <a:pPr algn="l"/>
-            <a:r>
-              <a:rPr sz="1400" b="0" i="0">
-                <a:solidFill>
-                  <a:srgbClr val="64748B"/>
-                </a:solidFill>
-                <a:latin typeface="Inter"/>
-              </a:rPr>
-              <a:t>WiredTiger vendored; opaque BSON</a:t>
-            </a:r>
-          </a:p>
-        </p:txBody>
-      </p:sp>
-      <p:sp>
-        <p:nvSpPr>
-          <p:cNvPr id="17" name="Oval 16"/>
-          <p:cNvSpPr/>
-          <p:nvPr/>
-        </p:nvSpPr>
-        <p:spPr>
-          <a:xfrm>
-            <a:off x="914400" y="3520439"/>
-            <a:ext cx="310896" cy="310896"/>
-          </a:xfrm>
-          <a:prstGeom prst="ellipse">
-            <a:avLst/>
-          </a:prstGeom>
-          <a:solidFill>
-            <a:srgbClr val="0E7490"/>
-          </a:solidFill>
-          <a:ln>
-            <a:noFill/>
-          </a:ln>
-          <a:effectLst/>
-        </p:spPr>
-        <p:style>
-          <a:lnRef idx="1">
-            <a:schemeClr val="accent1"/>
-          </a:lnRef>
-          <a:fillRef idx="3">
-            <a:schemeClr val="accent1"/>
-          </a:fillRef>
-          <a:effectRef idx="2">
-            <a:schemeClr val="accent1"/>
-          </a:effectRef>
-          <a:fontRef idx="minor">
-            <a:schemeClr val="lt1"/>
-          </a:fontRef>
-        </p:style>
-        <p:txBody>
-          <a:bodyPr rtlCol="0" anchor="ctr"/>
-          <a:lstStyle/>
-          <a:p>
-            <a:pPr algn="ctr"/>
-          </a:p>
-        </p:txBody>
-      </p:sp>
-      <p:sp>
-        <p:nvSpPr>
-          <p:cNvPr id="18" name="TextBox 17"/>
-          <p:cNvSpPr txBox="1"/>
-          <p:nvPr/>
-        </p:nvSpPr>
-        <p:spPr>
-          <a:xfrm>
-            <a:off x="1463040" y="3474719"/>
-            <a:ext cx="2926080" cy="457200"/>
-          </a:xfrm>
-          <a:prstGeom prst="rect">
-            <a:avLst/>
-          </a:prstGeom>
-          <a:noFill/>
-        </p:spPr>
-        <p:txBody>
-          <a:bodyPr wrap="square">
-            <a:spAutoFit/>
-          </a:bodyPr>
-          <a:lstStyle/>
-          <a:p>
-            <a:pPr algn="l"/>
-            <a:r>
-              <a:rPr sz="1600" b="1" i="0">
-                <a:solidFill>
-                  <a:srgbClr val="0F172A"/>
-                </a:solidFill>
-                <a:latin typeface="Inter"/>
-              </a:rPr>
-              <a:t>Breadth</a:t>
-            </a:r>
-          </a:p>
-        </p:txBody>
-      </p:sp>
-      <p:sp>
-        <p:nvSpPr>
-          <p:cNvPr id="19" name="TextBox 18"/>
-          <p:cNvSpPr txBox="1"/>
-          <p:nvPr/>
-        </p:nvSpPr>
-        <p:spPr>
-          <a:xfrm>
-            <a:off x="4389120" y="3493007"/>
-            <a:ext cx="7315200" cy="457200"/>
-          </a:xfrm>
-          <a:prstGeom prst="rect">
-            <a:avLst/>
-          </a:prstGeom>
-          <a:noFill/>
-        </p:spPr>
-        <p:txBody>
-          <a:bodyPr wrap="square">
-            <a:spAutoFit/>
-          </a:bodyPr>
-          <a:lstStyle/>
-          <a:p>
-            <a:pPr algn="l"/>
-            <a:r>
-              <a:rPr sz="1400" b="0" i="0">
-                <a:solidFill>
-                  <a:srgbClr val="64748B"/>
-                </a:solidFill>
-                <a:latin typeface="Inter"/>
-              </a:rPr>
-              <a:t>aggregation, rich indexing, geo</a:t>
-            </a:r>
-          </a:p>
-        </p:txBody>
-      </p:sp>
-      <p:sp>
-        <p:nvSpPr>
-          <p:cNvPr id="20" name="Oval 19"/>
-          <p:cNvSpPr/>
-          <p:nvPr/>
-        </p:nvSpPr>
-        <p:spPr>
-          <a:xfrm>
-            <a:off x="914400" y="4151376"/>
-            <a:ext cx="310896" cy="310896"/>
-          </a:xfrm>
-          <a:prstGeom prst="ellipse">
-            <a:avLst/>
-          </a:prstGeom>
-          <a:solidFill>
-            <a:srgbClr val="0E7490"/>
-          </a:solidFill>
-          <a:ln>
-            <a:noFill/>
-          </a:ln>
-          <a:effectLst/>
-        </p:spPr>
-        <p:style>
-          <a:lnRef idx="1">
-            <a:schemeClr val="accent1"/>
-          </a:lnRef>
-          <a:fillRef idx="3">
-            <a:schemeClr val="accent1"/>
-          </a:fillRef>
-          <a:effectRef idx="2">
-            <a:schemeClr val="accent1"/>
-          </a:effectRef>
-          <a:fontRef idx="minor">
-            <a:schemeClr val="lt1"/>
-          </a:fontRef>
-        </p:style>
-        <p:txBody>
-          <a:bodyPr rtlCol="0" anchor="ctr"/>
-          <a:lstStyle/>
-          <a:p>
-            <a:pPr algn="ctr"/>
-          </a:p>
-        </p:txBody>
-      </p:sp>
-      <p:sp>
-        <p:nvSpPr>
-          <p:cNvPr id="21" name="TextBox 20"/>
-          <p:cNvSpPr txBox="1"/>
-          <p:nvPr/>
-        </p:nvSpPr>
-        <p:spPr>
-          <a:xfrm>
-            <a:off x="1463040" y="4105656"/>
-            <a:ext cx="2926080" cy="457200"/>
-          </a:xfrm>
-          <a:prstGeom prst="rect">
-            <a:avLst/>
-          </a:prstGeom>
-          <a:noFill/>
-        </p:spPr>
-        <p:txBody>
-          <a:bodyPr wrap="square">
-            <a:spAutoFit/>
-          </a:bodyPr>
-          <a:lstStyle/>
-          <a:p>
-            <a:pPr algn="l"/>
-            <a:r>
-              <a:rPr sz="1600" b="1" i="0">
-                <a:solidFill>
-                  <a:srgbClr val="0F172A"/>
-                </a:solidFill>
-                <a:latin typeface="Inter"/>
-              </a:rPr>
-              <a:t>Change streams</a:t>
-            </a:r>
-          </a:p>
-        </p:txBody>
-      </p:sp>
-      <p:sp>
-        <p:nvSpPr>
-          <p:cNvPr id="22" name="TextBox 21"/>
-          <p:cNvSpPr txBox="1"/>
-          <p:nvPr/>
-        </p:nvSpPr>
-        <p:spPr>
-          <a:xfrm>
-            <a:off x="4389120" y="4123944"/>
-            <a:ext cx="7315200" cy="457200"/>
-          </a:xfrm>
-          <a:prstGeom prst="rect">
-            <a:avLst/>
-          </a:prstGeom>
-          <a:noFill/>
-        </p:spPr>
-        <p:txBody>
-          <a:bodyPr wrap="square">
-            <a:spAutoFit/>
-          </a:bodyPr>
-          <a:lstStyle/>
-          <a:p>
-            <a:pPr algn="l"/>
-            <a:r>
-              <a:rPr sz="1400" b="0" i="0">
-                <a:solidFill>
-                  <a:srgbClr val="64748B"/>
-                </a:solidFill>
-                <a:latin typeface="Inter"/>
-              </a:rPr>
-              <a:t>oplog, resume tokens, pre-images</a:t>
-            </a:r>
-          </a:p>
-        </p:txBody>
-      </p:sp>
-      <p:sp>
-        <p:nvSpPr>
-          <p:cNvPr id="23" name="Oval 22"/>
-          <p:cNvSpPr/>
-          <p:nvPr/>
-        </p:nvSpPr>
-        <p:spPr>
-          <a:xfrm>
-            <a:off x="914400" y="4782312"/>
-            <a:ext cx="310896" cy="310896"/>
-          </a:xfrm>
-          <a:prstGeom prst="ellipse">
-            <a:avLst/>
-          </a:prstGeom>
-          <a:solidFill>
-            <a:srgbClr val="0E7490"/>
-          </a:solidFill>
-          <a:ln>
-            <a:noFill/>
-          </a:ln>
-          <a:effectLst/>
-        </p:spPr>
-        <p:style>
-          <a:lnRef idx="1">
-            <a:schemeClr val="accent1"/>
-          </a:lnRef>
-          <a:fillRef idx="3">
-            <a:schemeClr val="accent1"/>
-          </a:fillRef>
-          <a:effectRef idx="2">
-            <a:schemeClr val="accent1"/>
-          </a:effectRef>
-          <a:fontRef idx="minor">
-            <a:schemeClr val="lt1"/>
-          </a:fontRef>
-        </p:style>
-        <p:txBody>
-          <a:bodyPr rtlCol="0" anchor="ctr"/>
-          <a:lstStyle/>
-          <a:p>
-            <a:pPr algn="ctr"/>
-          </a:p>
-        </p:txBody>
-      </p:sp>
-      <p:sp>
-        <p:nvSpPr>
-          <p:cNvPr id="24" name="TextBox 23"/>
-          <p:cNvSpPr txBox="1"/>
-          <p:nvPr/>
-        </p:nvSpPr>
-        <p:spPr>
-          <a:xfrm>
-            <a:off x="1463040" y="4736592"/>
-            <a:ext cx="2926080" cy="457200"/>
-          </a:xfrm>
-          <a:prstGeom prst="rect">
-            <a:avLst/>
-          </a:prstGeom>
-          <a:noFill/>
-        </p:spPr>
-        <p:txBody>
-          <a:bodyPr wrap="square">
-            <a:spAutoFit/>
-          </a:bodyPr>
-          <a:lstStyle/>
-          <a:p>
-            <a:pPr algn="l"/>
-            <a:r>
-              <a:rPr sz="1600" b="1" i="0">
-                <a:solidFill>
-                  <a:srgbClr val="0F172A"/>
-                </a:solidFill>
-                <a:latin typeface="Inter"/>
-              </a:rPr>
-              <a:t>Multi-driver</a:t>
-            </a:r>
-          </a:p>
-        </p:txBody>
-      </p:sp>
-      <p:sp>
-        <p:nvSpPr>
-          <p:cNvPr id="25" name="TextBox 24"/>
-          <p:cNvSpPr txBox="1"/>
-          <p:nvPr/>
-        </p:nvSpPr>
-        <p:spPr>
-          <a:xfrm>
-            <a:off x="4389120" y="4754880"/>
-            <a:ext cx="7315200" cy="457200"/>
-          </a:xfrm>
-          <a:prstGeom prst="rect">
-            <a:avLst/>
-          </a:prstGeom>
-          <a:noFill/>
-        </p:spPr>
-        <p:txBody>
-          <a:bodyPr wrap="square">
-            <a:spAutoFit/>
-          </a:bodyPr>
-          <a:lstStyle/>
-          <a:p>
-            <a:pPr algn="l"/>
-            <a:r>
-              <a:rPr sz="1400" b="0" i="0">
-                <a:solidFill>
-                  <a:srgbClr val="64748B"/>
-                </a:solidFill>
-                <a:latin typeface="Inter"/>
-              </a:rPr>
-              <a:t>5 conformance gauges, binary wheels, CI</a:t>
-            </a:r>
-          </a:p>
-        </p:txBody>
-      </p:sp>
-      <p:sp>
-        <p:nvSpPr>
-          <p:cNvPr id="26" name="Oval 25"/>
-          <p:cNvSpPr/>
-          <p:nvPr/>
-        </p:nvSpPr>
-        <p:spPr>
-          <a:xfrm>
-            <a:off x="914400" y="5413248"/>
-            <a:ext cx="310896" cy="310896"/>
-          </a:xfrm>
-          <a:prstGeom prst="ellipse">
-            <a:avLst/>
-          </a:prstGeom>
-          <a:solidFill>
-            <a:srgbClr val="06B6D4"/>
-          </a:solidFill>
-          <a:ln>
-            <a:noFill/>
-          </a:ln>
-          <a:effectLst/>
-        </p:spPr>
-        <p:style>
-          <a:lnRef idx="1">
-            <a:schemeClr val="accent1"/>
-          </a:lnRef>
-          <a:fillRef idx="3">
-            <a:schemeClr val="accent1"/>
-          </a:fillRef>
-          <a:effectRef idx="2">
-            <a:schemeClr val="accent1"/>
-          </a:effectRef>
-          <a:fontRef idx="minor">
-            <a:schemeClr val="lt1"/>
-          </a:fontRef>
-        </p:style>
-        <p:txBody>
-          <a:bodyPr rtlCol="0" anchor="ctr"/>
-          <a:lstStyle/>
-          <a:p>
-            <a:pPr algn="ctr"/>
-          </a:p>
-        </p:txBody>
-      </p:sp>
-      <p:sp>
-        <p:nvSpPr>
-          <p:cNvPr id="27" name="TextBox 26"/>
-          <p:cNvSpPr txBox="1"/>
-          <p:nvPr/>
-        </p:nvSpPr>
-        <p:spPr>
-          <a:xfrm>
-            <a:off x="1463040" y="5367528"/>
-            <a:ext cx="2926080" cy="457200"/>
-          </a:xfrm>
-          <a:prstGeom prst="rect">
-            <a:avLst/>
-          </a:prstGeom>
-          <a:noFill/>
-        </p:spPr>
-        <p:txBody>
-          <a:bodyPr wrap="square">
-            <a:spAutoFit/>
-          </a:bodyPr>
-          <a:lstStyle/>
-          <a:p>
-            <a:pPr algn="l"/>
-            <a:r>
-              <a:rPr sz="1600" b="1" i="0">
-                <a:solidFill>
-                  <a:srgbClr val="0F172A"/>
-                </a:solidFill>
-                <a:latin typeface="Inter"/>
-              </a:rPr>
-              <a:t>Acceleration</a:t>
-            </a:r>
-          </a:p>
-        </p:txBody>
-      </p:sp>
-      <p:sp>
-        <p:nvSpPr>
-          <p:cNvPr id="28" name="TextBox 27"/>
-          <p:cNvSpPr txBox="1"/>
-          <p:nvPr/>
-        </p:nvSpPr>
-        <p:spPr>
-          <a:xfrm>
-            <a:off x="4389120" y="5385816"/>
-            <a:ext cx="7315200" cy="457200"/>
-          </a:xfrm>
-          <a:prstGeom prst="rect">
-            <a:avLst/>
-          </a:prstGeom>
-          <a:noFill/>
-        </p:spPr>
-        <p:txBody>
-          <a:bodyPr wrap="square">
-            <a:spAutoFit/>
-          </a:bodyPr>
-          <a:lstStyle/>
-          <a:p>
-            <a:pPr algn="l"/>
-            <a:r>
-              <a:rPr sz="1400" b="0" i="0">
-                <a:solidFill>
-                  <a:srgbClr val="64748B"/>
-                </a:solidFill>
-                <a:latin typeface="Inter"/>
-              </a:rPr>
-              <a:t>the Rust core — in progress</a:t>
-            </a:r>
-          </a:p>
-        </p:txBody>
-      </p:sp>
-      <p:sp>
-        <p:nvSpPr>
-          <p:cNvPr id="29" name="Rounded Rectangle 28">
+              <a:rPr sz="1800" b="0" i="0">
+                <a:solidFill>
+                  <a:srgbClr val="CBD5E1"/>
+                </a:solidFill>
+                <a:latin typeface="Inter"/>
+              </a:rPr>
+              <a:t>And the next chapter: Rust</a:t>
+            </a:r>
+          </a:p>
+        </p:txBody>
+      </p:sp>
+      <p:sp>
+        <p:nvSpPr>
+          <p:cNvPr id="7" name="Rounded Rectangle 6">
             <a:hlinkClick action="ppaction://hlinksldjump" r:id="rId2"/>
           </p:cNvPr>
           <p:cNvSpPr/>
@@ -11645,7 +10982,7 @@
                 </a:solidFill>
                 <a:latin typeface="Inter"/>
               </a:rPr>
-              <a:t>Why a Rust core now?</a:t>
+              <a:t>Where we've been</a:t>
             </a:r>
           </a:p>
         </p:txBody>
@@ -11680,21 +11017,109 @@
                 </a:solidFill>
                 <a:latin typeface="Inter"/>
               </a:rPr>
-              <a:t>A DELIBERATE DUAL-ENGINE DECISION</a:t>
-            </a:r>
-          </a:p>
-        </p:txBody>
-      </p:sp>
-      <p:sp>
-        <p:nvSpPr>
-          <p:cNvPr id="7" name="TextBox 6"/>
+              <a:t>A rough progression</a:t>
+            </a:r>
+          </a:p>
+        </p:txBody>
+      </p:sp>
+      <p:sp>
+        <p:nvSpPr>
+          <p:cNvPr id="7" name="Rectangle 6"/>
+          <p:cNvSpPr/>
+          <p:nvPr/>
+        </p:nvSpPr>
+        <p:spPr>
+          <a:xfrm>
+            <a:off x="1051560" y="1554480"/>
+            <a:ext cx="38100" cy="4389120"/>
+          </a:xfrm>
+          <a:prstGeom prst="rect">
+            <a:avLst/>
+          </a:prstGeom>
+          <a:solidFill>
+            <a:srgbClr val="CBD5E1"/>
+          </a:solidFill>
+          <a:ln>
+            <a:noFill/>
+          </a:ln>
+          <a:effectLst/>
+        </p:spPr>
+        <p:style>
+          <a:lnRef idx="1">
+            <a:schemeClr val="accent1"/>
+          </a:lnRef>
+          <a:fillRef idx="3">
+            <a:schemeClr val="accent1"/>
+          </a:fillRef>
+          <a:effectRef idx="2">
+            <a:schemeClr val="accent1"/>
+          </a:effectRef>
+          <a:fontRef idx="minor">
+            <a:schemeClr val="lt1"/>
+          </a:fontRef>
+        </p:style>
+        <p:txBody>
+          <a:bodyPr rtlCol="0" anchor="ctr"/>
+          <a:lstStyle/>
+          <a:p>
+            <a:pPr algn="ctr"/>
+          </a:p>
+        </p:txBody>
+      </p:sp>
+      <p:sp>
+        <p:nvSpPr>
+          <p:cNvPr id="8" name="Oval 7"/>
+          <p:cNvSpPr/>
+          <p:nvPr/>
+        </p:nvSpPr>
+        <p:spPr>
+          <a:xfrm>
+            <a:off x="914400" y="1627632"/>
+            <a:ext cx="310896" cy="310896"/>
+          </a:xfrm>
+          <a:prstGeom prst="ellipse">
+            <a:avLst/>
+          </a:prstGeom>
+          <a:solidFill>
+            <a:srgbClr val="0E7490"/>
+          </a:solidFill>
+          <a:ln>
+            <a:noFill/>
+          </a:ln>
+          <a:effectLst/>
+        </p:spPr>
+        <p:style>
+          <a:lnRef idx="1">
+            <a:schemeClr val="accent1"/>
+          </a:lnRef>
+          <a:fillRef idx="3">
+            <a:schemeClr val="accent1"/>
+          </a:fillRef>
+          <a:effectRef idx="2">
+            <a:schemeClr val="accent1"/>
+          </a:effectRef>
+          <a:fontRef idx="minor">
+            <a:schemeClr val="lt1"/>
+          </a:fontRef>
+        </p:style>
+        <p:txBody>
+          <a:bodyPr rtlCol="0" anchor="ctr"/>
+          <a:lstStyle/>
+          <a:p>
+            <a:pPr algn="ctr"/>
+          </a:p>
+        </p:txBody>
+      </p:sp>
+      <p:sp>
+        <p:nvSpPr>
+          <p:cNvPr id="9" name="TextBox 8"/>
           <p:cNvSpPr txBox="1"/>
           <p:nvPr/>
         </p:nvSpPr>
         <p:spPr>
           <a:xfrm>
-            <a:off x="777240" y="1554480"/>
-            <a:ext cx="10607040" cy="4572000"/>
+            <a:off x="1463040" y="1581912"/>
+            <a:ext cx="2926080" cy="457200"/>
           </a:xfrm>
           <a:prstGeom prst="rect">
             <a:avLst/>
@@ -11707,122 +11132,741 @@
           </a:bodyPr>
           <a:lstStyle/>
           <a:p>
-            <a:pPr>
-              <a:lnSpc>
-                <a:spcPct val="104000"/>
-              </a:lnSpc>
-              <a:spcAft>
-                <a:spcPts val="2000"/>
-              </a:spcAft>
-            </a:pPr>
-            <a:r>
-              <a:rPr sz="2800" b="1">
-                <a:solidFill>
-                  <a:srgbClr val="06B6D4"/>
-                </a:solidFill>
-                <a:latin typeface="Inter"/>
-              </a:rPr>
-              <a:t>▪  </a:t>
-            </a:r>
-            <a:r>
-              <a:rPr sz="2800" b="1">
+            <a:pPr algn="l"/>
+            <a:r>
+              <a:rPr sz="1600" b="1" i="0">
                 <a:solidFill>
                   <a:srgbClr val="0F172A"/>
                 </a:solidFill>
                 <a:latin typeface="Inter"/>
               </a:rPr>
-              <a:t>Python bottlenecks: CPU and the GIL</a:t>
-            </a:r>
-          </a:p>
-          <a:p>
-            <a:pPr>
-              <a:lnSpc>
-                <a:spcPct val="104000"/>
-              </a:lnSpc>
-              <a:spcAft>
-                <a:spcPts val="2000"/>
-              </a:spcAft>
-            </a:pPr>
-            <a:r>
-              <a:rPr sz="2800" b="1">
-                <a:solidFill>
-                  <a:srgbClr val="06B6D4"/>
-                </a:solidFill>
-                <a:latin typeface="Inter"/>
-              </a:rPr>
-              <a:t>▪  </a:t>
-            </a:r>
-            <a:r>
-              <a:rPr sz="2800" b="1">
+              <a:t>Prototype</a:t>
+            </a:r>
+          </a:p>
+        </p:txBody>
+      </p:sp>
+      <p:sp>
+        <p:nvSpPr>
+          <p:cNvPr id="10" name="TextBox 9"/>
+          <p:cNvSpPr txBox="1"/>
+          <p:nvPr/>
+        </p:nvSpPr>
+        <p:spPr>
+          <a:xfrm>
+            <a:off x="4389120" y="1600200"/>
+            <a:ext cx="7315200" cy="457200"/>
+          </a:xfrm>
+          <a:prstGeom prst="rect">
+            <a:avLst/>
+          </a:prstGeom>
+          <a:noFill/>
+        </p:spPr>
+        <p:txBody>
+          <a:bodyPr wrap="square">
+            <a:spAutoFit/>
+          </a:bodyPr>
+          <a:lstStyle/>
+          <a:p>
+            <a:pPr algn="l"/>
+            <a:r>
+              <a:rPr sz="1400" b="0" i="0">
+                <a:solidFill>
+                  <a:srgbClr val="64748B"/>
+                </a:solidFill>
+                <a:latin typeface="Inter"/>
+              </a:rPr>
+              <a:t>prove the wire protocol with a driver</a:t>
+            </a:r>
+          </a:p>
+        </p:txBody>
+      </p:sp>
+      <p:sp>
+        <p:nvSpPr>
+          <p:cNvPr id="11" name="Oval 10"/>
+          <p:cNvSpPr/>
+          <p:nvPr/>
+        </p:nvSpPr>
+        <p:spPr>
+          <a:xfrm>
+            <a:off x="914400" y="2258568"/>
+            <a:ext cx="310896" cy="310896"/>
+          </a:xfrm>
+          <a:prstGeom prst="ellipse">
+            <a:avLst/>
+          </a:prstGeom>
+          <a:solidFill>
+            <a:srgbClr val="0E7490"/>
+          </a:solidFill>
+          <a:ln>
+            <a:noFill/>
+          </a:ln>
+          <a:effectLst/>
+        </p:spPr>
+        <p:style>
+          <a:lnRef idx="1">
+            <a:schemeClr val="accent1"/>
+          </a:lnRef>
+          <a:fillRef idx="3">
+            <a:schemeClr val="accent1"/>
+          </a:fillRef>
+          <a:effectRef idx="2">
+            <a:schemeClr val="accent1"/>
+          </a:effectRef>
+          <a:fontRef idx="minor">
+            <a:schemeClr val="lt1"/>
+          </a:fontRef>
+        </p:style>
+        <p:txBody>
+          <a:bodyPr rtlCol="0" anchor="ctr"/>
+          <a:lstStyle/>
+          <a:p>
+            <a:pPr algn="ctr"/>
+          </a:p>
+        </p:txBody>
+      </p:sp>
+      <p:sp>
+        <p:nvSpPr>
+          <p:cNvPr id="12" name="TextBox 11"/>
+          <p:cNvSpPr txBox="1"/>
+          <p:nvPr/>
+        </p:nvSpPr>
+        <p:spPr>
+          <a:xfrm>
+            <a:off x="1463040" y="2212848"/>
+            <a:ext cx="2926080" cy="457200"/>
+          </a:xfrm>
+          <a:prstGeom prst="rect">
+            <a:avLst/>
+          </a:prstGeom>
+          <a:noFill/>
+        </p:spPr>
+        <p:txBody>
+          <a:bodyPr wrap="square">
+            <a:spAutoFit/>
+          </a:bodyPr>
+          <a:lstStyle/>
+          <a:p>
+            <a:pPr algn="l"/>
+            <a:r>
+              <a:rPr sz="1600" b="1" i="0">
                 <a:solidFill>
                   <a:srgbClr val="0F172A"/>
                 </a:solidFill>
                 <a:latin typeface="Inter"/>
               </a:rPr>
-              <a:t>Rust runs the hot work off the GIL</a:t>
-            </a:r>
-          </a:p>
-          <a:p>
-            <a:pPr>
-              <a:lnSpc>
-                <a:spcPct val="104000"/>
-              </a:lnSpc>
-              <a:spcAft>
-                <a:spcPts val="2000"/>
-              </a:spcAft>
-            </a:pPr>
-            <a:r>
-              <a:rPr sz="2800" b="1">
-                <a:solidFill>
-                  <a:srgbClr val="06B6D4"/>
-                </a:solidFill>
-                <a:latin typeface="Inter"/>
-              </a:rPr>
-              <a:t>▪  </a:t>
-            </a:r>
-            <a:r>
-              <a:rPr sz="2800" b="1">
+              <a:t>Core server</a:t>
+            </a:r>
+          </a:p>
+        </p:txBody>
+      </p:sp>
+      <p:sp>
+        <p:nvSpPr>
+          <p:cNvPr id="13" name="TextBox 12"/>
+          <p:cNvSpPr txBox="1"/>
+          <p:nvPr/>
+        </p:nvSpPr>
+        <p:spPr>
+          <a:xfrm>
+            <a:off x="4389120" y="2231136"/>
+            <a:ext cx="7315200" cy="457200"/>
+          </a:xfrm>
+          <a:prstGeom prst="rect">
+            <a:avLst/>
+          </a:prstGeom>
+          <a:noFill/>
+        </p:spPr>
+        <p:txBody>
+          <a:bodyPr wrap="square">
+            <a:spAutoFit/>
+          </a:bodyPr>
+          <a:lstStyle/>
+          <a:p>
+            <a:pPr algn="l"/>
+            <a:r>
+              <a:rPr sz="1400" b="0" i="0">
+                <a:solidFill>
+                  <a:srgbClr val="64748B"/>
+                </a:solidFill>
+                <a:latin typeface="Inter"/>
+              </a:rPr>
+              <a:t>wire + dispatch + CRUD</a:t>
+            </a:r>
+          </a:p>
+        </p:txBody>
+      </p:sp>
+      <p:sp>
+        <p:nvSpPr>
+          <p:cNvPr id="14" name="Oval 13"/>
+          <p:cNvSpPr/>
+          <p:nvPr/>
+        </p:nvSpPr>
+        <p:spPr>
+          <a:xfrm>
+            <a:off x="914400" y="2889504"/>
+            <a:ext cx="310896" cy="310896"/>
+          </a:xfrm>
+          <a:prstGeom prst="ellipse">
+            <a:avLst/>
+          </a:prstGeom>
+          <a:solidFill>
+            <a:srgbClr val="0E7490"/>
+          </a:solidFill>
+          <a:ln>
+            <a:noFill/>
+          </a:ln>
+          <a:effectLst/>
+        </p:spPr>
+        <p:style>
+          <a:lnRef idx="1">
+            <a:schemeClr val="accent1"/>
+          </a:lnRef>
+          <a:fillRef idx="3">
+            <a:schemeClr val="accent1"/>
+          </a:fillRef>
+          <a:effectRef idx="2">
+            <a:schemeClr val="accent1"/>
+          </a:effectRef>
+          <a:fontRef idx="minor">
+            <a:schemeClr val="lt1"/>
+          </a:fontRef>
+        </p:style>
+        <p:txBody>
+          <a:bodyPr rtlCol="0" anchor="ctr"/>
+          <a:lstStyle/>
+          <a:p>
+            <a:pPr algn="ctr"/>
+          </a:p>
+        </p:txBody>
+      </p:sp>
+      <p:sp>
+        <p:nvSpPr>
+          <p:cNvPr id="15" name="TextBox 14"/>
+          <p:cNvSpPr txBox="1"/>
+          <p:nvPr/>
+        </p:nvSpPr>
+        <p:spPr>
+          <a:xfrm>
+            <a:off x="1463040" y="2843784"/>
+            <a:ext cx="2926080" cy="457200"/>
+          </a:xfrm>
+          <a:prstGeom prst="rect">
+            <a:avLst/>
+          </a:prstGeom>
+          <a:noFill/>
+        </p:spPr>
+        <p:txBody>
+          <a:bodyPr wrap="square">
+            <a:spAutoFit/>
+          </a:bodyPr>
+          <a:lstStyle/>
+          <a:p>
+            <a:pPr algn="l"/>
+            <a:r>
+              <a:rPr sz="1600" b="1" i="0">
                 <a:solidFill>
                   <a:srgbClr val="0F172A"/>
                 </a:solidFill>
                 <a:latin typeface="Inter"/>
               </a:rPr>
-              <a:t>Keep BOTH engines — Python stays default</a:t>
-            </a:r>
-          </a:p>
-          <a:p>
-            <a:pPr>
-              <a:lnSpc>
-                <a:spcPct val="104000"/>
-              </a:lnSpc>
-              <a:spcAft>
-                <a:spcPts val="2000"/>
-              </a:spcAft>
-            </a:pPr>
-            <a:r>
-              <a:rPr sz="2800" b="1">
-                <a:solidFill>
-                  <a:srgbClr val="06B6D4"/>
-                </a:solidFill>
-                <a:latin typeface="Inter"/>
-              </a:rPr>
-              <a:t>▪  </a:t>
-            </a:r>
-            <a:r>
-              <a:rPr sz="2800" b="1">
+              <a:t>Real storage</a:t>
+            </a:r>
+          </a:p>
+        </p:txBody>
+      </p:sp>
+      <p:sp>
+        <p:nvSpPr>
+          <p:cNvPr id="16" name="TextBox 15"/>
+          <p:cNvSpPr txBox="1"/>
+          <p:nvPr/>
+        </p:nvSpPr>
+        <p:spPr>
+          <a:xfrm>
+            <a:off x="4389120" y="2862072"/>
+            <a:ext cx="7315200" cy="457200"/>
+          </a:xfrm>
+          <a:prstGeom prst="rect">
+            <a:avLst/>
+          </a:prstGeom>
+          <a:noFill/>
+        </p:spPr>
+        <p:txBody>
+          <a:bodyPr wrap="square">
+            <a:spAutoFit/>
+          </a:bodyPr>
+          <a:lstStyle/>
+          <a:p>
+            <a:pPr algn="l"/>
+            <a:r>
+              <a:rPr sz="1400" b="0" i="0">
+                <a:solidFill>
+                  <a:srgbClr val="64748B"/>
+                </a:solidFill>
+                <a:latin typeface="Inter"/>
+              </a:rPr>
+              <a:t>WiredTiger vendored; opaque BSON</a:t>
+            </a:r>
+          </a:p>
+        </p:txBody>
+      </p:sp>
+      <p:sp>
+        <p:nvSpPr>
+          <p:cNvPr id="17" name="Oval 16"/>
+          <p:cNvSpPr/>
+          <p:nvPr/>
+        </p:nvSpPr>
+        <p:spPr>
+          <a:xfrm>
+            <a:off x="914400" y="3520439"/>
+            <a:ext cx="310896" cy="310896"/>
+          </a:xfrm>
+          <a:prstGeom prst="ellipse">
+            <a:avLst/>
+          </a:prstGeom>
+          <a:solidFill>
+            <a:srgbClr val="0E7490"/>
+          </a:solidFill>
+          <a:ln>
+            <a:noFill/>
+          </a:ln>
+          <a:effectLst/>
+        </p:spPr>
+        <p:style>
+          <a:lnRef idx="1">
+            <a:schemeClr val="accent1"/>
+          </a:lnRef>
+          <a:fillRef idx="3">
+            <a:schemeClr val="accent1"/>
+          </a:fillRef>
+          <a:effectRef idx="2">
+            <a:schemeClr val="accent1"/>
+          </a:effectRef>
+          <a:fontRef idx="minor">
+            <a:schemeClr val="lt1"/>
+          </a:fontRef>
+        </p:style>
+        <p:txBody>
+          <a:bodyPr rtlCol="0" anchor="ctr"/>
+          <a:lstStyle/>
+          <a:p>
+            <a:pPr algn="ctr"/>
+          </a:p>
+        </p:txBody>
+      </p:sp>
+      <p:sp>
+        <p:nvSpPr>
+          <p:cNvPr id="18" name="TextBox 17"/>
+          <p:cNvSpPr txBox="1"/>
+          <p:nvPr/>
+        </p:nvSpPr>
+        <p:spPr>
+          <a:xfrm>
+            <a:off x="1463040" y="3474719"/>
+            <a:ext cx="2926080" cy="457200"/>
+          </a:xfrm>
+          <a:prstGeom prst="rect">
+            <a:avLst/>
+          </a:prstGeom>
+          <a:noFill/>
+        </p:spPr>
+        <p:txBody>
+          <a:bodyPr wrap="square">
+            <a:spAutoFit/>
+          </a:bodyPr>
+          <a:lstStyle/>
+          <a:p>
+            <a:pPr algn="l"/>
+            <a:r>
+              <a:rPr sz="1600" b="1" i="0">
                 <a:solidFill>
                   <a:srgbClr val="0F172A"/>
                 </a:solidFill>
                 <a:latin typeface="Inter"/>
               </a:rPr>
-              <a:t>Accelerator, not replacement</a:t>
-            </a:r>
-          </a:p>
-        </p:txBody>
-      </p:sp>
-      <p:sp>
-        <p:nvSpPr>
-          <p:cNvPr id="8" name="Rounded Rectangle 7">
+              <a:t>Breadth</a:t>
+            </a:r>
+          </a:p>
+        </p:txBody>
+      </p:sp>
+      <p:sp>
+        <p:nvSpPr>
+          <p:cNvPr id="19" name="TextBox 18"/>
+          <p:cNvSpPr txBox="1"/>
+          <p:nvPr/>
+        </p:nvSpPr>
+        <p:spPr>
+          <a:xfrm>
+            <a:off x="4389120" y="3493007"/>
+            <a:ext cx="7315200" cy="457200"/>
+          </a:xfrm>
+          <a:prstGeom prst="rect">
+            <a:avLst/>
+          </a:prstGeom>
+          <a:noFill/>
+        </p:spPr>
+        <p:txBody>
+          <a:bodyPr wrap="square">
+            <a:spAutoFit/>
+          </a:bodyPr>
+          <a:lstStyle/>
+          <a:p>
+            <a:pPr algn="l"/>
+            <a:r>
+              <a:rPr sz="1400" b="0" i="0">
+                <a:solidFill>
+                  <a:srgbClr val="64748B"/>
+                </a:solidFill>
+                <a:latin typeface="Inter"/>
+              </a:rPr>
+              <a:t>aggregation, rich indexing, geo</a:t>
+            </a:r>
+          </a:p>
+        </p:txBody>
+      </p:sp>
+      <p:sp>
+        <p:nvSpPr>
+          <p:cNvPr id="20" name="Oval 19"/>
+          <p:cNvSpPr/>
+          <p:nvPr/>
+        </p:nvSpPr>
+        <p:spPr>
+          <a:xfrm>
+            <a:off x="914400" y="4151376"/>
+            <a:ext cx="310896" cy="310896"/>
+          </a:xfrm>
+          <a:prstGeom prst="ellipse">
+            <a:avLst/>
+          </a:prstGeom>
+          <a:solidFill>
+            <a:srgbClr val="0E7490"/>
+          </a:solidFill>
+          <a:ln>
+            <a:noFill/>
+          </a:ln>
+          <a:effectLst/>
+        </p:spPr>
+        <p:style>
+          <a:lnRef idx="1">
+            <a:schemeClr val="accent1"/>
+          </a:lnRef>
+          <a:fillRef idx="3">
+            <a:schemeClr val="accent1"/>
+          </a:fillRef>
+          <a:effectRef idx="2">
+            <a:schemeClr val="accent1"/>
+          </a:effectRef>
+          <a:fontRef idx="minor">
+            <a:schemeClr val="lt1"/>
+          </a:fontRef>
+        </p:style>
+        <p:txBody>
+          <a:bodyPr rtlCol="0" anchor="ctr"/>
+          <a:lstStyle/>
+          <a:p>
+            <a:pPr algn="ctr"/>
+          </a:p>
+        </p:txBody>
+      </p:sp>
+      <p:sp>
+        <p:nvSpPr>
+          <p:cNvPr id="21" name="TextBox 20"/>
+          <p:cNvSpPr txBox="1"/>
+          <p:nvPr/>
+        </p:nvSpPr>
+        <p:spPr>
+          <a:xfrm>
+            <a:off x="1463040" y="4105656"/>
+            <a:ext cx="2926080" cy="457200"/>
+          </a:xfrm>
+          <a:prstGeom prst="rect">
+            <a:avLst/>
+          </a:prstGeom>
+          <a:noFill/>
+        </p:spPr>
+        <p:txBody>
+          <a:bodyPr wrap="square">
+            <a:spAutoFit/>
+          </a:bodyPr>
+          <a:lstStyle/>
+          <a:p>
+            <a:pPr algn="l"/>
+            <a:r>
+              <a:rPr sz="1600" b="1" i="0">
+                <a:solidFill>
+                  <a:srgbClr val="0F172A"/>
+                </a:solidFill>
+                <a:latin typeface="Inter"/>
+              </a:rPr>
+              <a:t>Change streams</a:t>
+            </a:r>
+          </a:p>
+        </p:txBody>
+      </p:sp>
+      <p:sp>
+        <p:nvSpPr>
+          <p:cNvPr id="22" name="TextBox 21"/>
+          <p:cNvSpPr txBox="1"/>
+          <p:nvPr/>
+        </p:nvSpPr>
+        <p:spPr>
+          <a:xfrm>
+            <a:off x="4389120" y="4123944"/>
+            <a:ext cx="7315200" cy="457200"/>
+          </a:xfrm>
+          <a:prstGeom prst="rect">
+            <a:avLst/>
+          </a:prstGeom>
+          <a:noFill/>
+        </p:spPr>
+        <p:txBody>
+          <a:bodyPr wrap="square">
+            <a:spAutoFit/>
+          </a:bodyPr>
+          <a:lstStyle/>
+          <a:p>
+            <a:pPr algn="l"/>
+            <a:r>
+              <a:rPr sz="1400" b="0" i="0">
+                <a:solidFill>
+                  <a:srgbClr val="64748B"/>
+                </a:solidFill>
+                <a:latin typeface="Inter"/>
+              </a:rPr>
+              <a:t>oplog, resume tokens, pre-images</a:t>
+            </a:r>
+          </a:p>
+        </p:txBody>
+      </p:sp>
+      <p:sp>
+        <p:nvSpPr>
+          <p:cNvPr id="23" name="Oval 22"/>
+          <p:cNvSpPr/>
+          <p:nvPr/>
+        </p:nvSpPr>
+        <p:spPr>
+          <a:xfrm>
+            <a:off x="914400" y="4782312"/>
+            <a:ext cx="310896" cy="310896"/>
+          </a:xfrm>
+          <a:prstGeom prst="ellipse">
+            <a:avLst/>
+          </a:prstGeom>
+          <a:solidFill>
+            <a:srgbClr val="0E7490"/>
+          </a:solidFill>
+          <a:ln>
+            <a:noFill/>
+          </a:ln>
+          <a:effectLst/>
+        </p:spPr>
+        <p:style>
+          <a:lnRef idx="1">
+            <a:schemeClr val="accent1"/>
+          </a:lnRef>
+          <a:fillRef idx="3">
+            <a:schemeClr val="accent1"/>
+          </a:fillRef>
+          <a:effectRef idx="2">
+            <a:schemeClr val="accent1"/>
+          </a:effectRef>
+          <a:fontRef idx="minor">
+            <a:schemeClr val="lt1"/>
+          </a:fontRef>
+        </p:style>
+        <p:txBody>
+          <a:bodyPr rtlCol="0" anchor="ctr"/>
+          <a:lstStyle/>
+          <a:p>
+            <a:pPr algn="ctr"/>
+          </a:p>
+        </p:txBody>
+      </p:sp>
+      <p:sp>
+        <p:nvSpPr>
+          <p:cNvPr id="24" name="TextBox 23"/>
+          <p:cNvSpPr txBox="1"/>
+          <p:nvPr/>
+        </p:nvSpPr>
+        <p:spPr>
+          <a:xfrm>
+            <a:off x="1463040" y="4736592"/>
+            <a:ext cx="2926080" cy="457200"/>
+          </a:xfrm>
+          <a:prstGeom prst="rect">
+            <a:avLst/>
+          </a:prstGeom>
+          <a:noFill/>
+        </p:spPr>
+        <p:txBody>
+          <a:bodyPr wrap="square">
+            <a:spAutoFit/>
+          </a:bodyPr>
+          <a:lstStyle/>
+          <a:p>
+            <a:pPr algn="l"/>
+            <a:r>
+              <a:rPr sz="1600" b="1" i="0">
+                <a:solidFill>
+                  <a:srgbClr val="0F172A"/>
+                </a:solidFill>
+                <a:latin typeface="Inter"/>
+              </a:rPr>
+              <a:t>Multi-driver</a:t>
+            </a:r>
+          </a:p>
+        </p:txBody>
+      </p:sp>
+      <p:sp>
+        <p:nvSpPr>
+          <p:cNvPr id="25" name="TextBox 24"/>
+          <p:cNvSpPr txBox="1"/>
+          <p:nvPr/>
+        </p:nvSpPr>
+        <p:spPr>
+          <a:xfrm>
+            <a:off x="4389120" y="4754880"/>
+            <a:ext cx="7315200" cy="457200"/>
+          </a:xfrm>
+          <a:prstGeom prst="rect">
+            <a:avLst/>
+          </a:prstGeom>
+          <a:noFill/>
+        </p:spPr>
+        <p:txBody>
+          <a:bodyPr wrap="square">
+            <a:spAutoFit/>
+          </a:bodyPr>
+          <a:lstStyle/>
+          <a:p>
+            <a:pPr algn="l"/>
+            <a:r>
+              <a:rPr sz="1400" b="0" i="0">
+                <a:solidFill>
+                  <a:srgbClr val="64748B"/>
+                </a:solidFill>
+                <a:latin typeface="Inter"/>
+              </a:rPr>
+              <a:t>5 conformance gauges, binary wheels, CI</a:t>
+            </a:r>
+          </a:p>
+        </p:txBody>
+      </p:sp>
+      <p:sp>
+        <p:nvSpPr>
+          <p:cNvPr id="26" name="Oval 25"/>
+          <p:cNvSpPr/>
+          <p:nvPr/>
+        </p:nvSpPr>
+        <p:spPr>
+          <a:xfrm>
+            <a:off x="914400" y="5413248"/>
+            <a:ext cx="310896" cy="310896"/>
+          </a:xfrm>
+          <a:prstGeom prst="ellipse">
+            <a:avLst/>
+          </a:prstGeom>
+          <a:solidFill>
+            <a:srgbClr val="06B6D4"/>
+          </a:solidFill>
+          <a:ln>
+            <a:noFill/>
+          </a:ln>
+          <a:effectLst/>
+        </p:spPr>
+        <p:style>
+          <a:lnRef idx="1">
+            <a:schemeClr val="accent1"/>
+          </a:lnRef>
+          <a:fillRef idx="3">
+            <a:schemeClr val="accent1"/>
+          </a:fillRef>
+          <a:effectRef idx="2">
+            <a:schemeClr val="accent1"/>
+          </a:effectRef>
+          <a:fontRef idx="minor">
+            <a:schemeClr val="lt1"/>
+          </a:fontRef>
+        </p:style>
+        <p:txBody>
+          <a:bodyPr rtlCol="0" anchor="ctr"/>
+          <a:lstStyle/>
+          <a:p>
+            <a:pPr algn="ctr"/>
+          </a:p>
+        </p:txBody>
+      </p:sp>
+      <p:sp>
+        <p:nvSpPr>
+          <p:cNvPr id="27" name="TextBox 26"/>
+          <p:cNvSpPr txBox="1"/>
+          <p:nvPr/>
+        </p:nvSpPr>
+        <p:spPr>
+          <a:xfrm>
+            <a:off x="1463040" y="5367528"/>
+            <a:ext cx="2926080" cy="457200"/>
+          </a:xfrm>
+          <a:prstGeom prst="rect">
+            <a:avLst/>
+          </a:prstGeom>
+          <a:noFill/>
+        </p:spPr>
+        <p:txBody>
+          <a:bodyPr wrap="square">
+            <a:spAutoFit/>
+          </a:bodyPr>
+          <a:lstStyle/>
+          <a:p>
+            <a:pPr algn="l"/>
+            <a:r>
+              <a:rPr sz="1600" b="1" i="0">
+                <a:solidFill>
+                  <a:srgbClr val="0F172A"/>
+                </a:solidFill>
+                <a:latin typeface="Inter"/>
+              </a:rPr>
+              <a:t>Acceleration</a:t>
+            </a:r>
+          </a:p>
+        </p:txBody>
+      </p:sp>
+      <p:sp>
+        <p:nvSpPr>
+          <p:cNvPr id="28" name="TextBox 27"/>
+          <p:cNvSpPr txBox="1"/>
+          <p:nvPr/>
+        </p:nvSpPr>
+        <p:spPr>
+          <a:xfrm>
+            <a:off x="4389120" y="5385816"/>
+            <a:ext cx="7315200" cy="457200"/>
+          </a:xfrm>
+          <a:prstGeom prst="rect">
+            <a:avLst/>
+          </a:prstGeom>
+          <a:noFill/>
+        </p:spPr>
+        <p:txBody>
+          <a:bodyPr wrap="square">
+            <a:spAutoFit/>
+          </a:bodyPr>
+          <a:lstStyle/>
+          <a:p>
+            <a:pPr algn="l"/>
+            <a:r>
+              <a:rPr sz="1400" b="0" i="0">
+                <a:solidFill>
+                  <a:srgbClr val="64748B"/>
+                </a:solidFill>
+                <a:latin typeface="Inter"/>
+              </a:rPr>
+              <a:t>the Rust core — in progress</a:t>
+            </a:r>
+          </a:p>
+        </p:txBody>
+      </p:sp>
+      <p:sp>
+        <p:nvSpPr>
+          <p:cNvPr id="29" name="Rounded Rectangle 28">
             <a:hlinkClick action="ppaction://hlinksldjump" r:id="rId2"/>
           </p:cNvPr>
           <p:cNvSpPr/>
@@ -12055,7 +12099,7 @@
                 </a:solidFill>
                 <a:latin typeface="Inter"/>
               </a:rPr>
-              <a:t>How the Rust core is built</a:t>
+              <a:t>Why a Rust core now?</a:t>
             </a:r>
           </a:p>
         </p:txBody>
@@ -12090,45 +12134,150 @@
                 </a:solidFill>
                 <a:latin typeface="Inter"/>
               </a:rPr>
-              <a:t>BYTE SEAM · FALLBACK · PARITY</a:t>
-            </a:r>
-          </a:p>
-        </p:txBody>
-      </p:sp>
-      <p:pic>
-        <p:nvPicPr>
-          <p:cNvPr id="7" name="Picture 6" descr="byte-seam_5.png"/>
-          <p:cNvPicPr>
-            <a:picLocks noChangeAspect="1"/>
-          </p:cNvPicPr>
-          <p:nvPr/>
-        </p:nvPicPr>
-        <p:blipFill>
-          <a:blip r:embed="rId2">
-            <a:extLst>
-              <a:ext uri="{96DAC541-7B7A-43D3-8B79-37D633B846F1}">
-                <ns0:svgBlip xmlns:ns0="http://schemas.microsoft.com/office/drawing/2016/SVG/main" r:embed="rId3"/>
-              </a:ext>
-            </a:extLst>
-          </a:blip>
-          <a:stretch>
-            <a:fillRect/>
-          </a:stretch>
-        </p:blipFill>
-        <p:spPr>
-          <a:xfrm>
-            <a:off x="746607" y="1417320"/>
-            <a:ext cx="10698480" cy="4190237"/>
-          </a:xfrm>
-          <a:prstGeom prst="rect">
-            <a:avLst/>
-          </a:prstGeom>
-        </p:spPr>
-      </p:pic>
+              <a:t>A DELIBERATE DUAL-ENGINE DECISION</a:t>
+            </a:r>
+          </a:p>
+        </p:txBody>
+      </p:sp>
+      <p:sp>
+        <p:nvSpPr>
+          <p:cNvPr id="7" name="TextBox 6"/>
+          <p:cNvSpPr txBox="1"/>
+          <p:nvPr/>
+        </p:nvSpPr>
+        <p:spPr>
+          <a:xfrm>
+            <a:off x="777240" y="1554480"/>
+            <a:ext cx="10607040" cy="4572000"/>
+          </a:xfrm>
+          <a:prstGeom prst="rect">
+            <a:avLst/>
+          </a:prstGeom>
+          <a:noFill/>
+        </p:spPr>
+        <p:txBody>
+          <a:bodyPr wrap="square">
+            <a:spAutoFit/>
+          </a:bodyPr>
+          <a:lstStyle/>
+          <a:p>
+            <a:pPr>
+              <a:lnSpc>
+                <a:spcPct val="104000"/>
+              </a:lnSpc>
+              <a:spcAft>
+                <a:spcPts val="2000"/>
+              </a:spcAft>
+            </a:pPr>
+            <a:r>
+              <a:rPr sz="2800" b="1">
+                <a:solidFill>
+                  <a:srgbClr val="06B6D4"/>
+                </a:solidFill>
+                <a:latin typeface="Inter"/>
+              </a:rPr>
+              <a:t>▪  </a:t>
+            </a:r>
+            <a:r>
+              <a:rPr sz="2800" b="1">
+                <a:solidFill>
+                  <a:srgbClr val="0F172A"/>
+                </a:solidFill>
+                <a:latin typeface="Inter"/>
+              </a:rPr>
+              <a:t>Python bottlenecks: CPU and the GIL</a:t>
+            </a:r>
+          </a:p>
+          <a:p>
+            <a:pPr>
+              <a:lnSpc>
+                <a:spcPct val="104000"/>
+              </a:lnSpc>
+              <a:spcAft>
+                <a:spcPts val="2000"/>
+              </a:spcAft>
+            </a:pPr>
+            <a:r>
+              <a:rPr sz="2800" b="1">
+                <a:solidFill>
+                  <a:srgbClr val="06B6D4"/>
+                </a:solidFill>
+                <a:latin typeface="Inter"/>
+              </a:rPr>
+              <a:t>▪  </a:t>
+            </a:r>
+            <a:r>
+              <a:rPr sz="2800" b="1">
+                <a:solidFill>
+                  <a:srgbClr val="0F172A"/>
+                </a:solidFill>
+                <a:latin typeface="Inter"/>
+              </a:rPr>
+              <a:t>Rust runs the hot work off the GIL</a:t>
+            </a:r>
+          </a:p>
+          <a:p>
+            <a:pPr>
+              <a:lnSpc>
+                <a:spcPct val="104000"/>
+              </a:lnSpc>
+              <a:spcAft>
+                <a:spcPts val="2000"/>
+              </a:spcAft>
+            </a:pPr>
+            <a:r>
+              <a:rPr sz="2800" b="1">
+                <a:solidFill>
+                  <a:srgbClr val="06B6D4"/>
+                </a:solidFill>
+                <a:latin typeface="Inter"/>
+              </a:rPr>
+              <a:t>▪  </a:t>
+            </a:r>
+            <a:r>
+              <a:rPr sz="2800" b="1">
+                <a:solidFill>
+                  <a:srgbClr val="0F172A"/>
+                </a:solidFill>
+                <a:latin typeface="Inter"/>
+              </a:rPr>
+              <a:t>Keep BOTH engines — Python stays default</a:t>
+            </a:r>
+          </a:p>
+          <a:p>
+            <a:pPr>
+              <a:lnSpc>
+                <a:spcPct val="104000"/>
+              </a:lnSpc>
+              <a:spcAft>
+                <a:spcPts val="2000"/>
+              </a:spcAft>
+            </a:pPr>
+            <a:r>
+              <a:rPr sz="2800" b="1">
+                <a:solidFill>
+                  <a:srgbClr val="06B6D4"/>
+                </a:solidFill>
+                <a:latin typeface="Inter"/>
+              </a:rPr>
+              <a:t>▪  </a:t>
+            </a:r>
+            <a:r>
+              <a:rPr sz="2800" b="1">
+                <a:solidFill>
+                  <a:srgbClr val="0F172A"/>
+                </a:solidFill>
+                <a:latin typeface="Inter"/>
+              </a:rPr>
+              <a:t>Accelerator, not replacement</a:t>
+            </a:r>
+          </a:p>
+        </p:txBody>
+      </p:sp>
       <p:sp>
         <p:nvSpPr>
           <p:cNvPr id="8" name="Rounded Rectangle 7">
-            <a:hlinkClick action="ppaction://hlinksldjump" r:id="rId4"/>
+            <a:hlinkClick action="ppaction://hlinksldjump" r:id="rId2"/>
           </p:cNvPr>
           <p:cNvSpPr/>
           <p:nvPr/>
@@ -12360,7 +12509,7 @@
                 </a:solidFill>
                 <a:latin typeface="Inter"/>
               </a:rPr>
-              <a:t>What's ported so far</a:t>
+              <a:t>How the Rust core is built</a:t>
             </a:r>
           </a:p>
         </p:txBody>
@@ -12395,150 +12544,45 @@
                 </a:solidFill>
                 <a:latin typeface="Inter"/>
               </a:rPr>
-              <a:t>LEAF ENGINES + THE FULL PIPELINE</a:t>
-            </a:r>
-          </a:p>
-        </p:txBody>
-      </p:sp>
-      <p:sp>
-        <p:nvSpPr>
-          <p:cNvPr id="7" name="TextBox 6"/>
-          <p:cNvSpPr txBox="1"/>
-          <p:nvPr/>
-        </p:nvSpPr>
-        <p:spPr>
-          <a:xfrm>
-            <a:off x="777240" y="1554480"/>
-            <a:ext cx="10607040" cy="4572000"/>
-          </a:xfrm>
-          <a:prstGeom prst="rect">
-            <a:avLst/>
-          </a:prstGeom>
-          <a:noFill/>
-        </p:spPr>
-        <p:txBody>
-          <a:bodyPr wrap="square">
-            <a:spAutoFit/>
-          </a:bodyPr>
-          <a:lstStyle/>
-          <a:p>
-            <a:pPr>
-              <a:lnSpc>
-                <a:spcPct val="104000"/>
-              </a:lnSpc>
-              <a:spcAft>
-                <a:spcPts val="2000"/>
-              </a:spcAft>
-            </a:pPr>
-            <a:r>
-              <a:rPr sz="2800" b="1">
-                <a:solidFill>
-                  <a:srgbClr val="06B6D4"/>
-                </a:solidFill>
-                <a:latin typeface="Inter"/>
-              </a:rPr>
-              <a:t>▪  </a:t>
-            </a:r>
-            <a:r>
-              <a:rPr sz="2800" b="1">
-                <a:solidFill>
-                  <a:srgbClr val="0F172A"/>
-                </a:solidFill>
-                <a:latin typeface="Inter"/>
-              </a:rPr>
-              <a:t>Six leaf engines + collation</a:t>
-            </a:r>
-          </a:p>
-          <a:p>
-            <a:pPr>
-              <a:lnSpc>
-                <a:spcPct val="104000"/>
-              </a:lnSpc>
-              <a:spcAft>
-                <a:spcPts val="2000"/>
-              </a:spcAft>
-            </a:pPr>
-            <a:r>
-              <a:rPr sz="2800" b="1">
-                <a:solidFill>
-                  <a:srgbClr val="06B6D4"/>
-                </a:solidFill>
-                <a:latin typeface="Inter"/>
-              </a:rPr>
-              <a:t>▪  </a:t>
-            </a:r>
-            <a:r>
-              <a:rPr sz="2800" b="1">
-                <a:solidFill>
-                  <a:srgbClr val="0F172A"/>
-                </a:solidFill>
-                <a:latin typeface="Inter"/>
-              </a:rPr>
-              <a:t>The entire storage-independent pipeline</a:t>
-            </a:r>
-          </a:p>
-          <a:p>
-            <a:pPr>
-              <a:lnSpc>
-                <a:spcPct val="104000"/>
-              </a:lnSpc>
-              <a:spcAft>
-                <a:spcPts val="2000"/>
-              </a:spcAft>
-            </a:pPr>
-            <a:r>
-              <a:rPr sz="2800" b="1">
-                <a:solidFill>
-                  <a:srgbClr val="06B6D4"/>
-                </a:solidFill>
-                <a:latin typeface="Inter"/>
-              </a:rPr>
-              <a:t>▪  </a:t>
-            </a:r>
-            <a:r>
-              <a:rPr sz="2800" b="1">
-                <a:solidFill>
-                  <a:srgbClr val="0F172A"/>
-                </a:solidFill>
-                <a:latin typeface="Inter"/>
-              </a:rPr>
-              <a:t>515 parity cases green</a:t>
-            </a:r>
-          </a:p>
-          <a:p>
-            <a:pPr>
-              <a:lnSpc>
-                <a:spcPct val="104000"/>
-              </a:lnSpc>
-              <a:spcAft>
-                <a:spcPts val="2000"/>
-              </a:spcAft>
-            </a:pPr>
-            <a:r>
-              <a:rPr sz="2800" b="1">
-                <a:solidFill>
-                  <a:srgbClr val="06B6D4"/>
-                </a:solidFill>
-                <a:latin typeface="Inter"/>
-              </a:rPr>
-              <a:t>▪  </a:t>
-            </a:r>
-            <a:r>
-              <a:rPr sz="2800" b="1">
-                <a:solidFill>
-                  <a:srgbClr val="0F172A"/>
-                </a:solidFill>
-                <a:latin typeface="Inter"/>
-              </a:rPr>
-              <a:t>Storage-backed stages still in Python</a:t>
-            </a:r>
-          </a:p>
-        </p:txBody>
-      </p:sp>
+              <a:t>BYTE SEAM · FALLBACK · PARITY</a:t>
+            </a:r>
+          </a:p>
+        </p:txBody>
+      </p:sp>
+      <p:pic>
+        <p:nvPicPr>
+          <p:cNvPr id="7" name="Picture 6" descr="byte-seam_6.png"/>
+          <p:cNvPicPr>
+            <a:picLocks noChangeAspect="1"/>
+          </p:cNvPicPr>
+          <p:nvPr/>
+        </p:nvPicPr>
+        <p:blipFill>
+          <a:blip r:embed="rId2">
+            <a:extLst>
+              <a:ext uri="{96DAC541-7B7A-43D3-8B79-37D633B846F1}">
+                <ns0:svgBlip xmlns:ns0="http://schemas.microsoft.com/office/drawing/2016/SVG/main" r:embed="rId3"/>
+              </a:ext>
+            </a:extLst>
+          </a:blip>
+          <a:stretch>
+            <a:fillRect/>
+          </a:stretch>
+        </p:blipFill>
+        <p:spPr>
+          <a:xfrm>
+            <a:off x="746607" y="1417320"/>
+            <a:ext cx="10698480" cy="4190237"/>
+          </a:xfrm>
+          <a:prstGeom prst="rect">
+            <a:avLst/>
+          </a:prstGeom>
+        </p:spPr>
+      </p:pic>
       <p:sp>
         <p:nvSpPr>
           <p:cNvPr id="8" name="Rounded Rectangle 7">
-            <a:hlinkClick action="ppaction://hlinksldjump" r:id="rId2"/>
+            <a:hlinkClick action="ppaction://hlinksldjump" r:id="rId4"/>
           </p:cNvPr>
           <p:cNvSpPr/>
           <p:nvPr/>
@@ -12770,7 +12814,7 @@
                 </a:solidFill>
                 <a:latin typeface="Inter"/>
               </a:rPr>
-              <a:t>Performance: the GIL is the story</a:t>
+              <a:t>What's ported so far</a:t>
             </a:r>
           </a:p>
         </p:txBody>
@@ -12805,7 +12849,7 @@
                 </a:solidFill>
                 <a:latin typeface="Inter"/>
               </a:rPr>
-              <a:t>Release it, then batch the seam</a:t>
+              <a:t>LEAF ENGINES + THE FULL PIPELINE</a:t>
             </a:r>
           </a:p>
         </p:txBody>
@@ -12818,8 +12862,8 @@
         </p:nvSpPr>
         <p:spPr>
           <a:xfrm>
-            <a:off x="548640" y="1508760"/>
-            <a:ext cx="5303520" cy="4572000"/>
+            <a:off x="777240" y="1554480"/>
+            <a:ext cx="10607040" cy="4572000"/>
           </a:xfrm>
           <a:prstGeom prst="rect">
             <a:avLst/>
@@ -12856,7 +12900,7 @@
                 </a:solidFill>
                 <a:latin typeface="Inter"/>
               </a:rPr>
-              <a:t>Single-thread: ~2× CRUD, ~8× pipeline</a:t>
+              <a:t>Six leaf engines + collation</a:t>
             </a:r>
           </a:p>
           <a:p>
@@ -12884,7 +12928,7 @@
                 </a:solidFill>
                 <a:latin typeface="Inter"/>
               </a:rPr>
-              <a:t>Per-call across threads thrashes the GIL</a:t>
+              <a:t>The entire storage-independent pipeline</a:t>
             </a:r>
           </a:p>
           <a:p>
@@ -12912,7 +12956,7 @@
                 </a:solidFill>
                 <a:latin typeface="Inter"/>
               </a:rPr>
-              <a:t>Batch one call over a whole list →</a:t>
+              <a:t>515 parity cases green</a:t>
             </a:r>
           </a:p>
           <a:p>
@@ -12940,33 +12984,15 @@
                 </a:solidFill>
                 <a:latin typeface="Inter"/>
               </a:rPr>
-              <a:t>~10–12× more throughput on 4 threads</a:t>
-            </a:r>
-          </a:p>
-        </p:txBody>
-      </p:sp>
-      <p:graphicFrame>
-        <p:nvGraphicFramePr>
-          <p:cNvPr id="8" name="Chart 7"/>
-          <p:cNvGraphicFramePr>
-            <a:graphicFrameLocks noGrp="1"/>
-          </p:cNvGraphicFramePr>
-          <p:nvPr/>
-        </p:nvGraphicFramePr>
-        <p:xfrm>
-          <a:off x="6035040" y="1600200"/>
-          <a:ext cx="5760720" cy="4297680"/>
-        </p:xfrm>
-        <a:graphic>
-          <a:graphicData uri="http://schemas.openxmlformats.org/drawingml/2006/chart">
-            <c:chart xmlns:c="http://schemas.openxmlformats.org/drawingml/2006/chart" r:id="rId2"/>
-          </a:graphicData>
-        </a:graphic>
-      </p:graphicFrame>
-      <p:sp>
-        <p:nvSpPr>
-          <p:cNvPr id="9" name="Rounded Rectangle 8">
-            <a:hlinkClick action="ppaction://hlinksldjump" r:id="rId3"/>
+              <a:t>Storage-backed stages still in Python</a:t>
+            </a:r>
+          </a:p>
+        </p:txBody>
+      </p:sp>
+      <p:sp>
+        <p:nvSpPr>
+          <p:cNvPr id="8" name="Rounded Rectangle 7">
+            <a:hlinkClick action="ppaction://hlinksldjump" r:id="rId2"/>
           </p:cNvPr>
           <p:cNvSpPr/>
           <p:nvPr/>
@@ -13051,6 +13077,50 @@
             <a:avLst/>
           </a:prstGeom>
           <a:solidFill>
+            <a:srgbClr val="F8FAFC"/>
+          </a:solidFill>
+          <a:ln>
+            <a:noFill/>
+          </a:ln>
+          <a:effectLst/>
+        </p:spPr>
+        <p:style>
+          <a:lnRef idx="1">
+            <a:schemeClr val="accent1"/>
+          </a:lnRef>
+          <a:fillRef idx="3">
+            <a:schemeClr val="accent1"/>
+          </a:fillRef>
+          <a:effectRef idx="2">
+            <a:schemeClr val="accent1"/>
+          </a:effectRef>
+          <a:fontRef idx="minor">
+            <a:schemeClr val="lt1"/>
+          </a:fontRef>
+        </p:style>
+        <p:txBody>
+          <a:bodyPr rtlCol="0" anchor="ctr"/>
+          <a:lstStyle/>
+          <a:p>
+            <a:pPr algn="ctr"/>
+          </a:p>
+        </p:txBody>
+      </p:sp>
+      <p:sp>
+        <p:nvSpPr>
+          <p:cNvPr id="3" name="Rectangle 2"/>
+          <p:cNvSpPr/>
+          <p:nvPr/>
+        </p:nvSpPr>
+        <p:spPr>
+          <a:xfrm>
+            <a:off x="0" y="0"/>
+            <a:ext cx="12191695" cy="1024128"/>
+          </a:xfrm>
+          <a:prstGeom prst="rect">
+            <a:avLst/>
+          </a:prstGeom>
+          <a:solidFill>
             <a:srgbClr val="0F172A"/>
           </a:solidFill>
           <a:ln>
@@ -13082,14 +13152,14 @@
       </p:sp>
       <p:sp>
         <p:nvSpPr>
-          <p:cNvPr id="3" name="Rectangle 2"/>
+          <p:cNvPr id="4" name="Rectangle 3"/>
           <p:cNvSpPr/>
           <p:nvPr/>
         </p:nvSpPr>
         <p:spPr>
           <a:xfrm>
-            <a:off x="822960" y="2468880"/>
-            <a:ext cx="146304" cy="1554480"/>
+            <a:off x="0" y="1024128"/>
+            <a:ext cx="12191695" cy="50800"/>
           </a:xfrm>
           <a:prstGeom prst="rect">
             <a:avLst/>
@@ -13126,14 +13196,14 @@
       </p:sp>
       <p:sp>
         <p:nvSpPr>
-          <p:cNvPr id="4" name="TextBox 3"/>
+          <p:cNvPr id="5" name="TextBox 4"/>
           <p:cNvSpPr txBox="1"/>
           <p:nvPr/>
         </p:nvSpPr>
         <p:spPr>
           <a:xfrm>
-            <a:off x="1143000" y="2286000"/>
-            <a:ext cx="10058400" cy="640080"/>
+            <a:off x="548640" y="146304"/>
+            <a:ext cx="10972800" cy="713232"/>
           </a:xfrm>
           <a:prstGeom prst="rect">
             <a:avLst/>
@@ -13148,27 +13218,27 @@
           <a:p>
             <a:pPr algn="l"/>
             <a:r>
-              <a:rPr sz="1600" b="1" i="0">
-                <a:solidFill>
-                  <a:srgbClr val="22D3EE"/>
-                </a:solidFill>
-                <a:latin typeface="Inter"/>
-              </a:rPr>
-              <a:t>PART 6</a:t>
-            </a:r>
-          </a:p>
-        </p:txBody>
-      </p:sp>
-      <p:sp>
-        <p:nvSpPr>
-          <p:cNvPr id="5" name="TextBox 4"/>
+              <a:rPr sz="3000" b="1" i="0">
+                <a:solidFill>
+                  <a:srgbClr val="FFFFFF"/>
+                </a:solidFill>
+                <a:latin typeface="Inter"/>
+              </a:rPr>
+              <a:t>Performance: the GIL is the story</a:t>
+            </a:r>
+          </a:p>
+        </p:txBody>
+      </p:sp>
+      <p:sp>
+        <p:nvSpPr>
+          <p:cNvPr id="6" name="TextBox 5"/>
           <p:cNvSpPr txBox="1"/>
           <p:nvPr/>
         </p:nvSpPr>
         <p:spPr>
           <a:xfrm>
-            <a:off x="1143000" y="2743200"/>
-            <a:ext cx="10241280" cy="1280160"/>
+            <a:off x="576072" y="749808"/>
+            <a:ext cx="10972800" cy="274320"/>
           </a:xfrm>
           <a:prstGeom prst="rect">
             <a:avLst/>
@@ -13183,21 +13253,174 @@
           <a:p>
             <a:pPr algn="l"/>
             <a:r>
-              <a:rPr sz="4000" b="1" i="0">
-                <a:solidFill>
-                  <a:srgbClr val="FFFFFF"/>
-                </a:solidFill>
-                <a:latin typeface="Inter"/>
-              </a:rPr>
-              <a:t>Roadmap &amp; takeaways</a:t>
-            </a:r>
-          </a:p>
-        </p:txBody>
-      </p:sp>
-      <p:sp>
-        <p:nvSpPr>
-          <p:cNvPr id="6" name="Rounded Rectangle 5">
-            <a:hlinkClick action="ppaction://hlinksldjump" r:id="rId2"/>
+              <a:rPr sz="1200" b="0" i="0">
+                <a:solidFill>
+                  <a:srgbClr val="22D3EE"/>
+                </a:solidFill>
+                <a:latin typeface="Inter"/>
+              </a:rPr>
+              <a:t>Release it, then batch the seam</a:t>
+            </a:r>
+          </a:p>
+        </p:txBody>
+      </p:sp>
+      <p:sp>
+        <p:nvSpPr>
+          <p:cNvPr id="7" name="TextBox 6"/>
+          <p:cNvSpPr txBox="1"/>
+          <p:nvPr/>
+        </p:nvSpPr>
+        <p:spPr>
+          <a:xfrm>
+            <a:off x="548640" y="1508760"/>
+            <a:ext cx="5303520" cy="4572000"/>
+          </a:xfrm>
+          <a:prstGeom prst="rect">
+            <a:avLst/>
+          </a:prstGeom>
+          <a:noFill/>
+        </p:spPr>
+        <p:txBody>
+          <a:bodyPr wrap="square">
+            <a:spAutoFit/>
+          </a:bodyPr>
+          <a:lstStyle/>
+          <a:p>
+            <a:pPr>
+              <a:lnSpc>
+                <a:spcPct val="104000"/>
+              </a:lnSpc>
+              <a:spcAft>
+                <a:spcPts val="2000"/>
+              </a:spcAft>
+            </a:pPr>
+            <a:r>
+              <a:rPr sz="2800" b="1">
+                <a:solidFill>
+                  <a:srgbClr val="06B6D4"/>
+                </a:solidFill>
+                <a:latin typeface="Inter"/>
+              </a:rPr>
+              <a:t>▪  </a:t>
+            </a:r>
+            <a:r>
+              <a:rPr sz="2800" b="1">
+                <a:solidFill>
+                  <a:srgbClr val="0F172A"/>
+                </a:solidFill>
+                <a:latin typeface="Inter"/>
+              </a:rPr>
+              <a:t>Single-thread: ~2× CRUD, ~8× pipeline</a:t>
+            </a:r>
+          </a:p>
+          <a:p>
+            <a:pPr>
+              <a:lnSpc>
+                <a:spcPct val="104000"/>
+              </a:lnSpc>
+              <a:spcAft>
+                <a:spcPts val="2000"/>
+              </a:spcAft>
+            </a:pPr>
+            <a:r>
+              <a:rPr sz="2800" b="1">
+                <a:solidFill>
+                  <a:srgbClr val="06B6D4"/>
+                </a:solidFill>
+                <a:latin typeface="Inter"/>
+              </a:rPr>
+              <a:t>▪  </a:t>
+            </a:r>
+            <a:r>
+              <a:rPr sz="2800" b="1">
+                <a:solidFill>
+                  <a:srgbClr val="0F172A"/>
+                </a:solidFill>
+                <a:latin typeface="Inter"/>
+              </a:rPr>
+              <a:t>Per-call across threads thrashes the GIL</a:t>
+            </a:r>
+          </a:p>
+          <a:p>
+            <a:pPr>
+              <a:lnSpc>
+                <a:spcPct val="104000"/>
+              </a:lnSpc>
+              <a:spcAft>
+                <a:spcPts val="2000"/>
+              </a:spcAft>
+            </a:pPr>
+            <a:r>
+              <a:rPr sz="2800" b="1">
+                <a:solidFill>
+                  <a:srgbClr val="06B6D4"/>
+                </a:solidFill>
+                <a:latin typeface="Inter"/>
+              </a:rPr>
+              <a:t>▪  </a:t>
+            </a:r>
+            <a:r>
+              <a:rPr sz="2800" b="1">
+                <a:solidFill>
+                  <a:srgbClr val="0F172A"/>
+                </a:solidFill>
+                <a:latin typeface="Inter"/>
+              </a:rPr>
+              <a:t>Batch one call over a whole list →</a:t>
+            </a:r>
+          </a:p>
+          <a:p>
+            <a:pPr>
+              <a:lnSpc>
+                <a:spcPct val="104000"/>
+              </a:lnSpc>
+              <a:spcAft>
+                <a:spcPts val="2000"/>
+              </a:spcAft>
+            </a:pPr>
+            <a:r>
+              <a:rPr sz="2800" b="1">
+                <a:solidFill>
+                  <a:srgbClr val="06B6D4"/>
+                </a:solidFill>
+                <a:latin typeface="Inter"/>
+              </a:rPr>
+              <a:t>▪  </a:t>
+            </a:r>
+            <a:r>
+              <a:rPr sz="2800" b="1">
+                <a:solidFill>
+                  <a:srgbClr val="0F172A"/>
+                </a:solidFill>
+                <a:latin typeface="Inter"/>
+              </a:rPr>
+              <a:t>~10–12× more throughput on 4 threads</a:t>
+            </a:r>
+          </a:p>
+        </p:txBody>
+      </p:sp>
+      <p:graphicFrame>
+        <p:nvGraphicFramePr>
+          <p:cNvPr id="8" name="Chart 7"/>
+          <p:cNvGraphicFramePr>
+            <a:graphicFrameLocks noGrp="1"/>
+          </p:cNvGraphicFramePr>
+          <p:nvPr/>
+        </p:nvGraphicFramePr>
+        <p:xfrm>
+          <a:off x="6035040" y="1600200"/>
+          <a:ext cx="5760720" cy="4297680"/>
+        </p:xfrm>
+        <a:graphic>
+          <a:graphicData uri="http://schemas.openxmlformats.org/drawingml/2006/chart">
+            <c:chart xmlns:c="http://schemas.openxmlformats.org/drawingml/2006/chart" r:id="rId2"/>
+          </a:graphicData>
+        </a:graphic>
+      </p:graphicFrame>
+      <p:sp>
+        <p:nvSpPr>
+          <p:cNvPr id="9" name="Rounded Rectangle 8">
+            <a:hlinkClick action="ppaction://hlinksldjump" r:id="rId3"/>
           </p:cNvPr>
           <p:cNvSpPr/>
           <p:nvPr/>
@@ -13282,50 +13505,6 @@
             <a:avLst/>
           </a:prstGeom>
           <a:solidFill>
-            <a:srgbClr val="F8FAFC"/>
-          </a:solidFill>
-          <a:ln>
-            <a:noFill/>
-          </a:ln>
-          <a:effectLst/>
-        </p:spPr>
-        <p:style>
-          <a:lnRef idx="1">
-            <a:schemeClr val="accent1"/>
-          </a:lnRef>
-          <a:fillRef idx="3">
-            <a:schemeClr val="accent1"/>
-          </a:fillRef>
-          <a:effectRef idx="2">
-            <a:schemeClr val="accent1"/>
-          </a:effectRef>
-          <a:fontRef idx="minor">
-            <a:schemeClr val="lt1"/>
-          </a:fontRef>
-        </p:style>
-        <p:txBody>
-          <a:bodyPr rtlCol="0" anchor="ctr"/>
-          <a:lstStyle/>
-          <a:p>
-            <a:pPr algn="ctr"/>
-          </a:p>
-        </p:txBody>
-      </p:sp>
-      <p:sp>
-        <p:nvSpPr>
-          <p:cNvPr id="3" name="Rectangle 2"/>
-          <p:cNvSpPr/>
-          <p:nvPr/>
-        </p:nvSpPr>
-        <p:spPr>
-          <a:xfrm>
-            <a:off x="0" y="0"/>
-            <a:ext cx="12191695" cy="1024128"/>
-          </a:xfrm>
-          <a:prstGeom prst="rect">
-            <a:avLst/>
-          </a:prstGeom>
-          <a:solidFill>
             <a:srgbClr val="0F172A"/>
           </a:solidFill>
           <a:ln>
@@ -13357,14 +13536,14 @@
       </p:sp>
       <p:sp>
         <p:nvSpPr>
-          <p:cNvPr id="4" name="Rectangle 3"/>
+          <p:cNvPr id="3" name="Rectangle 2"/>
           <p:cNvSpPr/>
           <p:nvPr/>
         </p:nvSpPr>
         <p:spPr>
           <a:xfrm>
-            <a:off x="0" y="1024128"/>
-            <a:ext cx="12191695" cy="50800"/>
+            <a:off x="822960" y="2468880"/>
+            <a:ext cx="146304" cy="1554480"/>
           </a:xfrm>
           <a:prstGeom prst="rect">
             <a:avLst/>
@@ -13401,14 +13580,14 @@
       </p:sp>
       <p:sp>
         <p:nvSpPr>
-          <p:cNvPr id="5" name="TextBox 4"/>
+          <p:cNvPr id="4" name="TextBox 3"/>
           <p:cNvSpPr txBox="1"/>
           <p:nvPr/>
         </p:nvSpPr>
         <p:spPr>
           <a:xfrm>
-            <a:off x="548640" y="146304"/>
-            <a:ext cx="10972800" cy="713232"/>
+            <a:off x="1143000" y="2286000"/>
+            <a:ext cx="10058400" cy="640080"/>
           </a:xfrm>
           <a:prstGeom prst="rect">
             <a:avLst/>
@@ -13423,27 +13602,27 @@
           <a:p>
             <a:pPr algn="l"/>
             <a:r>
-              <a:rPr sz="3000" b="1" i="0">
-                <a:solidFill>
-                  <a:srgbClr val="FFFFFF"/>
-                </a:solidFill>
-                <a:latin typeface="Inter"/>
-              </a:rPr>
-              <a:t>What's next</a:t>
-            </a:r>
-          </a:p>
-        </p:txBody>
-      </p:sp>
-      <p:sp>
-        <p:nvSpPr>
-          <p:cNvPr id="6" name="TextBox 5"/>
+              <a:rPr sz="1600" b="1" i="0">
+                <a:solidFill>
+                  <a:srgbClr val="22D3EE"/>
+                </a:solidFill>
+                <a:latin typeface="Inter"/>
+              </a:rPr>
+              <a:t>PART 6</a:t>
+            </a:r>
+          </a:p>
+        </p:txBody>
+      </p:sp>
+      <p:sp>
+        <p:nvSpPr>
+          <p:cNvPr id="5" name="TextBox 4"/>
           <p:cNvSpPr txBox="1"/>
           <p:nvPr/>
         </p:nvSpPr>
         <p:spPr>
           <a:xfrm>
-            <a:off x="576072" y="749808"/>
-            <a:ext cx="10972800" cy="274320"/>
+            <a:off x="1143000" y="2743200"/>
+            <a:ext cx="10241280" cy="1280160"/>
           </a:xfrm>
           <a:prstGeom prst="rect">
             <a:avLst/>
@@ -13458,155 +13637,20 @@
           <a:p>
             <a:pPr algn="l"/>
             <a:r>
-              <a:rPr sz="1200" b="0" i="0">
-                <a:solidFill>
-                  <a:srgbClr val="22D3EE"/>
-                </a:solidFill>
-                <a:latin typeface="Inter"/>
-              </a:rPr>
-              <a:t>THE REMAINING PHASES</a:t>
-            </a:r>
-          </a:p>
-        </p:txBody>
-      </p:sp>
-      <p:sp>
-        <p:nvSpPr>
-          <p:cNvPr id="7" name="TextBox 6"/>
-          <p:cNvSpPr txBox="1"/>
-          <p:nvPr/>
-        </p:nvSpPr>
-        <p:spPr>
-          <a:xfrm>
-            <a:off x="777240" y="1554480"/>
-            <a:ext cx="10607040" cy="4572000"/>
-          </a:xfrm>
-          <a:prstGeom prst="rect">
-            <a:avLst/>
-          </a:prstGeom>
-          <a:noFill/>
-        </p:spPr>
-        <p:txBody>
-          <a:bodyPr wrap="square">
-            <a:spAutoFit/>
-          </a:bodyPr>
-          <a:lstStyle/>
-          <a:p>
-            <a:pPr>
-              <a:lnSpc>
-                <a:spcPct val="104000"/>
-              </a:lnSpc>
-              <a:spcAft>
-                <a:spcPts val="2000"/>
-              </a:spcAft>
-            </a:pPr>
-            <a:r>
-              <a:rPr sz="2800" b="1">
-                <a:solidFill>
-                  <a:srgbClr val="06B6D4"/>
-                </a:solidFill>
-                <a:latin typeface="Inter"/>
-              </a:rPr>
-              <a:t>▪  </a:t>
-            </a:r>
-            <a:r>
-              <a:rPr sz="2800" b="1">
-                <a:solidFill>
-                  <a:srgbClr val="0F172A"/>
-                </a:solidFill>
-                <a:latin typeface="Inter"/>
-              </a:rPr>
-              <a:t>Batch the seam into storage's loops</a:t>
-            </a:r>
-          </a:p>
-          <a:p>
-            <a:pPr>
-              <a:lnSpc>
-                <a:spcPct val="104000"/>
-              </a:lnSpc>
-              <a:spcAft>
-                <a:spcPts val="2000"/>
-              </a:spcAft>
-            </a:pPr>
-            <a:r>
-              <a:rPr sz="2800" b="1">
-                <a:solidFill>
-                  <a:srgbClr val="06B6D4"/>
-                </a:solidFill>
-                <a:latin typeface="Inter"/>
-              </a:rPr>
-              <a:t>▪  </a:t>
-            </a:r>
-            <a:r>
-              <a:rPr sz="2800" b="1">
-                <a:solidFill>
-                  <a:srgbClr val="0F172A"/>
-                </a:solidFill>
-                <a:latin typeface="Inter"/>
-              </a:rPr>
-              <a:t>Port storage onto a WiredTiger FFI</a:t>
-            </a:r>
-          </a:p>
-          <a:p>
-            <a:pPr>
-              <a:lnSpc>
-                <a:spcPct val="104000"/>
-              </a:lnSpc>
-              <a:spcAft>
-                <a:spcPts val="2000"/>
-              </a:spcAft>
-            </a:pPr>
-            <a:r>
-              <a:rPr sz="2800" b="1">
-                <a:solidFill>
-                  <a:srgbClr val="06B6D4"/>
-                </a:solidFill>
-                <a:latin typeface="Inter"/>
-              </a:rPr>
-              <a:t>▪  </a:t>
-            </a:r>
-            <a:r>
-              <a:rPr sz="2800" b="1">
-                <a:solidFill>
-                  <a:srgbClr val="0F172A"/>
-                </a:solidFill>
-                <a:latin typeface="Inter"/>
-              </a:rPr>
-              <a:t>Then wire &amp; dispatch → never touch Python</a:t>
-            </a:r>
-          </a:p>
-          <a:p>
-            <a:pPr>
-              <a:lnSpc>
-                <a:spcPct val="104000"/>
-              </a:lnSpc>
-              <a:spcAft>
-                <a:spcPts val="2000"/>
-              </a:spcAft>
-            </a:pPr>
-            <a:r>
-              <a:rPr sz="2800" b="1">
-                <a:solidFill>
-                  <a:srgbClr val="06B6D4"/>
-                </a:solidFill>
-                <a:latin typeface="Inter"/>
-              </a:rPr>
-              <a:t>▪  </a:t>
-            </a:r>
-            <a:r>
-              <a:rPr sz="2800" b="1">
-                <a:solidFill>
-                  <a:srgbClr val="0F172A"/>
-                </a:solidFill>
-                <a:latin typeface="Inter"/>
-              </a:rPr>
-              <a:t>Compatibility number must not regress</a:t>
-            </a:r>
-          </a:p>
-        </p:txBody>
-      </p:sp>
-      <p:sp>
-        <p:nvSpPr>
-          <p:cNvPr id="8" name="Rounded Rectangle 7">
+              <a:rPr sz="4000" b="1" i="0">
+                <a:solidFill>
+                  <a:srgbClr val="FFFFFF"/>
+                </a:solidFill>
+                <a:latin typeface="Inter"/>
+              </a:rPr>
+              <a:t>Roadmap &amp; takeaways</a:t>
+            </a:r>
+          </a:p>
+        </p:txBody>
+      </p:sp>
+      <p:sp>
+        <p:nvSpPr>
+          <p:cNvPr id="6" name="Rounded Rectangle 5">
             <a:hlinkClick action="ppaction://hlinksldjump" r:id="rId2"/>
           </p:cNvPr>
           <p:cNvSpPr/>
@@ -13839,7 +13883,7 @@
                 </a:solidFill>
                 <a:latin typeface="Inter"/>
               </a:rPr>
-              <a:t>Takeaways</a:t>
+              <a:t>What's next</a:t>
             </a:r>
           </a:p>
         </p:txBody>
@@ -13874,7 +13918,7 @@
                 </a:solidFill>
                 <a:latin typeface="Inter"/>
               </a:rPr>
-              <a:t>THE STORY IN FOUR LINES</a:t>
+              <a:t>THE REMAINING PHASES</a:t>
             </a:r>
           </a:p>
         </p:txBody>
@@ -13925,7 +13969,7 @@
                 </a:solidFill>
                 <a:latin typeface="Inter"/>
               </a:rPr>
-              <a:t>The SQLite of document databases</a:t>
+              <a:t>Batch the seam into storage's loops</a:t>
             </a:r>
           </a:p>
           <a:p>
@@ -13953,7 +13997,7 @@
                 </a:solidFill>
                 <a:latin typeface="Inter"/>
               </a:rPr>
-              <a:t>Fidelity by design; honesty by gauges</a:t>
+              <a:t>Port storage onto a WiredTiger FFI</a:t>
             </a:r>
           </a:p>
           <a:p>
@@ -13981,7 +14025,7 @@
                 </a:solidFill>
                 <a:latin typeface="Inter"/>
               </a:rPr>
-              <a:t>Rust adds speed — Python stays, always</a:t>
+              <a:t>Then wire &amp; dispatch → never touch Python</a:t>
             </a:r>
           </a:p>
           <a:p>
@@ -14009,7 +14053,7 @@
                 </a:solidFill>
                 <a:latin typeface="Inter"/>
               </a:rPr>
-              <a:t>The win was the GIL + batching, not micro-opts</a:t>
+              <a:t>Compatibility number must not regress</a:t>
             </a:r>
           </a:p>
         </p:txBody>
@@ -14102,6 +14146,50 @@
             <a:avLst/>
           </a:prstGeom>
           <a:solidFill>
+            <a:srgbClr val="F8FAFC"/>
+          </a:solidFill>
+          <a:ln>
+            <a:noFill/>
+          </a:ln>
+          <a:effectLst/>
+        </p:spPr>
+        <p:style>
+          <a:lnRef idx="1">
+            <a:schemeClr val="accent1"/>
+          </a:lnRef>
+          <a:fillRef idx="3">
+            <a:schemeClr val="accent1"/>
+          </a:fillRef>
+          <a:effectRef idx="2">
+            <a:schemeClr val="accent1"/>
+          </a:effectRef>
+          <a:fontRef idx="minor">
+            <a:schemeClr val="lt1"/>
+          </a:fontRef>
+        </p:style>
+        <p:txBody>
+          <a:bodyPr rtlCol="0" anchor="ctr"/>
+          <a:lstStyle/>
+          <a:p>
+            <a:pPr algn="ctr"/>
+          </a:p>
+        </p:txBody>
+      </p:sp>
+      <p:sp>
+        <p:nvSpPr>
+          <p:cNvPr id="3" name="Rectangle 2"/>
+          <p:cNvSpPr/>
+          <p:nvPr/>
+        </p:nvSpPr>
+        <p:spPr>
+          <a:xfrm>
+            <a:off x="0" y="0"/>
+            <a:ext cx="12191695" cy="1024128"/>
+          </a:xfrm>
+          <a:prstGeom prst="rect">
+            <a:avLst/>
+          </a:prstGeom>
+          <a:solidFill>
             <a:srgbClr val="0F172A"/>
           </a:solidFill>
           <a:ln>
@@ -14133,14 +14221,14 @@
       </p:sp>
       <p:sp>
         <p:nvSpPr>
-          <p:cNvPr id="3" name="Rectangle 2"/>
+          <p:cNvPr id="4" name="Rectangle 3"/>
           <p:cNvSpPr/>
           <p:nvPr/>
         </p:nvSpPr>
         <p:spPr>
           <a:xfrm>
-            <a:off x="0" y="3383280"/>
-            <a:ext cx="12191695" cy="63500"/>
+            <a:off x="0" y="1024128"/>
+            <a:ext cx="12191695" cy="50800"/>
           </a:xfrm>
           <a:prstGeom prst="rect">
             <a:avLst/>
@@ -14175,36 +14263,6 @@
           </a:p>
         </p:txBody>
       </p:sp>
-      <p:pic>
-        <p:nvPicPr>
-          <p:cNvPr id="4" name="Picture 3" descr="mark-on-dark_1.png"/>
-          <p:cNvPicPr>
-            <a:picLocks noChangeAspect="1"/>
-          </p:cNvPicPr>
-          <p:nvPr/>
-        </p:nvPicPr>
-        <p:blipFill>
-          <a:blip r:embed="rId2">
-            <a:extLst>
-              <a:ext uri="{96DAC541-7B7A-43D3-8B79-37D633B846F1}">
-                <ns0:svgBlip xmlns:ns0="http://schemas.microsoft.com/office/drawing/2016/SVG/main" r:embed="rId3"/>
-              </a:ext>
-            </a:extLst>
-          </a:blip>
-          <a:stretch>
-            <a:fillRect/>
-          </a:stretch>
-        </p:blipFill>
-        <p:spPr>
-          <a:xfrm>
-            <a:off x="10149840" y="502920"/>
-            <a:ext cx="1188720" cy="1188720"/>
-          </a:xfrm>
-          <a:prstGeom prst="rect">
-            <a:avLst/>
-          </a:prstGeom>
-        </p:spPr>
-      </p:pic>
       <p:sp>
         <p:nvSpPr>
           <p:cNvPr id="5" name="TextBox 4"/>
@@ -14213,8 +14271,8 @@
         </p:nvSpPr>
         <p:spPr>
           <a:xfrm>
-            <a:off x="822960" y="2468880"/>
-            <a:ext cx="10515600" cy="1097280"/>
+            <a:off x="548640" y="146304"/>
+            <a:ext cx="10972800" cy="713232"/>
           </a:xfrm>
           <a:prstGeom prst="rect">
             <a:avLst/>
@@ -14229,13 +14287,13 @@
           <a:p>
             <a:pPr algn="l"/>
             <a:r>
-              <a:rPr sz="4800" b="1" i="0">
+              <a:rPr sz="3000" b="1" i="0">
                 <a:solidFill>
                   <a:srgbClr val="FFFFFF"/>
                 </a:solidFill>
                 <a:latin typeface="Inter"/>
               </a:rPr>
-              <a:t>Thank you</a:t>
+              <a:t>Takeaways</a:t>
             </a:r>
           </a:p>
         </p:txBody>
@@ -14248,8 +14306,8 @@
         </p:nvSpPr>
         <p:spPr>
           <a:xfrm>
-            <a:off x="868680" y="3657600"/>
-            <a:ext cx="10515600" cy="731520"/>
+            <a:off x="576072" y="749808"/>
+            <a:ext cx="10972800" cy="274320"/>
           </a:xfrm>
           <a:prstGeom prst="rect">
             <a:avLst/>
@@ -14264,13 +14322,13 @@
           <a:p>
             <a:pPr algn="l"/>
             <a:r>
-              <a:rPr sz="2200" b="0" i="0">
+              <a:rPr sz="1200" b="0" i="0">
                 <a:solidFill>
                   <a:srgbClr val="22D3EE"/>
                 </a:solidFill>
                 <a:latin typeface="Inter"/>
               </a:rPr>
-              <a:t>Questions &amp; discussion</a:t>
+              <a:t>THE STORY IN FIVE LINES</a:t>
             </a:r>
           </a:p>
         </p:txBody>
@@ -14283,8 +14341,8 @@
         </p:nvSpPr>
         <p:spPr>
           <a:xfrm>
-            <a:off x="868680" y="4572000"/>
-            <a:ext cx="10515600" cy="548640"/>
+            <a:off x="777240" y="1554480"/>
+            <a:ext cx="10607040" cy="4572000"/>
           </a:xfrm>
           <a:prstGeom prst="rect">
             <a:avLst/>
@@ -14297,15 +14355,143 @@
           </a:bodyPr>
           <a:lstStyle/>
           <a:p>
-            <a:pPr algn="l"/>
-            <a:r>
-              <a:rPr sz="1400" b="0" i="0">
-                <a:solidFill>
-                  <a:srgbClr val="CBD5E1"/>
-                </a:solidFill>
-                <a:latin typeface="Inter"/>
-              </a:rPr>
-              <a:t>SecantusDB · the SQLite of document databases · package: secantus</a:t>
+            <a:pPr>
+              <a:lnSpc>
+                <a:spcPct val="104000"/>
+              </a:lnSpc>
+              <a:spcAft>
+                <a:spcPts val="1300"/>
+              </a:spcAft>
+            </a:pPr>
+            <a:r>
+              <a:rPr sz="2400" b="1">
+                <a:solidFill>
+                  <a:srgbClr val="06B6D4"/>
+                </a:solidFill>
+                <a:latin typeface="Inter"/>
+              </a:rPr>
+              <a:t>▪  </a:t>
+            </a:r>
+            <a:r>
+              <a:rPr sz="2400" b="1">
+                <a:solidFill>
+                  <a:srgbClr val="0F172A"/>
+                </a:solidFill>
+                <a:latin typeface="Inter"/>
+              </a:rPr>
+              <a:t>The SQLite of document databases</a:t>
+            </a:r>
+          </a:p>
+          <a:p>
+            <a:pPr>
+              <a:lnSpc>
+                <a:spcPct val="104000"/>
+              </a:lnSpc>
+              <a:spcAft>
+                <a:spcPts val="1300"/>
+              </a:spcAft>
+            </a:pPr>
+            <a:r>
+              <a:rPr sz="2400" b="1">
+                <a:solidFill>
+                  <a:srgbClr val="06B6D4"/>
+                </a:solidFill>
+                <a:latin typeface="Inter"/>
+              </a:rPr>
+              <a:t>▪  </a:t>
+            </a:r>
+            <a:r>
+              <a:rPr sz="2400" b="1">
+                <a:solidFill>
+                  <a:srgbClr val="0F172A"/>
+                </a:solidFill>
+                <a:latin typeface="Inter"/>
+              </a:rPr>
+              <a:t>Embedded or standalone — the toolchain just works</a:t>
+            </a:r>
+          </a:p>
+          <a:p>
+            <a:pPr>
+              <a:lnSpc>
+                <a:spcPct val="104000"/>
+              </a:lnSpc>
+              <a:spcAft>
+                <a:spcPts val="1300"/>
+              </a:spcAft>
+            </a:pPr>
+            <a:r>
+              <a:rPr sz="2400" b="1">
+                <a:solidFill>
+                  <a:srgbClr val="06B6D4"/>
+                </a:solidFill>
+                <a:latin typeface="Inter"/>
+              </a:rPr>
+              <a:t>▪  </a:t>
+            </a:r>
+            <a:r>
+              <a:rPr sz="2400" b="1">
+                <a:solidFill>
+                  <a:srgbClr val="0F172A"/>
+                </a:solidFill>
+                <a:latin typeface="Inter"/>
+              </a:rPr>
+              <a:t>Fidelity by design; honesty by gauges</a:t>
+            </a:r>
+          </a:p>
+          <a:p>
+            <a:pPr>
+              <a:lnSpc>
+                <a:spcPct val="104000"/>
+              </a:lnSpc>
+              <a:spcAft>
+                <a:spcPts val="1300"/>
+              </a:spcAft>
+            </a:pPr>
+            <a:r>
+              <a:rPr sz="2400" b="1">
+                <a:solidFill>
+                  <a:srgbClr val="06B6D4"/>
+                </a:solidFill>
+                <a:latin typeface="Inter"/>
+              </a:rPr>
+              <a:t>▪  </a:t>
+            </a:r>
+            <a:r>
+              <a:rPr sz="2400" b="1">
+                <a:solidFill>
+                  <a:srgbClr val="0F172A"/>
+                </a:solidFill>
+                <a:latin typeface="Inter"/>
+              </a:rPr>
+              <a:t>Rust adds speed — Python stays, always</a:t>
+            </a:r>
+          </a:p>
+          <a:p>
+            <a:pPr>
+              <a:lnSpc>
+                <a:spcPct val="104000"/>
+              </a:lnSpc>
+              <a:spcAft>
+                <a:spcPts val="1300"/>
+              </a:spcAft>
+            </a:pPr>
+            <a:r>
+              <a:rPr sz="2400" b="1">
+                <a:solidFill>
+                  <a:srgbClr val="06B6D4"/>
+                </a:solidFill>
+                <a:latin typeface="Inter"/>
+              </a:rPr>
+              <a:t>▪  </a:t>
+            </a:r>
+            <a:r>
+              <a:rPr sz="2400" b="1">
+                <a:solidFill>
+                  <a:srgbClr val="0F172A"/>
+                </a:solidFill>
+                <a:latin typeface="Inter"/>
+              </a:rPr>
+              <a:t>The win was the GIL + batching, not micro-opts</a:t>
             </a:r>
           </a:p>
         </p:txBody>
@@ -14313,7 +14499,7 @@
       <p:sp>
         <p:nvSpPr>
           <p:cNvPr id="8" name="Rounded Rectangle 7">
-            <a:hlinkClick action="ppaction://hlinksldjump" r:id="rId4"/>
+            <a:hlinkClick action="ppaction://hlinksldjump" r:id="rId2"/>
           </p:cNvPr>
           <p:cNvSpPr/>
           <p:nvPr/>
@@ -14435,14 +14621,14 @@
         </p:nvSpPr>
         <p:spPr>
           <a:xfrm>
-            <a:off x="822960" y="2468880"/>
-            <a:ext cx="146304" cy="1554480"/>
+            <a:off x="0" y="3383280"/>
+            <a:ext cx="12191695" cy="63500"/>
           </a:xfrm>
           <a:prstGeom prst="rect">
             <a:avLst/>
           </a:prstGeom>
           <a:solidFill>
-            <a:srgbClr val="22D3EE"/>
+            <a:srgbClr val="06B6D4"/>
           </a:solidFill>
           <a:ln>
             <a:noFill/>
@@ -14471,16 +14657,46 @@
           </a:p>
         </p:txBody>
       </p:sp>
-      <p:sp>
-        <p:nvSpPr>
-          <p:cNvPr id="4" name="TextBox 3"/>
+      <p:pic>
+        <p:nvPicPr>
+          <p:cNvPr id="4" name="Picture 3" descr="mark-on-dark_1.png"/>
+          <p:cNvPicPr>
+            <a:picLocks noChangeAspect="1"/>
+          </p:cNvPicPr>
+          <p:nvPr/>
+        </p:nvPicPr>
+        <p:blipFill>
+          <a:blip r:embed="rId2">
+            <a:extLst>
+              <a:ext uri="{96DAC541-7B7A-43D3-8B79-37D633B846F1}">
+                <ns0:svgBlip xmlns:ns0="http://schemas.microsoft.com/office/drawing/2016/SVG/main" r:embed="rId3"/>
+              </a:ext>
+            </a:extLst>
+          </a:blip>
+          <a:stretch>
+            <a:fillRect/>
+          </a:stretch>
+        </p:blipFill>
+        <p:spPr>
+          <a:xfrm>
+            <a:off x="10149840" y="502920"/>
+            <a:ext cx="1188720" cy="1188720"/>
+          </a:xfrm>
+          <a:prstGeom prst="rect">
+            <a:avLst/>
+          </a:prstGeom>
+        </p:spPr>
+      </p:pic>
+      <p:sp>
+        <p:nvSpPr>
+          <p:cNvPr id="5" name="TextBox 4"/>
           <p:cNvSpPr txBox="1"/>
           <p:nvPr/>
         </p:nvSpPr>
         <p:spPr>
           <a:xfrm>
-            <a:off x="1143000" y="2286000"/>
-            <a:ext cx="10058400" cy="640080"/>
+            <a:off x="822960" y="2468880"/>
+            <a:ext cx="10515600" cy="1097280"/>
           </a:xfrm>
           <a:prstGeom prst="rect">
             <a:avLst/>
@@ -14495,27 +14711,27 @@
           <a:p>
             <a:pPr algn="l"/>
             <a:r>
-              <a:rPr sz="1600" b="1" i="0">
-                <a:solidFill>
-                  <a:srgbClr val="22D3EE"/>
-                </a:solidFill>
-                <a:latin typeface="Inter"/>
-              </a:rPr>
-              <a:t>APPENDIX</a:t>
-            </a:r>
-          </a:p>
-        </p:txBody>
-      </p:sp>
-      <p:sp>
-        <p:nvSpPr>
-          <p:cNvPr id="5" name="TextBox 4"/>
+              <a:rPr sz="4800" b="1" i="0">
+                <a:solidFill>
+                  <a:srgbClr val="FFFFFF"/>
+                </a:solidFill>
+                <a:latin typeface="Inter"/>
+              </a:rPr>
+              <a:t>Thank you</a:t>
+            </a:r>
+          </a:p>
+        </p:txBody>
+      </p:sp>
+      <p:sp>
+        <p:nvSpPr>
+          <p:cNvPr id="6" name="TextBox 5"/>
           <p:cNvSpPr txBox="1"/>
           <p:nvPr/>
         </p:nvSpPr>
         <p:spPr>
           <a:xfrm>
-            <a:off x="1143000" y="2743200"/>
-            <a:ext cx="10241280" cy="1280160"/>
+            <a:off x="868680" y="3657600"/>
+            <a:ext cx="10515600" cy="731520"/>
           </a:xfrm>
           <a:prstGeom prst="rect">
             <a:avLst/>
@@ -14530,27 +14746,27 @@
           <a:p>
             <a:pPr algn="l"/>
             <a:r>
-              <a:rPr sz="4000" b="1" i="0">
-                <a:solidFill>
-                  <a:srgbClr val="FFFFFF"/>
-                </a:solidFill>
-                <a:latin typeface="Inter"/>
-              </a:rPr>
-              <a:t>Speaker notes</a:t>
-            </a:r>
-          </a:p>
-        </p:txBody>
-      </p:sp>
-      <p:sp>
-        <p:nvSpPr>
-          <p:cNvPr id="6" name="TextBox 5"/>
+              <a:rPr sz="2200" b="0" i="0">
+                <a:solidFill>
+                  <a:srgbClr val="22D3EE"/>
+                </a:solidFill>
+                <a:latin typeface="Inter"/>
+              </a:rPr>
+              <a:t>Questions &amp; discussion</a:t>
+            </a:r>
+          </a:p>
+        </p:txBody>
+      </p:sp>
+      <p:sp>
+        <p:nvSpPr>
+          <p:cNvPr id="7" name="TextBox 6"/>
           <p:cNvSpPr txBox="1"/>
           <p:nvPr/>
         </p:nvSpPr>
         <p:spPr>
           <a:xfrm>
-            <a:off x="1161288" y="3840480"/>
-            <a:ext cx="10058400" cy="731520"/>
+            <a:off x="868680" y="4572000"/>
+            <a:ext cx="10515600" cy="548640"/>
           </a:xfrm>
           <a:prstGeom prst="rect">
             <a:avLst/>
@@ -14565,13 +14781,68 @@
           <a:p>
             <a:pPr algn="l"/>
             <a:r>
-              <a:rPr sz="1800" b="0" i="0">
+              <a:rPr sz="1400" b="0" i="0">
                 <a:solidFill>
                   <a:srgbClr val="CBD5E1"/>
                 </a:solidFill>
                 <a:latin typeface="Inter"/>
               </a:rPr>
-              <a:t>One page per slide · click “Speaker notes ▸” on any slide to jump here</a:t>
+              <a:t>SecantusDB · the SQLite of document databases · package: secantus</a:t>
+            </a:r>
+          </a:p>
+        </p:txBody>
+      </p:sp>
+      <p:sp>
+        <p:nvSpPr>
+          <p:cNvPr id="8" name="Rounded Rectangle 7">
+            <a:hlinkClick action="ppaction://hlinksldjump" r:id="rId4"/>
+          </p:cNvPr>
+          <p:cNvSpPr/>
+          <p:nvPr/>
+        </p:nvSpPr>
+        <p:spPr>
+          <a:xfrm>
+            <a:off x="10058400" y="6309360"/>
+            <a:ext cx="1874519" cy="384048"/>
+          </a:xfrm>
+          <a:prstGeom prst="roundRect">
+            <a:avLst/>
+          </a:prstGeom>
+          <a:solidFill>
+            <a:srgbClr val="06B6D4"/>
+          </a:solidFill>
+          <a:ln>
+            <a:noFill/>
+          </a:ln>
+          <a:effectLst/>
+        </p:spPr>
+        <p:style>
+          <a:lnRef idx="1">
+            <a:schemeClr val="accent1"/>
+          </a:lnRef>
+          <a:fillRef idx="3">
+            <a:schemeClr val="accent1"/>
+          </a:fillRef>
+          <a:effectRef idx="2">
+            <a:schemeClr val="accent1"/>
+          </a:effectRef>
+          <a:fontRef idx="minor">
+            <a:schemeClr val="lt1"/>
+          </a:fontRef>
+        </p:style>
+        <p:txBody>
+          <a:bodyPr rtlCol="0" anchor="ctr" wrap="square"/>
+          <a:lstStyle/>
+          <a:p>
+            <a:pPr algn="ctr"/>
+            <a:r>
+              <a:rPr sz="1100" b="1" i="0">
+                <a:solidFill>
+                  <a:srgbClr val="FFFFFF"/>
+                </a:solidFill>
+                <a:latin typeface="Inter"/>
+              </a:rPr>
+              <a:t>Speaker notes  ▸</a:t>
             </a:r>
           </a:p>
         </p:txBody>
@@ -14875,50 +15146,6 @@
             <a:avLst/>
           </a:prstGeom>
           <a:solidFill>
-            <a:srgbClr val="F8FAFC"/>
-          </a:solidFill>
-          <a:ln>
-            <a:noFill/>
-          </a:ln>
-          <a:effectLst/>
-        </p:spPr>
-        <p:style>
-          <a:lnRef idx="1">
-            <a:schemeClr val="accent1"/>
-          </a:lnRef>
-          <a:fillRef idx="3">
-            <a:schemeClr val="accent1"/>
-          </a:fillRef>
-          <a:effectRef idx="2">
-            <a:schemeClr val="accent1"/>
-          </a:effectRef>
-          <a:fontRef idx="minor">
-            <a:schemeClr val="lt1"/>
-          </a:fontRef>
-        </p:style>
-        <p:txBody>
-          <a:bodyPr rtlCol="0" anchor="ctr"/>
-          <a:lstStyle/>
-          <a:p>
-            <a:pPr algn="ctr"/>
-          </a:p>
-        </p:txBody>
-      </p:sp>
-      <p:sp>
-        <p:nvSpPr>
-          <p:cNvPr id="3" name="Rectangle 2"/>
-          <p:cNvSpPr/>
-          <p:nvPr/>
-        </p:nvSpPr>
-        <p:spPr>
-          <a:xfrm>
-            <a:off x="0" y="0"/>
-            <a:ext cx="12191695" cy="1024128"/>
-          </a:xfrm>
-          <a:prstGeom prst="rect">
-            <a:avLst/>
-          </a:prstGeom>
-          <a:solidFill>
             <a:srgbClr val="0F172A"/>
           </a:solidFill>
           <a:ln>
@@ -14950,14 +15177,14 @@
       </p:sp>
       <p:sp>
         <p:nvSpPr>
-          <p:cNvPr id="4" name="Rectangle 3"/>
+          <p:cNvPr id="3" name="Rectangle 2"/>
           <p:cNvSpPr/>
           <p:nvPr/>
         </p:nvSpPr>
         <p:spPr>
           <a:xfrm>
-            <a:off x="0" y="1024128"/>
-            <a:ext cx="12191695" cy="50800"/>
+            <a:off x="822960" y="2468880"/>
+            <a:ext cx="146304" cy="1554480"/>
           </a:xfrm>
           <a:prstGeom prst="rect">
             <a:avLst/>
@@ -14994,14 +15221,14 @@
       </p:sp>
       <p:sp>
         <p:nvSpPr>
-          <p:cNvPr id="5" name="TextBox 4"/>
+          <p:cNvPr id="4" name="TextBox 3"/>
           <p:cNvSpPr txBox="1"/>
           <p:nvPr/>
         </p:nvSpPr>
         <p:spPr>
           <a:xfrm>
-            <a:off x="548640" y="146304"/>
-            <a:ext cx="9601200" cy="731520"/>
+            <a:off x="1143000" y="2286000"/>
+            <a:ext cx="10058400" cy="640080"/>
           </a:xfrm>
           <a:prstGeom prst="rect">
             <a:avLst/>
@@ -15016,27 +15243,27 @@
           <a:p>
             <a:pPr algn="l"/>
             <a:r>
-              <a:rPr sz="2600" b="1" i="0">
-                <a:solidFill>
-                  <a:srgbClr val="FFFFFF"/>
-                </a:solidFill>
-                <a:latin typeface="Inter"/>
-              </a:rPr>
-              <a:t>Notes — Title</a:t>
-            </a:r>
-          </a:p>
-        </p:txBody>
-      </p:sp>
-      <p:sp>
-        <p:nvSpPr>
-          <p:cNvPr id="6" name="TextBox 5"/>
+              <a:rPr sz="1600" b="1" i="0">
+                <a:solidFill>
+                  <a:srgbClr val="22D3EE"/>
+                </a:solidFill>
+                <a:latin typeface="Inter"/>
+              </a:rPr>
+              <a:t>APPENDIX</a:t>
+            </a:r>
+          </a:p>
+        </p:txBody>
+      </p:sp>
+      <p:sp>
+        <p:nvSpPr>
+          <p:cNvPr id="5" name="TextBox 4"/>
           <p:cNvSpPr txBox="1"/>
           <p:nvPr/>
         </p:nvSpPr>
         <p:spPr>
           <a:xfrm>
-            <a:off x="576072" y="749808"/>
-            <a:ext cx="9144000" cy="274320"/>
+            <a:off x="1143000" y="2743200"/>
+            <a:ext cx="10241280" cy="1280160"/>
           </a:xfrm>
           <a:prstGeom prst="rect">
             <a:avLst/>
@@ -15051,27 +15278,27 @@
           <a:p>
             <a:pPr algn="l"/>
             <a:r>
-              <a:rPr sz="1200" b="0" i="0">
-                <a:solidFill>
-                  <a:srgbClr val="22D3EE"/>
-                </a:solidFill>
-                <a:latin typeface="Inter"/>
-              </a:rPr>
-              <a:t>slide 1 of 28</a:t>
-            </a:r>
-          </a:p>
-        </p:txBody>
-      </p:sp>
-      <p:sp>
-        <p:nvSpPr>
-          <p:cNvPr id="7" name="TextBox 6"/>
+              <a:rPr sz="4000" b="1" i="0">
+                <a:solidFill>
+                  <a:srgbClr val="FFFFFF"/>
+                </a:solidFill>
+                <a:latin typeface="Inter"/>
+              </a:rPr>
+              <a:t>Speaker notes</a:t>
+            </a:r>
+          </a:p>
+        </p:txBody>
+      </p:sp>
+      <p:sp>
+        <p:nvSpPr>
+          <p:cNvPr id="6" name="TextBox 5"/>
           <p:cNvSpPr txBox="1"/>
           <p:nvPr/>
         </p:nvSpPr>
         <p:spPr>
           <a:xfrm>
-            <a:off x="777240" y="1463040"/>
-            <a:ext cx="10607040" cy="4572000"/>
+            <a:off x="1161288" y="3840480"/>
+            <a:ext cx="10058400" cy="731520"/>
           </a:xfrm>
           <a:prstGeom prst="rect">
             <a:avLst/>
@@ -15084,74 +15311,15 @@
           </a:bodyPr>
           <a:lstStyle/>
           <a:p>
-            <a:pPr>
-              <a:lnSpc>
-                <a:spcPct val="130000"/>
-              </a:lnSpc>
-            </a:pPr>
-            <a:r>
-              <a:rPr sz="1800">
-                <a:solidFill>
-                  <a:srgbClr val="0F172A"/>
-                </a:solidFill>
-                <a:latin typeface="Inter"/>
-              </a:rPr>
-              <a:t>Frame it with the tagline: SecantusDB is 'the SQLite of document databases' — a real MongoDB-compatible database you embed in a process, not a server you operate. This is a 30-minute overview of why it exists, how it stays faithful, and the current Rust acceleration work. Invite questions throughout.</a:t>
-            </a:r>
-          </a:p>
-        </p:txBody>
-      </p:sp>
-      <p:sp>
-        <p:nvSpPr>
-          <p:cNvPr id="8" name="Rounded Rectangle 7">
-            <a:hlinkClick action="ppaction://hlinksldjump" r:id="rId2"/>
-          </p:cNvPr>
-          <p:cNvSpPr/>
-          <p:nvPr/>
-        </p:nvSpPr>
-        <p:spPr>
-          <a:xfrm>
-            <a:off x="777240" y="6263640"/>
-            <a:ext cx="2011680" cy="384048"/>
-          </a:xfrm>
-          <a:prstGeom prst="roundRect">
-            <a:avLst/>
-          </a:prstGeom>
-          <a:solidFill>
-            <a:srgbClr val="06B6D4"/>
-          </a:solidFill>
-          <a:ln>
-            <a:noFill/>
-          </a:ln>
-          <a:effectLst/>
-        </p:spPr>
-        <p:style>
-          <a:lnRef idx="1">
-            <a:schemeClr val="accent1"/>
-          </a:lnRef>
-          <a:fillRef idx="3">
-            <a:schemeClr val="accent1"/>
-          </a:fillRef>
-          <a:effectRef idx="2">
-            <a:schemeClr val="accent1"/>
-          </a:effectRef>
-          <a:fontRef idx="minor">
-            <a:schemeClr val="lt1"/>
-          </a:fontRef>
-        </p:style>
-        <p:txBody>
-          <a:bodyPr rtlCol="0" anchor="ctr" wrap="square"/>
-          <a:lstStyle/>
-          <a:p>
-            <a:pPr algn="ctr"/>
-            <a:r>
-              <a:rPr sz="1100" b="1" i="0">
-                <a:solidFill>
-                  <a:srgbClr val="FFFFFF"/>
-                </a:solidFill>
-                <a:latin typeface="Inter"/>
-              </a:rPr>
-              <a:t>◂  Back to slide</a:t>
+            <a:pPr algn="l"/>
+            <a:r>
+              <a:rPr sz="1800" b="0" i="0">
+                <a:solidFill>
+                  <a:srgbClr val="CBD5E1"/>
+                </a:solidFill>
+                <a:latin typeface="Inter"/>
+              </a:rPr>
+              <a:t>One page per slide · click “Speaker notes ▸” on any slide to jump here</a:t>
             </a:r>
           </a:p>
         </p:txBody>
@@ -15336,7 +15504,7 @@
                 </a:solidFill>
                 <a:latin typeface="Inter"/>
               </a:rPr>
-              <a:t>Notes — Agenda</a:t>
+              <a:t>Notes — Title</a:t>
             </a:r>
           </a:p>
         </p:txBody>
@@ -15371,7 +15539,7 @@
                 </a:solidFill>
                 <a:latin typeface="Inter"/>
               </a:rPr>
-              <a:t>slide 2 of 28</a:t>
+              <a:t>slide 1 of 29</a:t>
             </a:r>
           </a:p>
         </p:txBody>
@@ -15410,7 +15578,7 @@
                 </a:solidFill>
                 <a:latin typeface="Inter"/>
               </a:rPr>
-              <a:t>Six parts over thirty minutes: first the product and its design, then the engineering progression, ending with the Rust acceleration work and what's next. Keep it conversational.</a:t>
+              <a:t>Frame it with the tagline: SecantusDB is 'the SQLite of document databases' — a real MongoDB-compatible database you embed in a process, not a server you operate. This is a 30-minute overview of why it exists, how it stays faithful, and the current Rust acceleration work. Invite questions throughout.</a:t>
             </a:r>
           </a:p>
         </p:txBody>
@@ -15650,7 +15818,7 @@
                 </a:solidFill>
                 <a:latin typeface="Inter"/>
               </a:rPr>
-              <a:t>Notes — The gap it fills</a:t>
+              <a:t>Notes — Agenda</a:t>
             </a:r>
           </a:p>
         </p:txBody>
@@ -15685,7 +15853,7 @@
                 </a:solidFill>
                 <a:latin typeface="Inter"/>
               </a:rPr>
-              <a:t>slide 3 of 28</a:t>
+              <a:t>slide 2 of 29</a:t>
             </a:r>
           </a:p>
         </p:txBody>
@@ -15724,7 +15892,7 @@
                 </a:solidFill>
                 <a:latin typeface="Inter"/>
               </a:rPr>
-              <a:t>Open with the analogy everyone gets: SQLite. You rarely run a SQL server just to get SQL — you embed SQLite. There was no equivalent for MongoDB. That's the gap.</a:t>
+              <a:t>Six parts over thirty minutes: first the product and its design, then the engineering progression, ending with the Rust acceleration work and what's next. Keep it conversational.</a:t>
             </a:r>
           </a:p>
         </p:txBody>
@@ -15964,7 +16132,7 @@
                 </a:solidFill>
                 <a:latin typeface="Inter"/>
               </a:rPr>
-              <a:t>Notes — Running MongoDB is a deployment</a:t>
+              <a:t>Notes — The gap it fills</a:t>
             </a:r>
           </a:p>
         </p:txBody>
@@ -15999,7 +16167,7 @@
                 </a:solidFill>
                 <a:latin typeface="Inter"/>
               </a:rPr>
-              <a:t>slide 4 of 28</a:t>
+              <a:t>slide 3 of 29</a:t>
             </a:r>
           </a:p>
         </p:txBody>
@@ -16038,7 +16206,7 @@
                 </a:solidFill>
                 <a:latin typeface="Inter"/>
               </a:rPr>
-              <a:t>To get MongoDB behaviour you normally stand up and operate mongod — fine for production, heavy everywhere else: automated tests, CI, local development, demos, prototypes, edge/embedded scenarios. The usual shortcut is a hand-rolled in-memory fake, but those drift: they accept things real MongoDB rejects and vice-versa, so anything built on them is subtly wrong.</a:t>
+              <a:t>Open with the analogy everyone gets: SQLite. You rarely run a SQL server just to get SQL — you embed SQLite. There was no equivalent for MongoDB. That's the gap.</a:t>
             </a:r>
           </a:p>
         </p:txBody>
@@ -16278,7 +16446,7 @@
                 </a:solidFill>
                 <a:latin typeface="Inter"/>
               </a:rPr>
-              <a:t>Notes — The idea: the SQLite of document DBs</a:t>
+              <a:t>Notes — Running MongoDB is a deployment</a:t>
             </a:r>
           </a:p>
         </p:txBody>
@@ -16313,7 +16481,7 @@
                 </a:solidFill>
                 <a:latin typeface="Inter"/>
               </a:rPr>
-              <a:t>slide 5 of 28</a:t>
+              <a:t>slide 4 of 29</a:t>
             </a:r>
           </a:p>
         </p:txBody>
@@ -16352,7 +16520,7 @@
                 </a:solidFill>
                 <a:latin typeface="Inter"/>
               </a:rPr>
-              <a:t>Just as SQLite is a real SQL database you embed, SecantusDB is a real MongoDB-compatible server you embed in your process. It speaks the MongoDB wire protocol so any driver connects unmodified. No external daemon, single dependency, single node. 'Surrogate', not 'fake' — it implements the protocol rather than faking responses — which is why drivers can't tell it apart from mongod.</a:t>
+              <a:t>To get MongoDB behaviour you normally stand up and operate mongod — fine for production, heavy everywhere else: automated tests, CI, local development, demos, prototypes, edge/embedded scenarios. The usual shortcut is a hand-rolled in-memory fake, but those drift: they accept things real MongoDB rejects and vice-versa, so anything built on them is subtly wrong.</a:t>
             </a:r>
           </a:p>
         </p:txBody>
@@ -16592,7 +16760,7 @@
                 </a:solidFill>
                 <a:latin typeface="Inter"/>
               </a:rPr>
-              <a:t>Notes — Where it fits</a:t>
+              <a:t>Notes — The idea: the SQLite of document DBs</a:t>
             </a:r>
           </a:p>
         </p:txBody>
@@ -16627,7 +16795,7 @@
                 </a:solidFill>
                 <a:latin typeface="Inter"/>
               </a:rPr>
-              <a:t>slide 6 of 28</a:t>
+              <a:t>slide 5 of 29</a:t>
             </a:r>
           </a:p>
         </p:txBody>
@@ -16666,7 +16834,7 @@
                 </a:solidFill>
                 <a:latin typeface="Inter"/>
               </a:rPr>
-              <a:t>Testing is where it started and still shines, but the in-process model serves far more: local development without a daemon, fast CI, prototyping and demos, embedded / edge deployments where a full server is overkill, and teaching. One small dependency, many places it's useful.</a:t>
+              <a:t>Just as SQLite is a real SQL database you embed, SecantusDB is a real MongoDB-compatible server. Embed it in your process for tests and apps, or start it as a standalone server on a port — same engine either way. It speaks the MongoDB wire protocol, so every client connects unmodified: not just the drivers, but Compass, mongosh, and mongodump/mongorestore. 'Surrogate', not 'fake' — it implements the protocol rather than faking responses, which is why nothing can tell it apart.</a:t>
             </a:r>
           </a:p>
         </p:txBody>
@@ -16906,7 +17074,7 @@
                 </a:solidFill>
                 <a:latin typeface="Inter"/>
               </a:rPr>
-              <a:t>Notes — The name</a:t>
+              <a:t>Notes — Where it fits</a:t>
             </a:r>
           </a:p>
         </p:txBody>
@@ -16941,7 +17109,7 @@
                 </a:solidFill>
                 <a:latin typeface="Inter"/>
               </a:rPr>
-              <a:t>slide 7 of 28</a:t>
+              <a:t>slide 6 of 29</a:t>
             </a:r>
           </a:p>
         </p:txBody>
@@ -16980,7 +17148,7 @@
                 </a:solidFill>
                 <a:latin typeface="Inter"/>
               </a:rPr>
-              <a:t>A light aside. The early prototype was 'fongo', then 'fongodb' — both clash with the existing Fongo brand and blur into MongoDB. 'SecantusDB' dodges both. Lingering 'fongo'/'fongodb' references in the code are stale and mean SecantusDB.</a:t>
+              <a:t>Testing is where it started and still shines, but the in-process model serves far more: local development without a daemon, fast CI, prototyping and demos, embedded / edge deployments where a full server is overkill, and teaching. One small dependency, many places it's useful.</a:t>
             </a:r>
           </a:p>
         </p:txBody>
@@ -17220,7 +17388,7 @@
                 </a:solidFill>
                 <a:latin typeface="Inter"/>
               </a:rPr>
-              <a:t>Notes — Design philosophy</a:t>
+              <a:t>Notes — Standalone — and the toolchain just works</a:t>
             </a:r>
           </a:p>
         </p:txBody>
@@ -17255,7 +17423,7 @@
                 </a:solidFill>
                 <a:latin typeface="Inter"/>
               </a:rPr>
-              <a:t>slide 8 of 28</a:t>
+              <a:t>slide 7 of 29</a:t>
             </a:r>
           </a:p>
         </p:txBody>
@@ -17294,7 +17462,7 @@
                 </a:solidFill>
                 <a:latin typeface="Inter"/>
               </a:rPr>
-              <a:t>Three constraints are the whole discipline; everything follows from them.</a:t>
+              <a:t>Unlike SQLite, it isn't embed-only: start it as a standalone server on a port and the whole MongoDB toolchain connects unchanged — inspect data in Compass, script against it with mongosh, and back up / load fixtures with mongodump and mongorestore. Same wire protocol, so there's nothing special to configure — point any MongoDB tool at the address and it works.</a:t>
             </a:r>
           </a:p>
         </p:txBody>
@@ -17534,7 +17702,7 @@
                 </a:solidFill>
                 <a:latin typeface="Inter"/>
               </a:rPr>
-              <a:t>Notes — Three constraints</a:t>
+              <a:t>Notes — The name</a:t>
             </a:r>
           </a:p>
         </p:txBody>
@@ -17569,7 +17737,7 @@
                 </a:solidFill>
                 <a:latin typeface="Inter"/>
               </a:rPr>
-              <a:t>slide 9 of 28</a:t>
+              <a:t>slide 8 of 29</a:t>
             </a:r>
           </a:p>
         </p:txBody>
@@ -17608,7 +17776,7 @@
                 </a:solidFill>
                 <a:latin typeface="Inter"/>
               </a:rPr>
-              <a:t>One: 'correct' means a driver client can't distinguish us from mongod — when unsure, run the same code against both and assert equal responses. Two: we'd rather return a faithful 'not supported' than a half-feature that silently diverges. Three: ergonomics — embedding it is trivial, no processes to manage.</a:t>
+              <a:t>A light aside. The early prototype was 'fongo', then 'fongodb' — both clash with the existing Fongo brand and blur into MongoDB. 'SecantusDB' dodges both. Lingering 'fongo'/'fongodb' references in the code are stale and mean SecantusDB.</a:t>
             </a:r>
           </a:p>
         </p:txBody>
@@ -17848,7 +18016,7 @@
                 </a:solidFill>
                 <a:latin typeface="Inter"/>
               </a:rPr>
-              <a:t>Notes — Scope</a:t>
+              <a:t>Notes — Design philosophy</a:t>
             </a:r>
           </a:p>
         </p:txBody>
@@ -17883,7 +18051,7 @@
                 </a:solidFill>
                 <a:latin typeface="Inter"/>
               </a:rPr>
-              <a:t>slide 10 of 28</a:t>
+              <a:t>slide 9 of 29</a:t>
             </a:r>
           </a:p>
         </p:txBody>
@@ -17922,7 +18090,7 @@
                 </a:solidFill>
                 <a:latin typeface="Inter"/>
               </a:rPr>
-              <a:t>In scope: the subset of the wire protocol drivers actually emit — handshake, CRUD, cursors, aggregation, findAndModify, change streams. Out of scope: anything that only makes sense across nodes. One nuance: hello advertises a single-node 'replica-set primary' so the driver's change-stream machinery is satisfied — but the topology is fictional.</a:t>
+              <a:t>Three constraints are the whole discipline; everything follows from them.</a:t>
             </a:r>
           </a:p>
         </p:txBody>
@@ -18572,7 +18740,7 @@
                 </a:solidFill>
                 <a:latin typeface="Inter"/>
               </a:rPr>
-              <a:t>Notes — Architecture</a:t>
+              <a:t>Notes — Three constraints</a:t>
             </a:r>
           </a:p>
         </p:txBody>
@@ -18607,7 +18775,7 @@
                 </a:solidFill>
                 <a:latin typeface="Inter"/>
               </a:rPr>
-              <a:t>slide 11 of 28</a:t>
+              <a:t>slide 10 of 29</a:t>
             </a:r>
           </a:p>
         </p:txBody>
@@ -18646,7 +18814,7 @@
                 </a:solidFill>
                 <a:latin typeface="Inter"/>
               </a:rPr>
-              <a:t>Walk the layers; the key idea is strict separation — each knows only the one below.</a:t>
+              <a:t>One: 'correct' means a driver client can't distinguish us from mongod — when unsure, run the same code against both and assert equal responses. Two: we'd rather return a faithful 'not supported' than a half-feature that silently diverges. Three: ergonomics — embedding it is trivial, no processes to manage.</a:t>
             </a:r>
           </a:p>
         </p:txBody>
@@ -18886,7 +19054,7 @@
                 </a:solidFill>
                 <a:latin typeface="Inter"/>
               </a:rPr>
-              <a:t>Notes — The layers, outermost-in</a:t>
+              <a:t>Notes — Scope</a:t>
             </a:r>
           </a:p>
         </p:txBody>
@@ -18921,7 +19089,7 @@
                 </a:solidFill>
                 <a:latin typeface="Inter"/>
               </a:rPr>
-              <a:t>slide 12 of 28</a:t>
+              <a:t>slide 11 of 29</a:t>
             </a:r>
           </a:p>
         </p:txBody>
@@ -18960,7 +19128,7 @@
                 </a:solidFill>
                 <a:latin typeface="Inter"/>
               </a:rPr>
-              <a:t>server.py owns the accept loop and per-connection threads. wire.py speaks bytes and never knows about commands. commands.py is a single dispatch table and never knows about storage. The operator engines are pure — documents in, documents out, no I/O — which is exactly what made the Rust port tractable. storage.py sits on WiredTiger. A request flows down; the BSON reply flows back up.</a:t>
+              <a:t>In scope: the subset of the wire protocol drivers actually emit — handshake, CRUD, cursors, aggregation, findAndModify, change streams. Out of scope: anything that only makes sense across nodes. One nuance: hello advertises a single-node 'replica-set primary' so the driver's change-stream machinery is satisfied — but the topology is fictional.</a:t>
             </a:r>
           </a:p>
         </p:txBody>
@@ -19200,7 +19368,7 @@
                 </a:solidFill>
                 <a:latin typeface="Inter"/>
               </a:rPr>
-              <a:t>Notes — The critical decision: opaque BSON</a:t>
+              <a:t>Notes — Architecture</a:t>
             </a:r>
           </a:p>
         </p:txBody>
@@ -19235,7 +19403,7 @@
                 </a:solidFill>
                 <a:latin typeface="Inter"/>
               </a:rPr>
-              <a:t>slide 13 of 28</a:t>
+              <a:t>slide 12 of 29</a:t>
             </a:r>
           </a:p>
         </p:txBody>
@@ -19274,7 +19442,7 @@
                 </a:solidFill>
                 <a:latin typeface="Inter"/>
               </a:rPr>
-              <a:t>Documents are stored as opaque BSON blobs — never JSON, never native columns. The storage layer never inspects content. ObjectId, Decimal128, int32-vs-int64, Date-with-tz, Binary, Regex must round-trip exactly, because 'a driver can't tell us apart' depends on it. sortkey.py turns BSON values into byte-sortable keys matching MongoDB's cross-type order.</a:t>
+              <a:t>Walk the layers; the key idea is strict separation — each knows only the one below.</a:t>
             </a:r>
           </a:p>
         </p:txBody>
@@ -19514,7 +19682,7 @@
                 </a:solidFill>
                 <a:latin typeface="Inter"/>
               </a:rPr>
-              <a:t>Notes — Storage: WiredTiger, the real thing</a:t>
+              <a:t>Notes — The layers, outermost-in</a:t>
             </a:r>
           </a:p>
         </p:txBody>
@@ -19549,7 +19717,7 @@
                 </a:solidFill>
                 <a:latin typeface="Inter"/>
               </a:rPr>
-              <a:t>slide 14 of 28</a:t>
+              <a:t>slide 13 of 29</a:t>
             </a:r>
           </a:p>
         </p:txBody>
@@ -19588,7 +19756,7 @@
                 </a:solidFill>
                 <a:latin typeface="Inter"/>
               </a:rPr>
-              <a:t>WiredTiger is MongoDB's own storage engine, vendored and built into self-contained wheels — users just pip install, no cmake or swig. Four tables: collections, documents, indexes, index-entries. Documents are keyed by a byte-sortable _id so iteration matches mongod's natural order. ':memory:' maps to an in-memory temp dir removed on close.</a:t>
+              <a:t>server.py owns the accept loop and per-connection threads. wire.py speaks bytes and never knows about commands. commands.py is a single dispatch table and never knows about storage. The operator engines are pure — documents in, documents out, no I/O — which is exactly what made the Rust port tractable. storage.py sits on WiredTiger. A request flows down; the BSON reply flows back up.</a:t>
             </a:r>
           </a:p>
         </p:txBody>
@@ -19828,7 +19996,7 @@
                 </a:solidFill>
                 <a:latin typeface="Inter"/>
               </a:rPr>
-              <a:t>Notes — Indexing — broader than you'd expect</a:t>
+              <a:t>Notes — The critical decision: opaque BSON</a:t>
             </a:r>
           </a:p>
         </p:txBody>
@@ -19863,7 +20031,7 @@
                 </a:solidFill>
                 <a:latin typeface="Inter"/>
               </a:rPr>
-              <a:t>slide 15 of 28</a:t>
+              <a:t>slide 14 of 29</a:t>
             </a:r>
           </a:p>
         </p:txBody>
@@ -19902,7 +20070,7 @@
                 </a:solidFill>
                 <a:latin typeface="Inter"/>
               </a:rPr>
-              <a:t>Indexing is surprisingly complete: single-field and compound with a trailing range, multikey for arrays, partial and TTL indexes, and geospatial — 2d geohash and 2dsphere via S2 cell coverings. A planner chooses index-scan vs collection-scan and explain reports the winning plan. Missing by choice: collation and text/hashed/wildcard indexes.</a:t>
+              <a:t>Documents are stored as opaque BSON blobs — never JSON, never native columns. The storage layer never inspects content. ObjectId, Decimal128, int32-vs-int64, Date-with-tz, Binary, Regex must round-trip exactly, because 'a driver can't tell us apart' depends on it. sortkey.py turns BSON values into byte-sortable keys matching MongoDB's cross-type order.</a:t>
             </a:r>
           </a:p>
         </p:txBody>
@@ -20142,7 +20310,7 @@
                 </a:solidFill>
                 <a:latin typeface="Inter"/>
               </a:rPr>
-              <a:t>Notes — Change streams — the ambitious bit</a:t>
+              <a:t>Notes — Storage: WiredTiger, the real thing</a:t>
             </a:r>
           </a:p>
         </p:txBody>
@@ -20177,7 +20345,7 @@
                 </a:solidFill>
                 <a:latin typeface="Inter"/>
               </a:rPr>
-              <a:t>slide 16 of 28</a:t>
+              <a:t>slide 15 of 29</a:t>
             </a:r>
           </a:p>
         </p:txBody>
@@ -20216,7 +20384,7 @@
                 </a:solidFill>
                 <a:latin typeface="Inter"/>
               </a:rPr>
-              <a:t>The most ambitious feature: a real oplog whose entries mirror mongod's shape, scoped to a collection, database, or cluster. Resume tokens let a client resume exactly. updateLookup full documents, before-change pre-images, awaitData blocking (getMore parks until a writer notifies), and invalidate events on drop/rename. This is what the fictional single-node 'primary' buys us.</a:t>
+              <a:t>WiredTiger is MongoDB's own storage engine, vendored and built into self-contained wheels — users just pip install, no cmake or swig. Four tables: collections, documents, indexes, index-entries. Documents are keyed by a byte-sortable _id so iteration matches mongod's natural order. ':memory:' maps to an in-memory temp dir removed on close.</a:t>
             </a:r>
           </a:p>
         </p:txBody>
@@ -20456,7 +20624,7 @@
                 </a:solidFill>
                 <a:latin typeface="Inter"/>
               </a:rPr>
-              <a:t>Notes — How we prove it works</a:t>
+              <a:t>Notes — Indexing — broader than you'd expect</a:t>
             </a:r>
           </a:p>
         </p:txBody>
@@ -20491,7 +20659,7 @@
                 </a:solidFill>
                 <a:latin typeface="Inter"/>
               </a:rPr>
-              <a:t>slide 17 of 28</a:t>
+              <a:t>slide 16 of 29</a:t>
             </a:r>
           </a:p>
         </p:txBody>
@@ -20530,7 +20698,7 @@
                 </a:solidFill>
                 <a:latin typeface="Inter"/>
               </a:rPr>
-              <a:t>The credibility of the project rests here: we don't trust our own tests, we run the drivers'.</a:t>
+              <a:t>Indexing is surprisingly complete: single-field and compound with a trailing range, multikey for arrays, partial and TTL indexes, and geospatial — 2d geohash and 2dsphere via S2 cell coverings. A planner chooses index-scan vs collection-scan and explain reports the winning plan. Missing by choice: collation and text/hashed/wildcard indexes.</a:t>
             </a:r>
           </a:p>
         </p:txBody>
@@ -20770,7 +20938,7 @@
                 </a:solidFill>
                 <a:latin typeface="Inter"/>
               </a:rPr>
-              <a:t>Notes — Driver-conformance gauges</a:t>
+              <a:t>Notes — Change streams — the ambitious bit</a:t>
             </a:r>
           </a:p>
         </p:txBody>
@@ -20805,7 +20973,7 @@
                 </a:solidFill>
                 <a:latin typeface="Inter"/>
               </a:rPr>
-              <a:t>slide 18 of 28</a:t>
+              <a:t>slide 17 of 29</a:t>
             </a:r>
           </a:p>
         </p:txBody>
@@ -20844,7 +21012,7 @@
                 </a:solidFill>
                 <a:latin typeface="Inter"/>
               </a:rPr>
-              <a:t>We run real, unmodified upstream driver test suites against SecantusDB. Five gauges: pymongo embedded (the headline 'MongoDB compatibility' number) plus the Go, Node, Java and Ruby drivers as real clients over the wire. The other-language drivers catch wire-protocol bugs pymongo is too permissive to notice — like requiring a real int64 cursor id. The default suite runs against on-disk WiredTiger in parallel; CI is load-bearing.</a:t>
+              <a:t>The most ambitious feature: a real oplog whose entries mirror mongod's shape, scoped to a collection, database, or cluster. Resume tokens let a client resume exactly. updateLookup full documents, before-change pre-images, awaitData blocking (getMore parks until a writer notifies), and invalidate events on drop/rename. This is what the fictional single-node 'primary' buys us.</a:t>
             </a:r>
           </a:p>
         </p:txBody>
@@ -21084,7 +21252,7 @@
                 </a:solidFill>
                 <a:latin typeface="Inter"/>
               </a:rPr>
-              <a:t>Notes — Progression to date</a:t>
+              <a:t>Notes — How we prove it works</a:t>
             </a:r>
           </a:p>
         </p:txBody>
@@ -21119,7 +21287,7 @@
                 </a:solidFill>
                 <a:latin typeface="Inter"/>
               </a:rPr>
-              <a:t>slide 19 of 28</a:t>
+              <a:t>slide 18 of 29</a:t>
             </a:r>
           </a:p>
         </p:txBody>
@@ -21158,7 +21326,7 @@
                 </a:solidFill>
                 <a:latin typeface="Inter"/>
               </a:rPr>
-              <a:t>Pivot from 'what it is' to 'how it got here and where it's going'.</a:t>
+              <a:t>The credibility of the project rests here: we don't trust our own tests, we run the drivers'.</a:t>
             </a:r>
           </a:p>
         </p:txBody>
@@ -21398,7 +21566,7 @@
                 </a:solidFill>
                 <a:latin typeface="Inter"/>
               </a:rPr>
-              <a:t>Notes — Timeline</a:t>
+              <a:t>Notes — Driver-conformance gauges</a:t>
             </a:r>
           </a:p>
         </p:txBody>
@@ -21433,7 +21601,7 @@
                 </a:solidFill>
                 <a:latin typeface="Inter"/>
               </a:rPr>
-              <a:t>slide 20 of 28</a:t>
+              <a:t>slide 19 of 29</a:t>
             </a:r>
           </a:p>
         </p:txBody>
@@ -21472,7 +21640,7 @@
                 </a:solidFill>
                 <a:latin typeface="Inter"/>
               </a:rPr>
-              <a:t>From the prototype that proved the protocol, to a real server, to vendoring WiredTiger for true storage fidelity, then breadth (aggregation, indexing, geo), then change streams, then the multi-driver gauges and packaging. The chapter in flight is the Rust acceleration core.</a:t>
+              <a:t>We run real, unmodified upstream driver test suites against SecantusDB. Five gauges: pymongo embedded (the headline 'MongoDB compatibility' number) plus the Go, Node, Java and Ruby drivers as real clients over the wire. The other-language drivers catch wire-protocol bugs pymongo is too permissive to notice — like requiring a real int64 cursor id. The default suite runs against on-disk WiredTiger in parallel; CI is load-bearing.</a:t>
             </a:r>
           </a:p>
         </p:txBody>
@@ -21798,7 +21966,7 @@
                 </a:solidFill>
                 <a:latin typeface="Inter"/>
               </a:rPr>
-              <a:t>A real MongoDB-compatible server — embedded</a:t>
+              <a:t>A real MongoDB-compatible server</a:t>
             </a:r>
           </a:p>
           <a:p>
@@ -21826,7 +21994,7 @@
                 </a:solidFill>
                 <a:latin typeface="Inter"/>
               </a:rPr>
-              <a:t>Runs in-process: no daemon, single dependency</a:t>
+              <a:t>Embed it in-process — or run it standalone</a:t>
             </a:r>
           </a:p>
           <a:p>
@@ -21854,7 +22022,7 @@
                 </a:solidFill>
                 <a:latin typeface="Inter"/>
               </a:rPr>
-              <a:t>Speaks the wire protocol — any driver just works</a:t>
+              <a:t>Speaks the wire protocol — every client connects</a:t>
             </a:r>
           </a:p>
           <a:p>
@@ -22122,7 +22290,7 @@
                 </a:solidFill>
                 <a:latin typeface="Inter"/>
               </a:rPr>
-              <a:t>Notes — Why a Rust core now?</a:t>
+              <a:t>Notes — Progression to date</a:t>
             </a:r>
           </a:p>
         </p:txBody>
@@ -22157,7 +22325,7 @@
                 </a:solidFill>
                 <a:latin typeface="Inter"/>
               </a:rPr>
-              <a:t>slide 21 of 28</a:t>
+              <a:t>slide 20 of 29</a:t>
             </a:r>
           </a:p>
         </p:txBody>
@@ -22196,7 +22364,7 @@
                 </a:solidFill>
                 <a:latin typeface="Inter"/>
               </a:rPr>
-              <a:t>Two bottlenecks: the operator engines run hot in Python, and the GIL serialises work across connections. A Rust core does the heavy lifting off the GIL, unlocking cores. The firm rule: BOTH engines are permanent — the pure-Python engine stays the default and never goes away; Rust is an opt-in accelerator that must reproduce Python exactly.</a:t>
+              <a:t>Pivot from 'what it is' to 'how it got here and where it's going'.</a:t>
             </a:r>
           </a:p>
         </p:txBody>
@@ -22436,7 +22604,7 @@
                 </a:solidFill>
                 <a:latin typeface="Inter"/>
               </a:rPr>
-              <a:t>Notes — How the Rust core is built</a:t>
+              <a:t>Notes — Timeline</a:t>
             </a:r>
           </a:p>
         </p:txBody>
@@ -22471,7 +22639,7 @@
                 </a:solidFill>
                 <a:latin typeface="Inter"/>
               </a:rPr>
-              <a:t>slide 22 of 28</a:t>
+              <a:t>slide 21 of 29</a:t>
             </a:r>
           </a:p>
         </p:txBody>
@@ -22510,7 +22678,7 @@
                 </a:solidFill>
                 <a:latin typeface="Inter"/>
               </a:rPr>
-              <a:t>An optional PyO3/maturin extension. Values cross as BSON bytes — a 'fat byte seam' — keeping the opaque-BSON design intact and avoiding per-field marshalling. Crucially, when Rust hits anything it can't reproduce exactly it signals fallback and the authoritative Python path runs, so it's always correct. Every engine is pinned by a curated-plus-fuzz parity suite asserting Rust equals Python byte-for-byte.</a:t>
+              <a:t>From the prototype that proved the protocol, to a real server, to vendoring WiredTiger for true storage fidelity, then breadth (aggregation, indexing, geo), then change streams, then the multi-driver gauges and packaging. The chapter in flight is the Rust acceleration core.</a:t>
             </a:r>
           </a:p>
         </p:txBody>
@@ -22750,7 +22918,7 @@
                 </a:solidFill>
                 <a:latin typeface="Inter"/>
               </a:rPr>
-              <a:t>Notes — What's ported so far</a:t>
+              <a:t>Notes — Why a Rust core now?</a:t>
             </a:r>
           </a:p>
         </p:txBody>
@@ -22785,7 +22953,7 @@
                 </a:solidFill>
                 <a:latin typeface="Inter"/>
               </a:rPr>
-              <a:t>slide 23 of 28</a:t>
+              <a:t>slide 22 of 29</a:t>
             </a:r>
           </a:p>
         </p:txBody>
@@ -22824,7 +22992,7 @@
                 </a:solidFill>
                 <a:latin typeface="Inter"/>
               </a:rPr>
-              <a:t>Done: de-risking spikes; all six pure leaf engines (sortkey, query, update, expressions, projection, diff) plus collation; and the whole storage-independent aggregation pipeline — match, project, group, sort, unwind, bucket, facet, densify and the rest. 515 parity cases green across curated corpora and multi-seed fuzzing. Still in Python because they need storage: $lookup, $geoNear, $out, $merge, and storage itself.</a:t>
+              <a:t>Two bottlenecks: the operator engines run hot in Python, and the GIL serialises work across connections. A Rust core does the heavy lifting off the GIL, unlocking cores. The firm rule: BOTH engines are permanent — the pure-Python engine stays the default and never goes away; Rust is an opt-in accelerator that must reproduce Python exactly.</a:t>
             </a:r>
           </a:p>
         </p:txBody>
@@ -23064,7 +23232,7 @@
                 </a:solidFill>
                 <a:latin typeface="Inter"/>
               </a:rPr>
-              <a:t>Notes — Performance</a:t>
+              <a:t>Notes — How the Rust core is built</a:t>
             </a:r>
           </a:p>
         </p:txBody>
@@ -23099,7 +23267,7 @@
                 </a:solidFill>
                 <a:latin typeface="Inter"/>
               </a:rPr>
-              <a:t>slide 24 of 28</a:t>
+              <a:t>slide 23 of 29</a:t>
             </a:r>
           </a:p>
         </p:txBody>
@@ -23138,7 +23306,7 @@
                 </a:solidFill>
                 <a:latin typeface="Inter"/>
               </a:rPr>
-              <a:t>Single-threaded the Rust path is ~2× faster on CRUD ops and ~8× on a full pipeline — even paying the byte seam. But per-call across threads the GIL ping-pongs on tiny ops and throughput regresses. The fix is batching: one call filters or updates a whole list under a single GIL release, turning the regression into ~10–12× more throughput on four threads. Lesson: the win is releasing the GIL and coarsening the seam, not micro-optimising operators. Numbers from a 4-core dev box; the real proof is a concurrent-connection server benchmark.</a:t>
+              <a:t>An optional PyO3/maturin extension. Values cross as BSON bytes — a 'fat byte seam' — keeping the opaque-BSON design intact and avoiding per-field marshalling. Crucially, when Rust hits anything it can't reproduce exactly it signals fallback and the authoritative Python path runs, so it's always correct. Every engine is pinned by a curated-plus-fuzz parity suite asserting Rust equals Python byte-for-byte.</a:t>
             </a:r>
           </a:p>
         </p:txBody>
@@ -23378,7 +23546,7 @@
                 </a:solidFill>
                 <a:latin typeface="Inter"/>
               </a:rPr>
-              <a:t>Notes — Roadmap &amp; takeaways</a:t>
+              <a:t>Notes — What's ported so far</a:t>
             </a:r>
           </a:p>
         </p:txBody>
@@ -23413,7 +23581,7 @@
                 </a:solidFill>
                 <a:latin typeface="Inter"/>
               </a:rPr>
-              <a:t>slide 25 of 28</a:t>
+              <a:t>slide 24 of 29</a:t>
             </a:r>
           </a:p>
         </p:txBody>
@@ -23452,7 +23620,7 @@
                 </a:solidFill>
                 <a:latin typeface="Inter"/>
               </a:rPr>
-              <a:t>Land the plane: what's left, and the one-screen summary.</a:t>
+              <a:t>Done: de-risking spikes; all six pure leaf engines (sortkey, query, update, expressions, projection, diff) plus collation; and the whole storage-independent aggregation pipeline — match, project, group, sort, unwind, bucket, facet, densify and the rest. 515 parity cases green across curated corpora and multi-seed fuzzing. Still in Python because they need storage: $lookup, $geoNear, $out, $merge, and storage itself.</a:t>
             </a:r>
           </a:p>
         </p:txBody>
@@ -23692,7 +23860,7 @@
                 </a:solidFill>
                 <a:latin typeface="Inter"/>
               </a:rPr>
-              <a:t>Notes — What's next</a:t>
+              <a:t>Notes — Performance</a:t>
             </a:r>
           </a:p>
         </p:txBody>
@@ -23727,7 +23895,7 @@
                 </a:solidFill>
                 <a:latin typeface="Inter"/>
               </a:rPr>
-              <a:t>slide 26 of 28</a:t>
+              <a:t>slide 25 of 29</a:t>
             </a:r>
           </a:p>
         </p:txBody>
@@ -23766,7 +23934,7 @@
                 </a:solidFill>
                 <a:latin typeface="Inter"/>
               </a:rPr>
-              <a:t>Next: wire the batched seam into storage's scan / update / projection loops; port the storage layer onto a WiredTiger FFI (the largest single step, sub-phased by table family); then move wire and dispatch into Rust so a request never re-enters Python; finish with packaging and a full conformance and performance sign-off. The invariant throughout: the compatibility number must not regress.</a:t>
+              <a:t>Single-threaded the Rust path is ~2× faster on CRUD ops and ~8× on a full pipeline — even paying the byte seam. But per-call across threads the GIL ping-pongs on tiny ops and throughput regresses. The fix is batching: one call filters or updates a whole list under a single GIL release, turning the regression into ~10–12× more throughput on four threads. Lesson: the win is releasing the GIL and coarsening the seam, not micro-optimising operators. Numbers from a 4-core dev box; the real proof is a concurrent-connection server benchmark.</a:t>
             </a:r>
           </a:p>
         </p:txBody>
@@ -24006,7 +24174,7 @@
                 </a:solidFill>
                 <a:latin typeface="Inter"/>
               </a:rPr>
-              <a:t>Notes — Takeaways</a:t>
+              <a:t>Notes — Roadmap &amp; takeaways</a:t>
             </a:r>
           </a:p>
         </p:txBody>
@@ -24041,7 +24209,7 @@
                 </a:solidFill>
                 <a:latin typeface="Inter"/>
               </a:rPr>
-              <a:t>slide 27 of 28</a:t>
+              <a:t>slide 26 of 29</a:t>
             </a:r>
           </a:p>
         </p:txBody>
@@ -24080,7 +24248,7 @@
                 </a:solidFill>
                 <a:latin typeface="Inter"/>
               </a:rPr>
-              <a:t>To close: SecantusDB is an embeddable, in-process MongoDB-compatible server — the SQLite of document databases — useful far beyond testing. Fidelity comes from opaque BSON plus real WiredTiger plus the driver as conformance target; honesty from five gauges and load-bearing CI. The Rust core adds speed without giving up Python — both ship, parity-pinned. And the performance lesson generalises: release the GIL and batch the boundary.</a:t>
+              <a:t>Land the plane: what's left, and the one-screen summary.</a:t>
             </a:r>
           </a:p>
         </p:txBody>
@@ -24320,7 +24488,7 @@
                 </a:solidFill>
                 <a:latin typeface="Inter"/>
               </a:rPr>
-              <a:t>Notes — Thank you</a:t>
+              <a:t>Notes — What's next</a:t>
             </a:r>
           </a:p>
         </p:txBody>
@@ -24355,7 +24523,635 @@
                 </a:solidFill>
                 <a:latin typeface="Inter"/>
               </a:rPr>
-              <a:t>slide 28 of 28</a:t>
+              <a:t>slide 27 of 29</a:t>
+            </a:r>
+          </a:p>
+        </p:txBody>
+      </p:sp>
+      <p:sp>
+        <p:nvSpPr>
+          <p:cNvPr id="7" name="TextBox 6"/>
+          <p:cNvSpPr txBox="1"/>
+          <p:nvPr/>
+        </p:nvSpPr>
+        <p:spPr>
+          <a:xfrm>
+            <a:off x="777240" y="1463040"/>
+            <a:ext cx="10607040" cy="4572000"/>
+          </a:xfrm>
+          <a:prstGeom prst="rect">
+            <a:avLst/>
+          </a:prstGeom>
+          <a:noFill/>
+        </p:spPr>
+        <p:txBody>
+          <a:bodyPr wrap="square">
+            <a:spAutoFit/>
+          </a:bodyPr>
+          <a:lstStyle/>
+          <a:p>
+            <a:pPr>
+              <a:lnSpc>
+                <a:spcPct val="130000"/>
+              </a:lnSpc>
+            </a:pPr>
+            <a:r>
+              <a:rPr sz="1800">
+                <a:solidFill>
+                  <a:srgbClr val="0F172A"/>
+                </a:solidFill>
+                <a:latin typeface="Inter"/>
+              </a:rPr>
+              <a:t>Next: wire the batched seam into storage's scan / update / projection loops; port the storage layer onto a WiredTiger FFI (the largest single step, sub-phased by table family); then move wire and dispatch into Rust so a request never re-enters Python; finish with packaging and a full conformance and performance sign-off. The invariant throughout: the compatibility number must not regress.</a:t>
+            </a:r>
+          </a:p>
+        </p:txBody>
+      </p:sp>
+      <p:sp>
+        <p:nvSpPr>
+          <p:cNvPr id="8" name="Rounded Rectangle 7">
+            <a:hlinkClick action="ppaction://hlinksldjump" r:id="rId2"/>
+          </p:cNvPr>
+          <p:cNvSpPr/>
+          <p:nvPr/>
+        </p:nvSpPr>
+        <p:spPr>
+          <a:xfrm>
+            <a:off x="777240" y="6263640"/>
+            <a:ext cx="2011680" cy="384048"/>
+          </a:xfrm>
+          <a:prstGeom prst="roundRect">
+            <a:avLst/>
+          </a:prstGeom>
+          <a:solidFill>
+            <a:srgbClr val="06B6D4"/>
+          </a:solidFill>
+          <a:ln>
+            <a:noFill/>
+          </a:ln>
+          <a:effectLst/>
+        </p:spPr>
+        <p:style>
+          <a:lnRef idx="1">
+            <a:schemeClr val="accent1"/>
+          </a:lnRef>
+          <a:fillRef idx="3">
+            <a:schemeClr val="accent1"/>
+          </a:fillRef>
+          <a:effectRef idx="2">
+            <a:schemeClr val="accent1"/>
+          </a:effectRef>
+          <a:fontRef idx="minor">
+            <a:schemeClr val="lt1"/>
+          </a:fontRef>
+        </p:style>
+        <p:txBody>
+          <a:bodyPr rtlCol="0" anchor="ctr" wrap="square"/>
+          <a:lstStyle/>
+          <a:p>
+            <a:pPr algn="ctr"/>
+            <a:r>
+              <a:rPr sz="1100" b="1" i="0">
+                <a:solidFill>
+                  <a:srgbClr val="FFFFFF"/>
+                </a:solidFill>
+                <a:latin typeface="Inter"/>
+              </a:rPr>
+              <a:t>◂  Back to slide</a:t>
+            </a:r>
+          </a:p>
+        </p:txBody>
+      </p:sp>
+    </p:spTree>
+  </p:cSld>
+  <p:clrMapOvr>
+    <a:masterClrMapping/>
+  </p:clrMapOvr>
+</p:sld>
+</file>
+
+<file path=ppt/slides/slide58.xml><?xml version="1.0" encoding="utf-8"?>
+<p:sld xmlns:a="http://schemas.openxmlformats.org/drawingml/2006/main" xmlns:p="http://schemas.openxmlformats.org/presentationml/2006/main" xmlns:r="http://schemas.openxmlformats.org/officeDocument/2006/relationships">
+  <p:cSld>
+    <p:spTree>
+      <p:nvGrpSpPr>
+        <p:cNvPr id="1" name=""/>
+        <p:cNvGrpSpPr/>
+        <p:nvPr/>
+      </p:nvGrpSpPr>
+      <p:grpSpPr/>
+      <p:sp>
+        <p:nvSpPr>
+          <p:cNvPr id="2" name="Rectangle 1"/>
+          <p:cNvSpPr/>
+          <p:nvPr/>
+        </p:nvSpPr>
+        <p:spPr>
+          <a:xfrm>
+            <a:off x="0" y="0"/>
+            <a:ext cx="12191695" cy="6858000"/>
+          </a:xfrm>
+          <a:prstGeom prst="rect">
+            <a:avLst/>
+          </a:prstGeom>
+          <a:solidFill>
+            <a:srgbClr val="F8FAFC"/>
+          </a:solidFill>
+          <a:ln>
+            <a:noFill/>
+          </a:ln>
+          <a:effectLst/>
+        </p:spPr>
+        <p:style>
+          <a:lnRef idx="1">
+            <a:schemeClr val="accent1"/>
+          </a:lnRef>
+          <a:fillRef idx="3">
+            <a:schemeClr val="accent1"/>
+          </a:fillRef>
+          <a:effectRef idx="2">
+            <a:schemeClr val="accent1"/>
+          </a:effectRef>
+          <a:fontRef idx="minor">
+            <a:schemeClr val="lt1"/>
+          </a:fontRef>
+        </p:style>
+        <p:txBody>
+          <a:bodyPr rtlCol="0" anchor="ctr"/>
+          <a:lstStyle/>
+          <a:p>
+            <a:pPr algn="ctr"/>
+          </a:p>
+        </p:txBody>
+      </p:sp>
+      <p:sp>
+        <p:nvSpPr>
+          <p:cNvPr id="3" name="Rectangle 2"/>
+          <p:cNvSpPr/>
+          <p:nvPr/>
+        </p:nvSpPr>
+        <p:spPr>
+          <a:xfrm>
+            <a:off x="0" y="0"/>
+            <a:ext cx="12191695" cy="1024128"/>
+          </a:xfrm>
+          <a:prstGeom prst="rect">
+            <a:avLst/>
+          </a:prstGeom>
+          <a:solidFill>
+            <a:srgbClr val="0F172A"/>
+          </a:solidFill>
+          <a:ln>
+            <a:noFill/>
+          </a:ln>
+          <a:effectLst/>
+        </p:spPr>
+        <p:style>
+          <a:lnRef idx="1">
+            <a:schemeClr val="accent1"/>
+          </a:lnRef>
+          <a:fillRef idx="3">
+            <a:schemeClr val="accent1"/>
+          </a:fillRef>
+          <a:effectRef idx="2">
+            <a:schemeClr val="accent1"/>
+          </a:effectRef>
+          <a:fontRef idx="minor">
+            <a:schemeClr val="lt1"/>
+          </a:fontRef>
+        </p:style>
+        <p:txBody>
+          <a:bodyPr rtlCol="0" anchor="ctr"/>
+          <a:lstStyle/>
+          <a:p>
+            <a:pPr algn="ctr"/>
+          </a:p>
+        </p:txBody>
+      </p:sp>
+      <p:sp>
+        <p:nvSpPr>
+          <p:cNvPr id="4" name="Rectangle 3"/>
+          <p:cNvSpPr/>
+          <p:nvPr/>
+        </p:nvSpPr>
+        <p:spPr>
+          <a:xfrm>
+            <a:off x="0" y="1024128"/>
+            <a:ext cx="12191695" cy="50800"/>
+          </a:xfrm>
+          <a:prstGeom prst="rect">
+            <a:avLst/>
+          </a:prstGeom>
+          <a:solidFill>
+            <a:srgbClr val="22D3EE"/>
+          </a:solidFill>
+          <a:ln>
+            <a:noFill/>
+          </a:ln>
+          <a:effectLst/>
+        </p:spPr>
+        <p:style>
+          <a:lnRef idx="1">
+            <a:schemeClr val="accent1"/>
+          </a:lnRef>
+          <a:fillRef idx="3">
+            <a:schemeClr val="accent1"/>
+          </a:fillRef>
+          <a:effectRef idx="2">
+            <a:schemeClr val="accent1"/>
+          </a:effectRef>
+          <a:fontRef idx="minor">
+            <a:schemeClr val="lt1"/>
+          </a:fontRef>
+        </p:style>
+        <p:txBody>
+          <a:bodyPr rtlCol="0" anchor="ctr"/>
+          <a:lstStyle/>
+          <a:p>
+            <a:pPr algn="ctr"/>
+          </a:p>
+        </p:txBody>
+      </p:sp>
+      <p:sp>
+        <p:nvSpPr>
+          <p:cNvPr id="5" name="TextBox 4"/>
+          <p:cNvSpPr txBox="1"/>
+          <p:nvPr/>
+        </p:nvSpPr>
+        <p:spPr>
+          <a:xfrm>
+            <a:off x="548640" y="146304"/>
+            <a:ext cx="9601200" cy="731520"/>
+          </a:xfrm>
+          <a:prstGeom prst="rect">
+            <a:avLst/>
+          </a:prstGeom>
+          <a:noFill/>
+        </p:spPr>
+        <p:txBody>
+          <a:bodyPr wrap="square">
+            <a:spAutoFit/>
+          </a:bodyPr>
+          <a:lstStyle/>
+          <a:p>
+            <a:pPr algn="l"/>
+            <a:r>
+              <a:rPr sz="2600" b="1" i="0">
+                <a:solidFill>
+                  <a:srgbClr val="FFFFFF"/>
+                </a:solidFill>
+                <a:latin typeface="Inter"/>
+              </a:rPr>
+              <a:t>Notes — Takeaways</a:t>
+            </a:r>
+          </a:p>
+        </p:txBody>
+      </p:sp>
+      <p:sp>
+        <p:nvSpPr>
+          <p:cNvPr id="6" name="TextBox 5"/>
+          <p:cNvSpPr txBox="1"/>
+          <p:nvPr/>
+        </p:nvSpPr>
+        <p:spPr>
+          <a:xfrm>
+            <a:off x="576072" y="749808"/>
+            <a:ext cx="9144000" cy="274320"/>
+          </a:xfrm>
+          <a:prstGeom prst="rect">
+            <a:avLst/>
+          </a:prstGeom>
+          <a:noFill/>
+        </p:spPr>
+        <p:txBody>
+          <a:bodyPr wrap="square">
+            <a:spAutoFit/>
+          </a:bodyPr>
+          <a:lstStyle/>
+          <a:p>
+            <a:pPr algn="l"/>
+            <a:r>
+              <a:rPr sz="1200" b="0" i="0">
+                <a:solidFill>
+                  <a:srgbClr val="22D3EE"/>
+                </a:solidFill>
+                <a:latin typeface="Inter"/>
+              </a:rPr>
+              <a:t>slide 28 of 29</a:t>
+            </a:r>
+          </a:p>
+        </p:txBody>
+      </p:sp>
+      <p:sp>
+        <p:nvSpPr>
+          <p:cNvPr id="7" name="TextBox 6"/>
+          <p:cNvSpPr txBox="1"/>
+          <p:nvPr/>
+        </p:nvSpPr>
+        <p:spPr>
+          <a:xfrm>
+            <a:off x="777240" y="1463040"/>
+            <a:ext cx="10607040" cy="4572000"/>
+          </a:xfrm>
+          <a:prstGeom prst="rect">
+            <a:avLst/>
+          </a:prstGeom>
+          <a:noFill/>
+        </p:spPr>
+        <p:txBody>
+          <a:bodyPr wrap="square">
+            <a:spAutoFit/>
+          </a:bodyPr>
+          <a:lstStyle/>
+          <a:p>
+            <a:pPr>
+              <a:lnSpc>
+                <a:spcPct val="130000"/>
+              </a:lnSpc>
+            </a:pPr>
+            <a:r>
+              <a:rPr sz="1800">
+                <a:solidFill>
+                  <a:srgbClr val="0F172A"/>
+                </a:solidFill>
+                <a:latin typeface="Inter"/>
+              </a:rPr>
+              <a:t>To close: SecantusDB is a MongoDB-compatible server — the SQLite of document databases — that you embed in-process OR run standalone, useful far beyond testing. Because it's a faithful wire-protocol server, Compass, mongosh and mongodump/mongorestore all just work. Fidelity comes from opaque BSON plus real WiredTiger plus the driver as conformance target; honesty from five gauges and load-bearing CI. The Rust core adds speed without giving up Python — both ship, parity-pinned. And the performance lesson generalises: release the GIL and batch the boundary.</a:t>
+            </a:r>
+          </a:p>
+        </p:txBody>
+      </p:sp>
+      <p:sp>
+        <p:nvSpPr>
+          <p:cNvPr id="8" name="Rounded Rectangle 7">
+            <a:hlinkClick action="ppaction://hlinksldjump" r:id="rId2"/>
+          </p:cNvPr>
+          <p:cNvSpPr/>
+          <p:nvPr/>
+        </p:nvSpPr>
+        <p:spPr>
+          <a:xfrm>
+            <a:off x="777240" y="6263640"/>
+            <a:ext cx="2011680" cy="384048"/>
+          </a:xfrm>
+          <a:prstGeom prst="roundRect">
+            <a:avLst/>
+          </a:prstGeom>
+          <a:solidFill>
+            <a:srgbClr val="06B6D4"/>
+          </a:solidFill>
+          <a:ln>
+            <a:noFill/>
+          </a:ln>
+          <a:effectLst/>
+        </p:spPr>
+        <p:style>
+          <a:lnRef idx="1">
+            <a:schemeClr val="accent1"/>
+          </a:lnRef>
+          <a:fillRef idx="3">
+            <a:schemeClr val="accent1"/>
+          </a:fillRef>
+          <a:effectRef idx="2">
+            <a:schemeClr val="accent1"/>
+          </a:effectRef>
+          <a:fontRef idx="minor">
+            <a:schemeClr val="lt1"/>
+          </a:fontRef>
+        </p:style>
+        <p:txBody>
+          <a:bodyPr rtlCol="0" anchor="ctr" wrap="square"/>
+          <a:lstStyle/>
+          <a:p>
+            <a:pPr algn="ctr"/>
+            <a:r>
+              <a:rPr sz="1100" b="1" i="0">
+                <a:solidFill>
+                  <a:srgbClr val="FFFFFF"/>
+                </a:solidFill>
+                <a:latin typeface="Inter"/>
+              </a:rPr>
+              <a:t>◂  Back to slide</a:t>
+            </a:r>
+          </a:p>
+        </p:txBody>
+      </p:sp>
+    </p:spTree>
+  </p:cSld>
+  <p:clrMapOvr>
+    <a:masterClrMapping/>
+  </p:clrMapOvr>
+</p:sld>
+</file>
+
+<file path=ppt/slides/slide59.xml><?xml version="1.0" encoding="utf-8"?>
+<p:sld xmlns:a="http://schemas.openxmlformats.org/drawingml/2006/main" xmlns:p="http://schemas.openxmlformats.org/presentationml/2006/main" xmlns:r="http://schemas.openxmlformats.org/officeDocument/2006/relationships">
+  <p:cSld>
+    <p:spTree>
+      <p:nvGrpSpPr>
+        <p:cNvPr id="1" name=""/>
+        <p:cNvGrpSpPr/>
+        <p:nvPr/>
+      </p:nvGrpSpPr>
+      <p:grpSpPr/>
+      <p:sp>
+        <p:nvSpPr>
+          <p:cNvPr id="2" name="Rectangle 1"/>
+          <p:cNvSpPr/>
+          <p:nvPr/>
+        </p:nvSpPr>
+        <p:spPr>
+          <a:xfrm>
+            <a:off x="0" y="0"/>
+            <a:ext cx="12191695" cy="6858000"/>
+          </a:xfrm>
+          <a:prstGeom prst="rect">
+            <a:avLst/>
+          </a:prstGeom>
+          <a:solidFill>
+            <a:srgbClr val="F8FAFC"/>
+          </a:solidFill>
+          <a:ln>
+            <a:noFill/>
+          </a:ln>
+          <a:effectLst/>
+        </p:spPr>
+        <p:style>
+          <a:lnRef idx="1">
+            <a:schemeClr val="accent1"/>
+          </a:lnRef>
+          <a:fillRef idx="3">
+            <a:schemeClr val="accent1"/>
+          </a:fillRef>
+          <a:effectRef idx="2">
+            <a:schemeClr val="accent1"/>
+          </a:effectRef>
+          <a:fontRef idx="minor">
+            <a:schemeClr val="lt1"/>
+          </a:fontRef>
+        </p:style>
+        <p:txBody>
+          <a:bodyPr rtlCol="0" anchor="ctr"/>
+          <a:lstStyle/>
+          <a:p>
+            <a:pPr algn="ctr"/>
+          </a:p>
+        </p:txBody>
+      </p:sp>
+      <p:sp>
+        <p:nvSpPr>
+          <p:cNvPr id="3" name="Rectangle 2"/>
+          <p:cNvSpPr/>
+          <p:nvPr/>
+        </p:nvSpPr>
+        <p:spPr>
+          <a:xfrm>
+            <a:off x="0" y="0"/>
+            <a:ext cx="12191695" cy="1024128"/>
+          </a:xfrm>
+          <a:prstGeom prst="rect">
+            <a:avLst/>
+          </a:prstGeom>
+          <a:solidFill>
+            <a:srgbClr val="0F172A"/>
+          </a:solidFill>
+          <a:ln>
+            <a:noFill/>
+          </a:ln>
+          <a:effectLst/>
+        </p:spPr>
+        <p:style>
+          <a:lnRef idx="1">
+            <a:schemeClr val="accent1"/>
+          </a:lnRef>
+          <a:fillRef idx="3">
+            <a:schemeClr val="accent1"/>
+          </a:fillRef>
+          <a:effectRef idx="2">
+            <a:schemeClr val="accent1"/>
+          </a:effectRef>
+          <a:fontRef idx="minor">
+            <a:schemeClr val="lt1"/>
+          </a:fontRef>
+        </p:style>
+        <p:txBody>
+          <a:bodyPr rtlCol="0" anchor="ctr"/>
+          <a:lstStyle/>
+          <a:p>
+            <a:pPr algn="ctr"/>
+          </a:p>
+        </p:txBody>
+      </p:sp>
+      <p:sp>
+        <p:nvSpPr>
+          <p:cNvPr id="4" name="Rectangle 3"/>
+          <p:cNvSpPr/>
+          <p:nvPr/>
+        </p:nvSpPr>
+        <p:spPr>
+          <a:xfrm>
+            <a:off x="0" y="1024128"/>
+            <a:ext cx="12191695" cy="50800"/>
+          </a:xfrm>
+          <a:prstGeom prst="rect">
+            <a:avLst/>
+          </a:prstGeom>
+          <a:solidFill>
+            <a:srgbClr val="22D3EE"/>
+          </a:solidFill>
+          <a:ln>
+            <a:noFill/>
+          </a:ln>
+          <a:effectLst/>
+        </p:spPr>
+        <p:style>
+          <a:lnRef idx="1">
+            <a:schemeClr val="accent1"/>
+          </a:lnRef>
+          <a:fillRef idx="3">
+            <a:schemeClr val="accent1"/>
+          </a:fillRef>
+          <a:effectRef idx="2">
+            <a:schemeClr val="accent1"/>
+          </a:effectRef>
+          <a:fontRef idx="minor">
+            <a:schemeClr val="lt1"/>
+          </a:fontRef>
+        </p:style>
+        <p:txBody>
+          <a:bodyPr rtlCol="0" anchor="ctr"/>
+          <a:lstStyle/>
+          <a:p>
+            <a:pPr algn="ctr"/>
+          </a:p>
+        </p:txBody>
+      </p:sp>
+      <p:sp>
+        <p:nvSpPr>
+          <p:cNvPr id="5" name="TextBox 4"/>
+          <p:cNvSpPr txBox="1"/>
+          <p:nvPr/>
+        </p:nvSpPr>
+        <p:spPr>
+          <a:xfrm>
+            <a:off x="548640" y="146304"/>
+            <a:ext cx="9601200" cy="731520"/>
+          </a:xfrm>
+          <a:prstGeom prst="rect">
+            <a:avLst/>
+          </a:prstGeom>
+          <a:noFill/>
+        </p:spPr>
+        <p:txBody>
+          <a:bodyPr wrap="square">
+            <a:spAutoFit/>
+          </a:bodyPr>
+          <a:lstStyle/>
+          <a:p>
+            <a:pPr algn="l"/>
+            <a:r>
+              <a:rPr sz="2600" b="1" i="0">
+                <a:solidFill>
+                  <a:srgbClr val="FFFFFF"/>
+                </a:solidFill>
+                <a:latin typeface="Inter"/>
+              </a:rPr>
+              <a:t>Notes — Thank you</a:t>
+            </a:r>
+          </a:p>
+        </p:txBody>
+      </p:sp>
+      <p:sp>
+        <p:nvSpPr>
+          <p:cNvPr id="6" name="TextBox 5"/>
+          <p:cNvSpPr txBox="1"/>
+          <p:nvPr/>
+        </p:nvSpPr>
+        <p:spPr>
+          <a:xfrm>
+            <a:off x="576072" y="749808"/>
+            <a:ext cx="9144000" cy="274320"/>
+          </a:xfrm>
+          <a:prstGeom prst="rect">
+            <a:avLst/>
+          </a:prstGeom>
+          <a:noFill/>
+        </p:spPr>
+        <p:txBody>
+          <a:bodyPr wrap="square">
+            <a:spAutoFit/>
+          </a:bodyPr>
+          <a:lstStyle/>
+          <a:p>
+            <a:pPr algn="l"/>
+            <a:r>
+              <a:rPr sz="1200" b="0" i="0">
+                <a:solidFill>
+                  <a:srgbClr val="22D3EE"/>
+                </a:solidFill>
+                <a:latin typeface="Inter"/>
+              </a:rPr>
+              <a:t>slide 29 of 29</a:t>
             </a:r>
           </a:p>
         </p:txBody>
@@ -24939,7 +25735,7 @@
                 </a:solidFill>
                 <a:latin typeface="Inter"/>
               </a:rPr>
-              <a:t>A quick word on the name</a:t>
+              <a:t>Standalone — and the toolchain just works</a:t>
             </a:r>
           </a:p>
         </p:txBody>
@@ -24974,538 +25770,45 @@
                 </a:solidFill>
                 <a:latin typeface="Inter"/>
               </a:rPr>
-              <a:t>fongo → fongodb → SecantusDB</a:t>
-            </a:r>
-          </a:p>
-        </p:txBody>
-      </p:sp>
-      <p:sp>
-        <p:nvSpPr>
-          <p:cNvPr id="7" name="Rectangle 6"/>
-          <p:cNvSpPr/>
-          <p:nvPr/>
-        </p:nvSpPr>
-        <p:spPr>
-          <a:xfrm>
-            <a:off x="640080" y="2103120"/>
-            <a:ext cx="3383280" cy="2286000"/>
-          </a:xfrm>
-          <a:prstGeom prst="rect">
-            <a:avLst/>
-          </a:prstGeom>
-          <a:solidFill>
-            <a:srgbClr val="FFFFFF"/>
-          </a:solidFill>
-          <a:ln w="12700">
-            <a:solidFill>
-              <a:srgbClr val="CBD5E1"/>
-            </a:solidFill>
-          </a:ln>
-          <a:effectLst/>
-        </p:spPr>
-        <p:style>
-          <a:lnRef idx="1">
-            <a:schemeClr val="accent1"/>
-          </a:lnRef>
-          <a:fillRef idx="3">
-            <a:schemeClr val="accent1"/>
-          </a:fillRef>
-          <a:effectRef idx="2">
-            <a:schemeClr val="accent1"/>
-          </a:effectRef>
-          <a:fontRef idx="minor">
-            <a:schemeClr val="lt1"/>
-          </a:fontRef>
-        </p:style>
-        <p:txBody>
-          <a:bodyPr rtlCol="0" anchor="ctr"/>
-          <a:lstStyle/>
-          <a:p>
-            <a:pPr algn="ctr"/>
-          </a:p>
-        </p:txBody>
-      </p:sp>
-      <p:sp>
-        <p:nvSpPr>
-          <p:cNvPr id="8" name="TextBox 7"/>
-          <p:cNvSpPr txBox="1"/>
-          <p:nvPr/>
-        </p:nvSpPr>
-        <p:spPr>
-          <a:xfrm>
-            <a:off x="640080" y="2331720"/>
-            <a:ext cx="3383280" cy="640080"/>
-          </a:xfrm>
-          <a:prstGeom prst="rect">
-            <a:avLst/>
-          </a:prstGeom>
-          <a:noFill/>
-        </p:spPr>
-        <p:txBody>
-          <a:bodyPr wrap="square">
-            <a:spAutoFit/>
-          </a:bodyPr>
-          <a:lstStyle/>
-          <a:p>
-            <a:pPr algn="ctr"/>
-            <a:r>
-              <a:rPr sz="2600" b="1" i="0">
-                <a:solidFill>
-                  <a:srgbClr val="0E7490"/>
-                </a:solidFill>
-                <a:latin typeface="Inter"/>
-              </a:rPr>
-              <a:t>fongo</a:t>
-            </a:r>
-          </a:p>
-        </p:txBody>
-      </p:sp>
-      <p:sp>
-        <p:nvSpPr>
-          <p:cNvPr id="9" name="TextBox 8"/>
-          <p:cNvSpPr txBox="1"/>
-          <p:nvPr/>
-        </p:nvSpPr>
-        <p:spPr>
-          <a:xfrm>
-            <a:off x="640080" y="3017520"/>
-            <a:ext cx="3383280" cy="365760"/>
-          </a:xfrm>
-          <a:prstGeom prst="rect">
-            <a:avLst/>
-          </a:prstGeom>
-          <a:noFill/>
-        </p:spPr>
-        <p:txBody>
-          <a:bodyPr wrap="square">
-            <a:spAutoFit/>
-          </a:bodyPr>
-          <a:lstStyle/>
-          <a:p>
-            <a:pPr algn="ctr"/>
-            <a:r>
-              <a:rPr sz="1300" b="1" i="0">
-                <a:solidFill>
-                  <a:srgbClr val="22D3EE"/>
-                </a:solidFill>
-                <a:latin typeface="Inter"/>
-              </a:rPr>
-              <a:t>early prototype</a:t>
-            </a:r>
-          </a:p>
-        </p:txBody>
-      </p:sp>
-      <p:sp>
-        <p:nvSpPr>
-          <p:cNvPr id="10" name="TextBox 9"/>
-          <p:cNvSpPr txBox="1"/>
-          <p:nvPr/>
-        </p:nvSpPr>
-        <p:spPr>
-          <a:xfrm>
-            <a:off x="914400" y="3474720"/>
-            <a:ext cx="2834640" cy="822960"/>
-          </a:xfrm>
-          <a:prstGeom prst="rect">
-            <a:avLst/>
-          </a:prstGeom>
-          <a:noFill/>
-        </p:spPr>
-        <p:txBody>
-          <a:bodyPr wrap="square">
-            <a:spAutoFit/>
-          </a:bodyPr>
-          <a:lstStyle/>
-          <a:p>
-            <a:pPr algn="ctr"/>
-            <a:r>
-              <a:rPr sz="1400" b="0" i="0">
-                <a:solidFill>
-                  <a:srgbClr val="64748B"/>
-                </a:solidFill>
-                <a:latin typeface="Inter"/>
-              </a:rPr>
-              <a:t>clashes with the “Fongo” brand</a:t>
-            </a:r>
-          </a:p>
-        </p:txBody>
-      </p:sp>
-      <p:sp>
-        <p:nvSpPr>
-          <p:cNvPr id="11" name="TextBox 10"/>
-          <p:cNvSpPr txBox="1"/>
-          <p:nvPr/>
-        </p:nvSpPr>
-        <p:spPr>
-          <a:xfrm>
-            <a:off x="3886200" y="2926080"/>
-            <a:ext cx="640080" cy="548640"/>
-          </a:xfrm>
-          <a:prstGeom prst="rect">
-            <a:avLst/>
-          </a:prstGeom>
-          <a:noFill/>
-        </p:spPr>
-        <p:txBody>
-          <a:bodyPr wrap="square">
-            <a:spAutoFit/>
-          </a:bodyPr>
-          <a:lstStyle/>
-          <a:p>
-            <a:pPr algn="ctr"/>
-            <a:r>
-              <a:rPr sz="3000" b="1" i="0">
-                <a:solidFill>
-                  <a:srgbClr val="CBD5E1"/>
-                </a:solidFill>
-                <a:latin typeface="Inter"/>
-              </a:rPr>
-              <a:t>→</a:t>
-            </a:r>
-          </a:p>
-        </p:txBody>
-      </p:sp>
-      <p:sp>
-        <p:nvSpPr>
-          <p:cNvPr id="12" name="Rectangle 11"/>
-          <p:cNvSpPr/>
-          <p:nvPr/>
-        </p:nvSpPr>
-        <p:spPr>
-          <a:xfrm>
-            <a:off x="4434840" y="2103120"/>
-            <a:ext cx="3383280" cy="2286000"/>
-          </a:xfrm>
-          <a:prstGeom prst="rect">
-            <a:avLst/>
-          </a:prstGeom>
-          <a:solidFill>
-            <a:srgbClr val="FFFFFF"/>
-          </a:solidFill>
-          <a:ln w="12700">
-            <a:solidFill>
-              <a:srgbClr val="CBD5E1"/>
-            </a:solidFill>
-          </a:ln>
-          <a:effectLst/>
-        </p:spPr>
-        <p:style>
-          <a:lnRef idx="1">
-            <a:schemeClr val="accent1"/>
-          </a:lnRef>
-          <a:fillRef idx="3">
-            <a:schemeClr val="accent1"/>
-          </a:fillRef>
-          <a:effectRef idx="2">
-            <a:schemeClr val="accent1"/>
-          </a:effectRef>
-          <a:fontRef idx="minor">
-            <a:schemeClr val="lt1"/>
-          </a:fontRef>
-        </p:style>
-        <p:txBody>
-          <a:bodyPr rtlCol="0" anchor="ctr"/>
-          <a:lstStyle/>
-          <a:p>
-            <a:pPr algn="ctr"/>
-          </a:p>
-        </p:txBody>
-      </p:sp>
-      <p:sp>
-        <p:nvSpPr>
-          <p:cNvPr id="13" name="TextBox 12"/>
-          <p:cNvSpPr txBox="1"/>
-          <p:nvPr/>
-        </p:nvSpPr>
-        <p:spPr>
-          <a:xfrm>
-            <a:off x="4434840" y="2331720"/>
-            <a:ext cx="3383280" cy="640080"/>
-          </a:xfrm>
-          <a:prstGeom prst="rect">
-            <a:avLst/>
-          </a:prstGeom>
-          <a:noFill/>
-        </p:spPr>
-        <p:txBody>
-          <a:bodyPr wrap="square">
-            <a:spAutoFit/>
-          </a:bodyPr>
-          <a:lstStyle/>
-          <a:p>
-            <a:pPr algn="ctr"/>
-            <a:r>
-              <a:rPr sz="2600" b="1" i="0">
-                <a:solidFill>
-                  <a:srgbClr val="0E7490"/>
-                </a:solidFill>
-                <a:latin typeface="Inter"/>
-              </a:rPr>
-              <a:t>fongodb</a:t>
-            </a:r>
-          </a:p>
-        </p:txBody>
-      </p:sp>
-      <p:sp>
-        <p:nvSpPr>
-          <p:cNvPr id="14" name="TextBox 13"/>
-          <p:cNvSpPr txBox="1"/>
-          <p:nvPr/>
-        </p:nvSpPr>
-        <p:spPr>
-          <a:xfrm>
-            <a:off x="4434840" y="3017520"/>
-            <a:ext cx="3383280" cy="365760"/>
-          </a:xfrm>
-          <a:prstGeom prst="rect">
-            <a:avLst/>
-          </a:prstGeom>
-          <a:noFill/>
-        </p:spPr>
-        <p:txBody>
-          <a:bodyPr wrap="square">
-            <a:spAutoFit/>
-          </a:bodyPr>
-          <a:lstStyle/>
-          <a:p>
-            <a:pPr algn="ctr"/>
-            <a:r>
-              <a:rPr sz="1300" b="1" i="0">
-                <a:solidFill>
-                  <a:srgbClr val="22D3EE"/>
-                </a:solidFill>
-                <a:latin typeface="Inter"/>
-              </a:rPr>
-              <a:t>follow-on</a:t>
-            </a:r>
-          </a:p>
-        </p:txBody>
-      </p:sp>
-      <p:sp>
-        <p:nvSpPr>
-          <p:cNvPr id="15" name="TextBox 14"/>
-          <p:cNvSpPr txBox="1"/>
-          <p:nvPr/>
-        </p:nvSpPr>
-        <p:spPr>
-          <a:xfrm>
-            <a:off x="4709160" y="3474720"/>
-            <a:ext cx="2834640" cy="822960"/>
-          </a:xfrm>
-          <a:prstGeom prst="rect">
-            <a:avLst/>
-          </a:prstGeom>
-          <a:noFill/>
-        </p:spPr>
-        <p:txBody>
-          <a:bodyPr wrap="square">
-            <a:spAutoFit/>
-          </a:bodyPr>
-          <a:lstStyle/>
-          <a:p>
-            <a:pPr algn="ctr"/>
-            <a:r>
-              <a:rPr sz="1400" b="0" i="0">
-                <a:solidFill>
-                  <a:srgbClr val="64748B"/>
-                </a:solidFill>
-                <a:latin typeface="Inter"/>
-              </a:rPr>
-              <a:t>still brand-adjacent / confusing</a:t>
-            </a:r>
-          </a:p>
-        </p:txBody>
-      </p:sp>
-      <p:sp>
-        <p:nvSpPr>
-          <p:cNvPr id="16" name="TextBox 15"/>
-          <p:cNvSpPr txBox="1"/>
-          <p:nvPr/>
-        </p:nvSpPr>
-        <p:spPr>
-          <a:xfrm>
-            <a:off x="7680960" y="2926080"/>
-            <a:ext cx="640080" cy="548640"/>
-          </a:xfrm>
-          <a:prstGeom prst="rect">
-            <a:avLst/>
-          </a:prstGeom>
-          <a:noFill/>
-        </p:spPr>
-        <p:txBody>
-          <a:bodyPr wrap="square">
-            <a:spAutoFit/>
-          </a:bodyPr>
-          <a:lstStyle/>
-          <a:p>
-            <a:pPr algn="ctr"/>
-            <a:r>
-              <a:rPr sz="3000" b="1" i="0">
-                <a:solidFill>
-                  <a:srgbClr val="CBD5E1"/>
-                </a:solidFill>
-                <a:latin typeface="Inter"/>
-              </a:rPr>
-              <a:t>→</a:t>
-            </a:r>
-          </a:p>
-        </p:txBody>
-      </p:sp>
-      <p:sp>
-        <p:nvSpPr>
-          <p:cNvPr id="17" name="Rectangle 16"/>
-          <p:cNvSpPr/>
-          <p:nvPr/>
-        </p:nvSpPr>
-        <p:spPr>
-          <a:xfrm>
-            <a:off x="8229600" y="2103120"/>
-            <a:ext cx="3383280" cy="2286000"/>
-          </a:xfrm>
-          <a:prstGeom prst="rect">
-            <a:avLst/>
-          </a:prstGeom>
-          <a:solidFill>
-            <a:srgbClr val="FFFFFF"/>
-          </a:solidFill>
-          <a:ln w="12700">
-            <a:solidFill>
-              <a:srgbClr val="CBD5E1"/>
-            </a:solidFill>
-          </a:ln>
-          <a:effectLst/>
-        </p:spPr>
-        <p:style>
-          <a:lnRef idx="1">
-            <a:schemeClr val="accent1"/>
-          </a:lnRef>
-          <a:fillRef idx="3">
-            <a:schemeClr val="accent1"/>
-          </a:fillRef>
-          <a:effectRef idx="2">
-            <a:schemeClr val="accent1"/>
-          </a:effectRef>
-          <a:fontRef idx="minor">
-            <a:schemeClr val="lt1"/>
-          </a:fontRef>
-        </p:style>
-        <p:txBody>
-          <a:bodyPr rtlCol="0" anchor="ctr"/>
-          <a:lstStyle/>
-          <a:p>
-            <a:pPr algn="ctr"/>
-          </a:p>
-        </p:txBody>
-      </p:sp>
-      <p:sp>
-        <p:nvSpPr>
-          <p:cNvPr id="18" name="TextBox 17"/>
-          <p:cNvSpPr txBox="1"/>
-          <p:nvPr/>
-        </p:nvSpPr>
-        <p:spPr>
-          <a:xfrm>
-            <a:off x="8229600" y="2331720"/>
-            <a:ext cx="3383280" cy="640080"/>
-          </a:xfrm>
-          <a:prstGeom prst="rect">
-            <a:avLst/>
-          </a:prstGeom>
-          <a:noFill/>
-        </p:spPr>
-        <p:txBody>
-          <a:bodyPr wrap="square">
-            <a:spAutoFit/>
-          </a:bodyPr>
-          <a:lstStyle/>
-          <a:p>
-            <a:pPr algn="ctr"/>
-            <a:r>
-              <a:rPr sz="2600" b="1" i="0">
-                <a:solidFill>
-                  <a:srgbClr val="06B6D4"/>
-                </a:solidFill>
-                <a:latin typeface="Inter"/>
-              </a:rPr>
-              <a:t>SecantusDB</a:t>
-            </a:r>
-          </a:p>
-        </p:txBody>
-      </p:sp>
-      <p:sp>
-        <p:nvSpPr>
-          <p:cNvPr id="19" name="TextBox 18"/>
-          <p:cNvSpPr txBox="1"/>
-          <p:nvPr/>
-        </p:nvSpPr>
-        <p:spPr>
-          <a:xfrm>
-            <a:off x="8229600" y="3017520"/>
-            <a:ext cx="3383280" cy="365760"/>
-          </a:xfrm>
-          <a:prstGeom prst="rect">
-            <a:avLst/>
-          </a:prstGeom>
-          <a:noFill/>
-        </p:spPr>
-        <p:txBody>
-          <a:bodyPr wrap="square">
-            <a:spAutoFit/>
-          </a:bodyPr>
-          <a:lstStyle/>
-          <a:p>
-            <a:pPr algn="ctr"/>
-            <a:r>
-              <a:rPr sz="1300" b="1" i="0">
-                <a:solidFill>
-                  <a:srgbClr val="22D3EE"/>
-                </a:solidFill>
-                <a:latin typeface="Inter"/>
-              </a:rPr>
-              <a:t>today</a:t>
-            </a:r>
-          </a:p>
-        </p:txBody>
-      </p:sp>
-      <p:sp>
-        <p:nvSpPr>
-          <p:cNvPr id="20" name="TextBox 19"/>
-          <p:cNvSpPr txBox="1"/>
-          <p:nvPr/>
-        </p:nvSpPr>
-        <p:spPr>
-          <a:xfrm>
-            <a:off x="8503920" y="3474720"/>
-            <a:ext cx="2834640" cy="822960"/>
-          </a:xfrm>
-          <a:prstGeom prst="rect">
-            <a:avLst/>
-          </a:prstGeom>
-          <a:noFill/>
-        </p:spPr>
-        <p:txBody>
-          <a:bodyPr wrap="square">
-            <a:spAutoFit/>
-          </a:bodyPr>
-          <a:lstStyle/>
-          <a:p>
-            <a:pPr algn="ctr"/>
-            <a:r>
-              <a:rPr sz="1400" b="0" i="0">
-                <a:solidFill>
-                  <a:srgbClr val="64748B"/>
-                </a:solidFill>
-                <a:latin typeface="Inter"/>
-              </a:rPr>
-              <a:t>avoids Fongo and MongoDB confusion</a:t>
-            </a:r>
-          </a:p>
-        </p:txBody>
-      </p:sp>
-      <p:sp>
-        <p:nvSpPr>
-          <p:cNvPr id="21" name="Rounded Rectangle 20">
-            <a:hlinkClick action="ppaction://hlinksldjump" r:id="rId2"/>
+              <a:t>NOT ONLY EMBEDDED</a:t>
+            </a:r>
+          </a:p>
+        </p:txBody>
+      </p:sp>
+      <p:pic>
+        <p:nvPicPr>
+          <p:cNvPr id="7" name="Picture 6" descr="ecosystem_3.png"/>
+          <p:cNvPicPr>
+            <a:picLocks noChangeAspect="1"/>
+          </p:cNvPicPr>
+          <p:nvPr/>
+        </p:nvPicPr>
+        <p:blipFill>
+          <a:blip r:embed="rId2">
+            <a:extLst>
+              <a:ext uri="{96DAC541-7B7A-43D3-8B79-37D633B846F1}">
+                <ns0:svgBlip xmlns:ns0="http://schemas.microsoft.com/office/drawing/2016/SVG/main" r:embed="rId3"/>
+              </a:ext>
+            </a:extLst>
+          </a:blip>
+          <a:stretch>
+            <a:fillRect/>
+          </a:stretch>
+        </p:blipFill>
+        <p:spPr>
+          <a:xfrm>
+            <a:off x="746607" y="1417320"/>
+            <a:ext cx="10698480" cy="4190237"/>
+          </a:xfrm>
+          <a:prstGeom prst="rect">
+            <a:avLst/>
+          </a:prstGeom>
+        </p:spPr>
+      </p:pic>
+      <p:sp>
+        <p:nvSpPr>
+          <p:cNvPr id="8" name="Rounded Rectangle 7">
+            <a:hlinkClick action="ppaction://hlinksldjump" r:id="rId4"/>
           </p:cNvPr>
           <p:cNvSpPr/>
           <p:nvPr/>
@@ -25590,6 +25893,50 @@
             <a:avLst/>
           </a:prstGeom>
           <a:solidFill>
+            <a:srgbClr val="F8FAFC"/>
+          </a:solidFill>
+          <a:ln>
+            <a:noFill/>
+          </a:ln>
+          <a:effectLst/>
+        </p:spPr>
+        <p:style>
+          <a:lnRef idx="1">
+            <a:schemeClr val="accent1"/>
+          </a:lnRef>
+          <a:fillRef idx="3">
+            <a:schemeClr val="accent1"/>
+          </a:fillRef>
+          <a:effectRef idx="2">
+            <a:schemeClr val="accent1"/>
+          </a:effectRef>
+          <a:fontRef idx="minor">
+            <a:schemeClr val="lt1"/>
+          </a:fontRef>
+        </p:style>
+        <p:txBody>
+          <a:bodyPr rtlCol="0" anchor="ctr"/>
+          <a:lstStyle/>
+          <a:p>
+            <a:pPr algn="ctr"/>
+          </a:p>
+        </p:txBody>
+      </p:sp>
+      <p:sp>
+        <p:nvSpPr>
+          <p:cNvPr id="3" name="Rectangle 2"/>
+          <p:cNvSpPr/>
+          <p:nvPr/>
+        </p:nvSpPr>
+        <p:spPr>
+          <a:xfrm>
+            <a:off x="0" y="0"/>
+            <a:ext cx="12191695" cy="1024128"/>
+          </a:xfrm>
+          <a:prstGeom prst="rect">
+            <a:avLst/>
+          </a:prstGeom>
+          <a:solidFill>
             <a:srgbClr val="0F172A"/>
           </a:solidFill>
           <a:ln>
@@ -25621,14 +25968,14 @@
       </p:sp>
       <p:sp>
         <p:nvSpPr>
-          <p:cNvPr id="3" name="Rectangle 2"/>
+          <p:cNvPr id="4" name="Rectangle 3"/>
           <p:cNvSpPr/>
           <p:nvPr/>
         </p:nvSpPr>
         <p:spPr>
           <a:xfrm>
-            <a:off x="822960" y="2468880"/>
-            <a:ext cx="146304" cy="1554480"/>
+            <a:off x="0" y="1024128"/>
+            <a:ext cx="12191695" cy="50800"/>
           </a:xfrm>
           <a:prstGeom prst="rect">
             <a:avLst/>
@@ -25665,14 +26012,14 @@
       </p:sp>
       <p:sp>
         <p:nvSpPr>
-          <p:cNvPr id="4" name="TextBox 3"/>
+          <p:cNvPr id="5" name="TextBox 4"/>
           <p:cNvSpPr txBox="1"/>
           <p:nvPr/>
         </p:nvSpPr>
         <p:spPr>
           <a:xfrm>
-            <a:off x="1143000" y="2286000"/>
-            <a:ext cx="10058400" cy="640080"/>
+            <a:off x="548640" y="146304"/>
+            <a:ext cx="10972800" cy="713232"/>
           </a:xfrm>
           <a:prstGeom prst="rect">
             <a:avLst/>
@@ -25687,27 +26034,27 @@
           <a:p>
             <a:pPr algn="l"/>
             <a:r>
-              <a:rPr sz="1600" b="1" i="0">
-                <a:solidFill>
-                  <a:srgbClr val="22D3EE"/>
-                </a:solidFill>
-                <a:latin typeface="Inter"/>
-              </a:rPr>
-              <a:t>PART 2</a:t>
-            </a:r>
-          </a:p>
-        </p:txBody>
-      </p:sp>
-      <p:sp>
-        <p:nvSpPr>
-          <p:cNvPr id="5" name="TextBox 4"/>
+              <a:rPr sz="3000" b="1" i="0">
+                <a:solidFill>
+                  <a:srgbClr val="FFFFFF"/>
+                </a:solidFill>
+                <a:latin typeface="Inter"/>
+              </a:rPr>
+              <a:t>A quick word on the name</a:t>
+            </a:r>
+          </a:p>
+        </p:txBody>
+      </p:sp>
+      <p:sp>
+        <p:nvSpPr>
+          <p:cNvPr id="6" name="TextBox 5"/>
           <p:cNvSpPr txBox="1"/>
           <p:nvPr/>
         </p:nvSpPr>
         <p:spPr>
           <a:xfrm>
-            <a:off x="1143000" y="2743200"/>
-            <a:ext cx="10241280" cy="1280160"/>
+            <a:off x="576072" y="749808"/>
+            <a:ext cx="10972800" cy="274320"/>
           </a:xfrm>
           <a:prstGeom prst="rect">
             <a:avLst/>
@@ -25722,27 +26069,73 @@
           <a:p>
             <a:pPr algn="l"/>
             <a:r>
-              <a:rPr sz="4000" b="1" i="0">
-                <a:solidFill>
-                  <a:srgbClr val="FFFFFF"/>
-                </a:solidFill>
-                <a:latin typeface="Inter"/>
-              </a:rPr>
-              <a:t>Design philosophy</a:t>
-            </a:r>
-          </a:p>
-        </p:txBody>
-      </p:sp>
-      <p:sp>
-        <p:nvSpPr>
-          <p:cNvPr id="6" name="TextBox 5"/>
+              <a:rPr sz="1200" b="0" i="0">
+                <a:solidFill>
+                  <a:srgbClr val="22D3EE"/>
+                </a:solidFill>
+                <a:latin typeface="Inter"/>
+              </a:rPr>
+              <a:t>fongo → fongodb → SecantusDB</a:t>
+            </a:r>
+          </a:p>
+        </p:txBody>
+      </p:sp>
+      <p:sp>
+        <p:nvSpPr>
+          <p:cNvPr id="7" name="Rectangle 6"/>
+          <p:cNvSpPr/>
+          <p:nvPr/>
+        </p:nvSpPr>
+        <p:spPr>
+          <a:xfrm>
+            <a:off x="640080" y="2103120"/>
+            <a:ext cx="3383280" cy="2286000"/>
+          </a:xfrm>
+          <a:prstGeom prst="rect">
+            <a:avLst/>
+          </a:prstGeom>
+          <a:solidFill>
+            <a:srgbClr val="FFFFFF"/>
+          </a:solidFill>
+          <a:ln w="12700">
+            <a:solidFill>
+              <a:srgbClr val="CBD5E1"/>
+            </a:solidFill>
+          </a:ln>
+          <a:effectLst/>
+        </p:spPr>
+        <p:style>
+          <a:lnRef idx="1">
+            <a:schemeClr val="accent1"/>
+          </a:lnRef>
+          <a:fillRef idx="3">
+            <a:schemeClr val="accent1"/>
+          </a:fillRef>
+          <a:effectRef idx="2">
+            <a:schemeClr val="accent1"/>
+          </a:effectRef>
+          <a:fontRef idx="minor">
+            <a:schemeClr val="lt1"/>
+          </a:fontRef>
+        </p:style>
+        <p:txBody>
+          <a:bodyPr rtlCol="0" anchor="ctr"/>
+          <a:lstStyle/>
+          <a:p>
+            <a:pPr algn="ctr"/>
+          </a:p>
+        </p:txBody>
+      </p:sp>
+      <p:sp>
+        <p:nvSpPr>
+          <p:cNvPr id="8" name="TextBox 7"/>
           <p:cNvSpPr txBox="1"/>
           <p:nvPr/>
         </p:nvSpPr>
         <p:spPr>
           <a:xfrm>
-            <a:off x="1161288" y="3840480"/>
-            <a:ext cx="10058400" cy="731520"/>
+            <a:off x="640080" y="2331720"/>
+            <a:ext cx="3383280" cy="640080"/>
           </a:xfrm>
           <a:prstGeom prst="rect">
             <a:avLst/>
@@ -25755,22 +26148,464 @@
           </a:bodyPr>
           <a:lstStyle/>
           <a:p>
-            <a:pPr algn="l"/>
-            <a:r>
-              <a:rPr sz="1800" b="0" i="0">
+            <a:pPr algn="ctr"/>
+            <a:r>
+              <a:rPr sz="2600" b="1" i="0">
+                <a:solidFill>
+                  <a:srgbClr val="0E7490"/>
+                </a:solidFill>
+                <a:latin typeface="Inter"/>
+              </a:rPr>
+              <a:t>fongo</a:t>
+            </a:r>
+          </a:p>
+        </p:txBody>
+      </p:sp>
+      <p:sp>
+        <p:nvSpPr>
+          <p:cNvPr id="9" name="TextBox 8"/>
+          <p:cNvSpPr txBox="1"/>
+          <p:nvPr/>
+        </p:nvSpPr>
+        <p:spPr>
+          <a:xfrm>
+            <a:off x="640080" y="3017520"/>
+            <a:ext cx="3383280" cy="365760"/>
+          </a:xfrm>
+          <a:prstGeom prst="rect">
+            <a:avLst/>
+          </a:prstGeom>
+          <a:noFill/>
+        </p:spPr>
+        <p:txBody>
+          <a:bodyPr wrap="square">
+            <a:spAutoFit/>
+          </a:bodyPr>
+          <a:lstStyle/>
+          <a:p>
+            <a:pPr algn="ctr"/>
+            <a:r>
+              <a:rPr sz="1300" b="1" i="0">
+                <a:solidFill>
+                  <a:srgbClr val="22D3EE"/>
+                </a:solidFill>
+                <a:latin typeface="Inter"/>
+              </a:rPr>
+              <a:t>early prototype</a:t>
+            </a:r>
+          </a:p>
+        </p:txBody>
+      </p:sp>
+      <p:sp>
+        <p:nvSpPr>
+          <p:cNvPr id="10" name="TextBox 9"/>
+          <p:cNvSpPr txBox="1"/>
+          <p:nvPr/>
+        </p:nvSpPr>
+        <p:spPr>
+          <a:xfrm>
+            <a:off x="914400" y="3474720"/>
+            <a:ext cx="2834640" cy="822960"/>
+          </a:xfrm>
+          <a:prstGeom prst="rect">
+            <a:avLst/>
+          </a:prstGeom>
+          <a:noFill/>
+        </p:spPr>
+        <p:txBody>
+          <a:bodyPr wrap="square">
+            <a:spAutoFit/>
+          </a:bodyPr>
+          <a:lstStyle/>
+          <a:p>
+            <a:pPr algn="ctr"/>
+            <a:r>
+              <a:rPr sz="1400" b="0" i="0">
+                <a:solidFill>
+                  <a:srgbClr val="64748B"/>
+                </a:solidFill>
+                <a:latin typeface="Inter"/>
+              </a:rPr>
+              <a:t>clashes with the “Fongo” brand</a:t>
+            </a:r>
+          </a:p>
+        </p:txBody>
+      </p:sp>
+      <p:sp>
+        <p:nvSpPr>
+          <p:cNvPr id="11" name="TextBox 10"/>
+          <p:cNvSpPr txBox="1"/>
+          <p:nvPr/>
+        </p:nvSpPr>
+        <p:spPr>
+          <a:xfrm>
+            <a:off x="3886200" y="2926080"/>
+            <a:ext cx="640080" cy="548640"/>
+          </a:xfrm>
+          <a:prstGeom prst="rect">
+            <a:avLst/>
+          </a:prstGeom>
+          <a:noFill/>
+        </p:spPr>
+        <p:txBody>
+          <a:bodyPr wrap="square">
+            <a:spAutoFit/>
+          </a:bodyPr>
+          <a:lstStyle/>
+          <a:p>
+            <a:pPr algn="ctr"/>
+            <a:r>
+              <a:rPr sz="3000" b="1" i="0">
                 <a:solidFill>
                   <a:srgbClr val="CBD5E1"/>
                 </a:solidFill>
                 <a:latin typeface="Inter"/>
               </a:rPr>
-              <a:t>The rules that keep it honest</a:t>
-            </a:r>
-          </a:p>
-        </p:txBody>
-      </p:sp>
-      <p:sp>
-        <p:nvSpPr>
-          <p:cNvPr id="7" name="Rounded Rectangle 6">
+              <a:t>→</a:t>
+            </a:r>
+          </a:p>
+        </p:txBody>
+      </p:sp>
+      <p:sp>
+        <p:nvSpPr>
+          <p:cNvPr id="12" name="Rectangle 11"/>
+          <p:cNvSpPr/>
+          <p:nvPr/>
+        </p:nvSpPr>
+        <p:spPr>
+          <a:xfrm>
+            <a:off x="4434840" y="2103120"/>
+            <a:ext cx="3383280" cy="2286000"/>
+          </a:xfrm>
+          <a:prstGeom prst="rect">
+            <a:avLst/>
+          </a:prstGeom>
+          <a:solidFill>
+            <a:srgbClr val="FFFFFF"/>
+          </a:solidFill>
+          <a:ln w="12700">
+            <a:solidFill>
+              <a:srgbClr val="CBD5E1"/>
+            </a:solidFill>
+          </a:ln>
+          <a:effectLst/>
+        </p:spPr>
+        <p:style>
+          <a:lnRef idx="1">
+            <a:schemeClr val="accent1"/>
+          </a:lnRef>
+          <a:fillRef idx="3">
+            <a:schemeClr val="accent1"/>
+          </a:fillRef>
+          <a:effectRef idx="2">
+            <a:schemeClr val="accent1"/>
+          </a:effectRef>
+          <a:fontRef idx="minor">
+            <a:schemeClr val="lt1"/>
+          </a:fontRef>
+        </p:style>
+        <p:txBody>
+          <a:bodyPr rtlCol="0" anchor="ctr"/>
+          <a:lstStyle/>
+          <a:p>
+            <a:pPr algn="ctr"/>
+          </a:p>
+        </p:txBody>
+      </p:sp>
+      <p:sp>
+        <p:nvSpPr>
+          <p:cNvPr id="13" name="TextBox 12"/>
+          <p:cNvSpPr txBox="1"/>
+          <p:nvPr/>
+        </p:nvSpPr>
+        <p:spPr>
+          <a:xfrm>
+            <a:off x="4434840" y="2331720"/>
+            <a:ext cx="3383280" cy="640080"/>
+          </a:xfrm>
+          <a:prstGeom prst="rect">
+            <a:avLst/>
+          </a:prstGeom>
+          <a:noFill/>
+        </p:spPr>
+        <p:txBody>
+          <a:bodyPr wrap="square">
+            <a:spAutoFit/>
+          </a:bodyPr>
+          <a:lstStyle/>
+          <a:p>
+            <a:pPr algn="ctr"/>
+            <a:r>
+              <a:rPr sz="2600" b="1" i="0">
+                <a:solidFill>
+                  <a:srgbClr val="0E7490"/>
+                </a:solidFill>
+                <a:latin typeface="Inter"/>
+              </a:rPr>
+              <a:t>fongodb</a:t>
+            </a:r>
+          </a:p>
+        </p:txBody>
+      </p:sp>
+      <p:sp>
+        <p:nvSpPr>
+          <p:cNvPr id="14" name="TextBox 13"/>
+          <p:cNvSpPr txBox="1"/>
+          <p:nvPr/>
+        </p:nvSpPr>
+        <p:spPr>
+          <a:xfrm>
+            <a:off x="4434840" y="3017520"/>
+            <a:ext cx="3383280" cy="365760"/>
+          </a:xfrm>
+          <a:prstGeom prst="rect">
+            <a:avLst/>
+          </a:prstGeom>
+          <a:noFill/>
+        </p:spPr>
+        <p:txBody>
+          <a:bodyPr wrap="square">
+            <a:spAutoFit/>
+          </a:bodyPr>
+          <a:lstStyle/>
+          <a:p>
+            <a:pPr algn="ctr"/>
+            <a:r>
+              <a:rPr sz="1300" b="1" i="0">
+                <a:solidFill>
+                  <a:srgbClr val="22D3EE"/>
+                </a:solidFill>
+                <a:latin typeface="Inter"/>
+              </a:rPr>
+              <a:t>follow-on</a:t>
+            </a:r>
+          </a:p>
+        </p:txBody>
+      </p:sp>
+      <p:sp>
+        <p:nvSpPr>
+          <p:cNvPr id="15" name="TextBox 14"/>
+          <p:cNvSpPr txBox="1"/>
+          <p:nvPr/>
+        </p:nvSpPr>
+        <p:spPr>
+          <a:xfrm>
+            <a:off x="4709160" y="3474720"/>
+            <a:ext cx="2834640" cy="822960"/>
+          </a:xfrm>
+          <a:prstGeom prst="rect">
+            <a:avLst/>
+          </a:prstGeom>
+          <a:noFill/>
+        </p:spPr>
+        <p:txBody>
+          <a:bodyPr wrap="square">
+            <a:spAutoFit/>
+          </a:bodyPr>
+          <a:lstStyle/>
+          <a:p>
+            <a:pPr algn="ctr"/>
+            <a:r>
+              <a:rPr sz="1400" b="0" i="0">
+                <a:solidFill>
+                  <a:srgbClr val="64748B"/>
+                </a:solidFill>
+                <a:latin typeface="Inter"/>
+              </a:rPr>
+              <a:t>still brand-adjacent / confusing</a:t>
+            </a:r>
+          </a:p>
+        </p:txBody>
+      </p:sp>
+      <p:sp>
+        <p:nvSpPr>
+          <p:cNvPr id="16" name="TextBox 15"/>
+          <p:cNvSpPr txBox="1"/>
+          <p:nvPr/>
+        </p:nvSpPr>
+        <p:spPr>
+          <a:xfrm>
+            <a:off x="7680960" y="2926080"/>
+            <a:ext cx="640080" cy="548640"/>
+          </a:xfrm>
+          <a:prstGeom prst="rect">
+            <a:avLst/>
+          </a:prstGeom>
+          <a:noFill/>
+        </p:spPr>
+        <p:txBody>
+          <a:bodyPr wrap="square">
+            <a:spAutoFit/>
+          </a:bodyPr>
+          <a:lstStyle/>
+          <a:p>
+            <a:pPr algn="ctr"/>
+            <a:r>
+              <a:rPr sz="3000" b="1" i="0">
+                <a:solidFill>
+                  <a:srgbClr val="CBD5E1"/>
+                </a:solidFill>
+                <a:latin typeface="Inter"/>
+              </a:rPr>
+              <a:t>→</a:t>
+            </a:r>
+          </a:p>
+        </p:txBody>
+      </p:sp>
+      <p:sp>
+        <p:nvSpPr>
+          <p:cNvPr id="17" name="Rectangle 16"/>
+          <p:cNvSpPr/>
+          <p:nvPr/>
+        </p:nvSpPr>
+        <p:spPr>
+          <a:xfrm>
+            <a:off x="8229600" y="2103120"/>
+            <a:ext cx="3383280" cy="2286000"/>
+          </a:xfrm>
+          <a:prstGeom prst="rect">
+            <a:avLst/>
+          </a:prstGeom>
+          <a:solidFill>
+            <a:srgbClr val="FFFFFF"/>
+          </a:solidFill>
+          <a:ln w="12700">
+            <a:solidFill>
+              <a:srgbClr val="CBD5E1"/>
+            </a:solidFill>
+          </a:ln>
+          <a:effectLst/>
+        </p:spPr>
+        <p:style>
+          <a:lnRef idx="1">
+            <a:schemeClr val="accent1"/>
+          </a:lnRef>
+          <a:fillRef idx="3">
+            <a:schemeClr val="accent1"/>
+          </a:fillRef>
+          <a:effectRef idx="2">
+            <a:schemeClr val="accent1"/>
+          </a:effectRef>
+          <a:fontRef idx="minor">
+            <a:schemeClr val="lt1"/>
+          </a:fontRef>
+        </p:style>
+        <p:txBody>
+          <a:bodyPr rtlCol="0" anchor="ctr"/>
+          <a:lstStyle/>
+          <a:p>
+            <a:pPr algn="ctr"/>
+          </a:p>
+        </p:txBody>
+      </p:sp>
+      <p:sp>
+        <p:nvSpPr>
+          <p:cNvPr id="18" name="TextBox 17"/>
+          <p:cNvSpPr txBox="1"/>
+          <p:nvPr/>
+        </p:nvSpPr>
+        <p:spPr>
+          <a:xfrm>
+            <a:off x="8229600" y="2331720"/>
+            <a:ext cx="3383280" cy="640080"/>
+          </a:xfrm>
+          <a:prstGeom prst="rect">
+            <a:avLst/>
+          </a:prstGeom>
+          <a:noFill/>
+        </p:spPr>
+        <p:txBody>
+          <a:bodyPr wrap="square">
+            <a:spAutoFit/>
+          </a:bodyPr>
+          <a:lstStyle/>
+          <a:p>
+            <a:pPr algn="ctr"/>
+            <a:r>
+              <a:rPr sz="2600" b="1" i="0">
+                <a:solidFill>
+                  <a:srgbClr val="06B6D4"/>
+                </a:solidFill>
+                <a:latin typeface="Inter"/>
+              </a:rPr>
+              <a:t>SecantusDB</a:t>
+            </a:r>
+          </a:p>
+        </p:txBody>
+      </p:sp>
+      <p:sp>
+        <p:nvSpPr>
+          <p:cNvPr id="19" name="TextBox 18"/>
+          <p:cNvSpPr txBox="1"/>
+          <p:nvPr/>
+        </p:nvSpPr>
+        <p:spPr>
+          <a:xfrm>
+            <a:off x="8229600" y="3017520"/>
+            <a:ext cx="3383280" cy="365760"/>
+          </a:xfrm>
+          <a:prstGeom prst="rect">
+            <a:avLst/>
+          </a:prstGeom>
+          <a:noFill/>
+        </p:spPr>
+        <p:txBody>
+          <a:bodyPr wrap="square">
+            <a:spAutoFit/>
+          </a:bodyPr>
+          <a:lstStyle/>
+          <a:p>
+            <a:pPr algn="ctr"/>
+            <a:r>
+              <a:rPr sz="1300" b="1" i="0">
+                <a:solidFill>
+                  <a:srgbClr val="22D3EE"/>
+                </a:solidFill>
+                <a:latin typeface="Inter"/>
+              </a:rPr>
+              <a:t>today</a:t>
+            </a:r>
+          </a:p>
+        </p:txBody>
+      </p:sp>
+      <p:sp>
+        <p:nvSpPr>
+          <p:cNvPr id="20" name="TextBox 19"/>
+          <p:cNvSpPr txBox="1"/>
+          <p:nvPr/>
+        </p:nvSpPr>
+        <p:spPr>
+          <a:xfrm>
+            <a:off x="8503920" y="3474720"/>
+            <a:ext cx="2834640" cy="822960"/>
+          </a:xfrm>
+          <a:prstGeom prst="rect">
+            <a:avLst/>
+          </a:prstGeom>
+          <a:noFill/>
+        </p:spPr>
+        <p:txBody>
+          <a:bodyPr wrap="square">
+            <a:spAutoFit/>
+          </a:bodyPr>
+          <a:lstStyle/>
+          <a:p>
+            <a:pPr algn="ctr"/>
+            <a:r>
+              <a:rPr sz="1400" b="0" i="0">
+                <a:solidFill>
+                  <a:srgbClr val="64748B"/>
+                </a:solidFill>
+                <a:latin typeface="Inter"/>
+              </a:rPr>
+              <a:t>avoids Fongo and MongoDB confusion</a:t>
+            </a:r>
+          </a:p>
+        </p:txBody>
+      </p:sp>
+      <p:sp>
+        <p:nvSpPr>
+          <p:cNvPr id="21" name="Rounded Rectangle 20">
             <a:hlinkClick action="ppaction://hlinksldjump" r:id="rId2"/>
           </p:cNvPr>
           <p:cNvSpPr/>
@@ -25856,50 +26691,6 @@
             <a:avLst/>
           </a:prstGeom>
           <a:solidFill>
-            <a:srgbClr val="F8FAFC"/>
-          </a:solidFill>
-          <a:ln>
-            <a:noFill/>
-          </a:ln>
-          <a:effectLst/>
-        </p:spPr>
-        <p:style>
-          <a:lnRef idx="1">
-            <a:schemeClr val="accent1"/>
-          </a:lnRef>
-          <a:fillRef idx="3">
-            <a:schemeClr val="accent1"/>
-          </a:fillRef>
-          <a:effectRef idx="2">
-            <a:schemeClr val="accent1"/>
-          </a:effectRef>
-          <a:fontRef idx="minor">
-            <a:schemeClr val="lt1"/>
-          </a:fontRef>
-        </p:style>
-        <p:txBody>
-          <a:bodyPr rtlCol="0" anchor="ctr"/>
-          <a:lstStyle/>
-          <a:p>
-            <a:pPr algn="ctr"/>
-          </a:p>
-        </p:txBody>
-      </p:sp>
-      <p:sp>
-        <p:nvSpPr>
-          <p:cNvPr id="3" name="Rectangle 2"/>
-          <p:cNvSpPr/>
-          <p:nvPr/>
-        </p:nvSpPr>
-        <p:spPr>
-          <a:xfrm>
-            <a:off x="0" y="0"/>
-            <a:ext cx="12191695" cy="1024128"/>
-          </a:xfrm>
-          <a:prstGeom prst="rect">
-            <a:avLst/>
-          </a:prstGeom>
-          <a:solidFill>
             <a:srgbClr val="0F172A"/>
           </a:solidFill>
           <a:ln>
@@ -25931,14 +26722,14 @@
       </p:sp>
       <p:sp>
         <p:nvSpPr>
-          <p:cNvPr id="4" name="Rectangle 3"/>
+          <p:cNvPr id="3" name="Rectangle 2"/>
           <p:cNvSpPr/>
           <p:nvPr/>
         </p:nvSpPr>
         <p:spPr>
           <a:xfrm>
-            <a:off x="0" y="1024128"/>
-            <a:ext cx="12191695" cy="50800"/>
+            <a:off x="822960" y="2468880"/>
+            <a:ext cx="146304" cy="1554480"/>
           </a:xfrm>
           <a:prstGeom prst="rect">
             <a:avLst/>
@@ -25975,14 +26766,14 @@
       </p:sp>
       <p:sp>
         <p:nvSpPr>
-          <p:cNvPr id="5" name="TextBox 4"/>
+          <p:cNvPr id="4" name="TextBox 3"/>
           <p:cNvSpPr txBox="1"/>
           <p:nvPr/>
         </p:nvSpPr>
         <p:spPr>
           <a:xfrm>
-            <a:off x="548640" y="146304"/>
-            <a:ext cx="10972800" cy="713232"/>
+            <a:off x="1143000" y="2286000"/>
+            <a:ext cx="10058400" cy="640080"/>
           </a:xfrm>
           <a:prstGeom prst="rect">
             <a:avLst/>
@@ -25997,27 +26788,27 @@
           <a:p>
             <a:pPr algn="l"/>
             <a:r>
-              <a:rPr sz="3000" b="1" i="0">
-                <a:solidFill>
-                  <a:srgbClr val="FFFFFF"/>
-                </a:solidFill>
-                <a:latin typeface="Inter"/>
-              </a:rPr>
-              <a:t>Three constraints</a:t>
-            </a:r>
-          </a:p>
-        </p:txBody>
-      </p:sp>
-      <p:sp>
-        <p:nvSpPr>
-          <p:cNvPr id="6" name="TextBox 5"/>
+              <a:rPr sz="1600" b="1" i="0">
+                <a:solidFill>
+                  <a:srgbClr val="22D3EE"/>
+                </a:solidFill>
+                <a:latin typeface="Inter"/>
+              </a:rPr>
+              <a:t>PART 2</a:t>
+            </a:r>
+          </a:p>
+        </p:txBody>
+      </p:sp>
+      <p:sp>
+        <p:nvSpPr>
+          <p:cNvPr id="5" name="TextBox 4"/>
           <p:cNvSpPr txBox="1"/>
           <p:nvPr/>
         </p:nvSpPr>
         <p:spPr>
           <a:xfrm>
-            <a:off x="576072" y="749808"/>
-            <a:ext cx="10972800" cy="274320"/>
+            <a:off x="1143000" y="2743200"/>
+            <a:ext cx="10241280" cy="1280160"/>
           </a:xfrm>
           <a:prstGeom prst="rect">
             <a:avLst/>
@@ -26032,27 +26823,27 @@
           <a:p>
             <a:pPr algn="l"/>
             <a:r>
-              <a:rPr sz="1200" b="0" i="0">
-                <a:solidFill>
-                  <a:srgbClr val="22D3EE"/>
-                </a:solidFill>
-                <a:latin typeface="Inter"/>
-              </a:rPr>
-              <a:t>NON-NEGOTIABLES</a:t>
-            </a:r>
-          </a:p>
-        </p:txBody>
-      </p:sp>
-      <p:sp>
-        <p:nvSpPr>
-          <p:cNvPr id="7" name="TextBox 6"/>
+              <a:rPr sz="4000" b="1" i="0">
+                <a:solidFill>
+                  <a:srgbClr val="FFFFFF"/>
+                </a:solidFill>
+                <a:latin typeface="Inter"/>
+              </a:rPr>
+              <a:t>Design philosophy</a:t>
+            </a:r>
+          </a:p>
+        </p:txBody>
+      </p:sp>
+      <p:sp>
+        <p:nvSpPr>
+          <p:cNvPr id="6" name="TextBox 5"/>
           <p:cNvSpPr txBox="1"/>
           <p:nvPr/>
         </p:nvSpPr>
         <p:spPr>
           <a:xfrm>
-            <a:off x="777240" y="1554480"/>
-            <a:ext cx="10607040" cy="4572000"/>
+            <a:off x="1161288" y="3840480"/>
+            <a:ext cx="10058400" cy="731520"/>
           </a:xfrm>
           <a:prstGeom prst="rect">
             <a:avLst/>
@@ -26065,94 +26856,22 @@
           </a:bodyPr>
           <a:lstStyle/>
           <a:p>
-            <a:pPr>
-              <a:lnSpc>
-                <a:spcPct val="104000"/>
-              </a:lnSpc>
-              <a:spcAft>
-                <a:spcPts val="2000"/>
-              </a:spcAft>
-            </a:pPr>
-            <a:r>
-              <a:rPr sz="2800" b="1">
-                <a:solidFill>
-                  <a:srgbClr val="06B6D4"/>
-                </a:solidFill>
-                <a:latin typeface="Inter"/>
-              </a:rPr>
-              <a:t>▪  </a:t>
-            </a:r>
-            <a:r>
-              <a:rPr sz="2800" b="1">
-                <a:solidFill>
-                  <a:srgbClr val="0F172A"/>
-                </a:solidFill>
-                <a:latin typeface="Inter"/>
-              </a:rPr>
-              <a:t>A real driver can't tell us apart from mongod</a:t>
-            </a:r>
-          </a:p>
-          <a:p>
-            <a:pPr>
-              <a:lnSpc>
-                <a:spcPct val="104000"/>
-              </a:lnSpc>
-              <a:spcAft>
-                <a:spcPts val="2000"/>
-              </a:spcAft>
-            </a:pPr>
-            <a:r>
-              <a:rPr sz="2800" b="1">
-                <a:solidFill>
-                  <a:srgbClr val="06B6D4"/>
-                </a:solidFill>
-                <a:latin typeface="Inter"/>
-              </a:rPr>
-              <a:t>▪  </a:t>
-            </a:r>
-            <a:r>
-              <a:rPr sz="2800" b="1">
-                <a:solidFill>
-                  <a:srgbClr val="0F172A"/>
-                </a:solidFill>
-                <a:latin typeface="Inter"/>
-              </a:rPr>
-              <a:t>Wire fidelity over feature completeness</a:t>
-            </a:r>
-          </a:p>
-          <a:p>
-            <a:pPr>
-              <a:lnSpc>
-                <a:spcPct val="104000"/>
-              </a:lnSpc>
-              <a:spcAft>
-                <a:spcPts val="2000"/>
-              </a:spcAft>
-            </a:pPr>
-            <a:r>
-              <a:rPr sz="2800" b="1">
-                <a:solidFill>
-                  <a:srgbClr val="06B6D4"/>
-                </a:solidFill>
-                <a:latin typeface="Inter"/>
-              </a:rPr>
-              <a:t>▪  </a:t>
-            </a:r>
-            <a:r>
-              <a:rPr sz="2800" b="1">
-                <a:solidFill>
-                  <a:srgbClr val="0F172A"/>
-                </a:solidFill>
-                <a:latin typeface="Inter"/>
-              </a:rPr>
-              <a:t>Trivial to embed — one or two lines</a:t>
-            </a:r>
-          </a:p>
-        </p:txBody>
-      </p:sp>
-      <p:sp>
-        <p:nvSpPr>
-          <p:cNvPr id="8" name="Rounded Rectangle 7">
+            <a:pPr algn="l"/>
+            <a:r>
+              <a:rPr sz="1800" b="0" i="0">
+                <a:solidFill>
+                  <a:srgbClr val="CBD5E1"/>
+                </a:solidFill>
+                <a:latin typeface="Inter"/>
+              </a:rPr>
+              <a:t>The rules that keep it honest</a:t>
+            </a:r>
+          </a:p>
+        </p:txBody>
+      </p:sp>
+      <p:sp>
+        <p:nvSpPr>
+          <p:cNvPr id="7" name="Rounded Rectangle 6">
             <a:hlinkClick action="ppaction://hlinksldjump" r:id="rId2"/>
           </p:cNvPr>
           <p:cNvSpPr/>
